--- a/reports/seminar_poster/Agri_Vision_Seminar_Poster_A1.pptx
+++ b/reports/seminar_poster/Agri_Vision_Seminar_Poster_A1.pptx
@@ -105,231 +105,6 @@
     </a:lvl9pPr>
   </p:defaultTextStyle>
 </p:presentation>
-</file>
-
-<file path=ppt/charts/chart1.xml><?xml version="1.0" encoding="utf-8"?>
-<c:chartSpace xmlns:c="http://schemas.openxmlformats.org/drawingml/2006/chart" xmlns:a="http://schemas.openxmlformats.org/drawingml/2006/main" xmlns:r="http://schemas.openxmlformats.org/officeDocument/2006/relationships">
-  <c:date1904 val="0"/>
-  <c:style val="13"/>
-  <c:chart>
-    <c:autoTitleDeleted val="0"/>
-    <c:plotArea>
-      <c:lineChart>
-        <c:grouping val="standard"/>
-        <c:varyColors val="0"/>
-        <c:ser>
-          <c:idx val="0"/>
-          <c:order val="0"/>
-          <c:tx>
-            <c:strRef>
-              <c:f>Sheet1!$B$1</c:f>
-              <c:strCache>
-                <c:ptCount val="1"/>
-                <c:pt idx="0">
-                  <c:v>mAP@50</c:v>
-                </c:pt>
-              </c:strCache>
-            </c:strRef>
-          </c:tx>
-          <c:spPr>
-            <a:ln w="44450">
-              <a:solidFill>
-                <a:srgbClr val="173F32"/>
-              </a:solidFill>
-            </a:ln>
-          </c:spPr>
-          <c:marker>
-            <c:symbol val="none"/>
-          </c:marker>
-          <c:cat>
-            <c:strRef>
-              <c:f>Sheet1!$A$2:$A$16</c:f>
-              <c:strCache>
-                <c:ptCount val="15"/>
-                <c:pt idx="0">
-                  <c:v>26</c:v>
-                </c:pt>
-                <c:pt idx="1">
-                  <c:v>27</c:v>
-                </c:pt>
-                <c:pt idx="2">
-                  <c:v>28</c:v>
-                </c:pt>
-                <c:pt idx="3">
-                  <c:v>29</c:v>
-                </c:pt>
-                <c:pt idx="4">
-                  <c:v>30</c:v>
-                </c:pt>
-                <c:pt idx="5">
-                  <c:v>31</c:v>
-                </c:pt>
-                <c:pt idx="6">
-                  <c:v>32</c:v>
-                </c:pt>
-                <c:pt idx="7">
-                  <c:v>33</c:v>
-                </c:pt>
-                <c:pt idx="8">
-                  <c:v>34</c:v>
-                </c:pt>
-                <c:pt idx="9">
-                  <c:v>35</c:v>
-                </c:pt>
-                <c:pt idx="10">
-                  <c:v>36</c:v>
-                </c:pt>
-                <c:pt idx="11">
-                  <c:v>37</c:v>
-                </c:pt>
-                <c:pt idx="12">
-                  <c:v>38</c:v>
-                </c:pt>
-                <c:pt idx="13">
-                  <c:v>39</c:v>
-                </c:pt>
-                <c:pt idx="14">
-                  <c:v>40</c:v>
-                </c:pt>
-              </c:strCache>
-            </c:strRef>
-          </c:cat>
-          <c:val>
-            <c:numRef>
-              <c:f>Sheet1!$B$2:$B$16</c:f>
-              <c:numCache>
-                <c:formatCode>General</c:formatCode>
-                <c:ptCount val="15"/>
-                <c:pt idx="0">
-                  <c:v>60.51099814194768</c:v>
-                </c:pt>
-                <c:pt idx="1">
-                  <c:v>61.022304731052834</c:v>
-                </c:pt>
-                <c:pt idx="2">
-                  <c:v>61.11339995455008</c:v>
-                </c:pt>
-                <c:pt idx="3">
-                  <c:v>61.10687344177727</c:v>
-                </c:pt>
-                <c:pt idx="4">
-                  <c:v>60.99842280833301</c:v>
-                </c:pt>
-                <c:pt idx="5">
-                  <c:v>60.96214172670754</c:v>
-                </c:pt>
-                <c:pt idx="6">
-                  <c:v>60.966348366782896</c:v>
-                </c:pt>
-                <c:pt idx="7">
-                  <c:v>61.22303131276997</c:v>
-                </c:pt>
-                <c:pt idx="8">
-                  <c:v>60.2967020954815</c:v>
-                </c:pt>
-                <c:pt idx="9">
-                  <c:v>60.05117692103131</c:v>
-                </c:pt>
-                <c:pt idx="10">
-                  <c:v>61.12247932585863</c:v>
-                </c:pt>
-                <c:pt idx="11">
-                  <c:v>60.23119038192497</c:v>
-                </c:pt>
-                <c:pt idx="12">
-                  <c:v>59.90493199723074</c:v>
-                </c:pt>
-                <c:pt idx="13">
-                  <c:v>59.53794240502505</c:v>
-                </c:pt>
-                <c:pt idx="14">
-                  <c:v>59.54519923724985</c:v>
-                </c:pt>
-              </c:numCache>
-            </c:numRef>
-          </c:val>
-          <c:smooth val="0"/>
-        </c:ser>
-        <c:marker val="1"/>
-        <c:smooth val="0"/>
-        <c:axId val="2118791784"/>
-        <c:axId val="2140495176"/>
-      </c:lineChart>
-      <c:catAx>
-        <c:axId val="2118791784"/>
-        <c:scaling>
-          <c:orientation val="minMax"/>
-        </c:scaling>
-        <c:delete val="0"/>
-        <c:axPos val="b"/>
-        <c:majorTickMark val="out"/>
-        <c:minorTickMark val="none"/>
-        <c:tickLblPos val="nextTo"/>
-        <c:txPr>
-          <a:bodyPr/>
-          <a:lstStyle/>
-          <a:p>
-            <a:pPr>
-              <a:defRPr sz="2000">
-                <a:latin typeface="Aptos"/>
-              </a:defRPr>
-            </a:pPr>
-          </a:p>
-        </c:txPr>
-        <c:crossAx val="2140495176"/>
-        <c:crosses val="autoZero"/>
-        <c:auto val="1"/>
-        <c:lblAlgn val="ctr"/>
-        <c:lblOffset val="100"/>
-        <c:noMultiLvlLbl val="0"/>
-      </c:catAx>
-      <c:valAx>
-        <c:axId val="2140495176"/>
-        <c:scaling>
-          <c:max val="63.0"/>
-          <c:min val="58.0"/>
-        </c:scaling>
-        <c:delete val="0"/>
-        <c:axPos val="l"/>
-        <c:majorGridlines/>
-        <c:numFmt formatCode="0&quot;%&quot;" sourceLinked="0"/>
-        <c:majorTickMark val="out"/>
-        <c:minorTickMark val="none"/>
-        <c:tickLblPos val="nextTo"/>
-        <c:txPr>
-          <a:bodyPr/>
-          <a:lstStyle/>
-          <a:p>
-            <a:pPr>
-              <a:defRPr sz="2000">
-                <a:latin typeface="Aptos"/>
-              </a:defRPr>
-            </a:pPr>
-          </a:p>
-        </c:txPr>
-        <c:crossAx val="2118791784"/>
-        <c:crosses val="autoZero"/>
-        <c:majorUnit val="1.0"/>
-      </c:valAx>
-    </c:plotArea>
-    <c:plotVisOnly val="1"/>
-    <c:dispBlanksAs val="gap"/>
-    <c:showDLblsOverMax val="0"/>
-  </c:chart>
-  <c:txPr>
-    <a:bodyPr/>
-    <a:lstStyle/>
-    <a:p>
-      <a:pPr>
-        <a:defRPr sz="1800"/>
-      </a:pPr>
-      <a:endParaRPr lang="en-US"/>
-    </a:p>
-  </c:txPr>
-  <c:externalData r:id="rId1">
-    <c:autoUpdate val="0"/>
-  </c:externalData>
-</c:chartSpace>
 </file>
 
 <file path=ppt/slideLayouts/slideLayout1.xml><?xml version="1.0" encoding="utf-8"?>
@@ -3309,7 +3084,7 @@
     <p:bg>
       <p:bgPr>
         <a:solidFill>
-          <a:srgbClr val="F7F5ED"/>
+          <a:srgbClr val="FFFFFF"/>
         </a:solidFill>
         <a:effectLst/>
       </p:bgPr>
@@ -3321,40 +3096,16 @@
         <p:nvPr/>
       </p:nvGrpSpPr>
       <p:grpSpPr/>
-      <p:pic>
-        <p:nvPicPr>
-          <p:cNvPr id="2" name="Picture 1" descr="crop_illustration.png"/>
-          <p:cNvPicPr>
-            <a:picLocks noChangeAspect="1"/>
-          </p:cNvPicPr>
-          <p:nvPr/>
-        </p:nvPicPr>
-        <p:blipFill>
-          <a:blip r:embed="rId2"/>
-          <a:stretch>
-            <a:fillRect/>
-          </a:stretch>
-        </p:blipFill>
-        <p:spPr>
-          <a:xfrm>
-            <a:off x="9509760" y="274320"/>
-            <a:ext cx="11612880" cy="7741920"/>
-          </a:xfrm>
-          <a:prstGeom prst="rect">
-            <a:avLst/>
-          </a:prstGeom>
-        </p:spPr>
-      </p:pic>
-      <p:sp>
-        <p:nvSpPr>
-          <p:cNvPr id="3" name="TextBox 2"/>
+      <p:sp>
+        <p:nvSpPr>
+          <p:cNvPr id="2" name="TextBox 1"/>
           <p:cNvSpPr txBox="1"/>
           <p:nvPr/>
         </p:nvSpPr>
         <p:spPr>
           <a:xfrm>
-            <a:off x="868680" y="594360"/>
-            <a:ext cx="9326880" cy="548640"/>
+            <a:off x="960120" y="438912"/>
+            <a:ext cx="8321040" cy="438912"/>
           </a:xfrm>
           <a:prstGeom prst="rect">
             <a:avLst/>
@@ -3362,18 +3113,21 @@
           <a:noFill/>
         </p:spPr>
         <p:txBody>
-          <a:bodyPr wrap="square" lIns="18288" rIns="18288" tIns="18288" bIns="18288">
+          <a:bodyPr wrap="square" lIns="36576" rIns="36576" tIns="13716" bIns="13716">
             <a:spAutoFit/>
           </a:bodyPr>
           <a:lstStyle/>
           <a:p>
             <a:pPr algn="l">
+              <a:spcBef>
+                <a:spcPts val="0"/>
+              </a:spcBef>
               <a:spcAft>
-                <a:spcPts val="900"/>
+                <a:spcPts val="500"/>
               </a:spcAft>
-              <a:defRPr sz="2400" b="1">
+              <a:defRPr sz="2500" b="1">
                 <a:solidFill>
-                  <a:srgbClr val="B97722"/>
+                  <a:srgbClr val="075D93"/>
                 </a:solidFill>
                 <a:latin typeface="Aptos"/>
               </a:defRPr>
@@ -3386,14 +3140,14 @@
       </p:sp>
       <p:sp>
         <p:nvSpPr>
-          <p:cNvPr id="4" name="TextBox 3"/>
+          <p:cNvPr id="3" name="TextBox 2"/>
           <p:cNvSpPr txBox="1"/>
           <p:nvPr/>
         </p:nvSpPr>
         <p:spPr>
           <a:xfrm>
-            <a:off x="822960" y="1051560"/>
-            <a:ext cx="9601200" cy="3931920"/>
+            <a:off x="960120" y="1005840"/>
+            <a:ext cx="10058400" cy="594360"/>
           </a:xfrm>
           <a:prstGeom prst="rect">
             <a:avLst/>
@@ -3401,193 +3155,47 @@
           <a:noFill/>
         </p:spPr>
         <p:txBody>
-          <a:bodyPr wrap="square" lIns="18288" rIns="18288" tIns="18288" bIns="18288">
+          <a:bodyPr wrap="square" lIns="36576" rIns="36576" tIns="13716" bIns="13716">
             <a:spAutoFit/>
           </a:bodyPr>
           <a:lstStyle/>
           <a:p>
             <a:pPr algn="l">
+              <a:spcBef>
+                <a:spcPts val="0"/>
+              </a:spcBef>
               <a:spcAft>
-                <a:spcPts val="900"/>
+                <a:spcPts val="500"/>
               </a:spcAft>
-              <a:defRPr sz="11800" b="1">
+              <a:defRPr sz="2600" b="0">
                 <a:solidFill>
-                  <a:srgbClr val="173F32"/>
+                  <a:srgbClr val="526779"/>
                 </a:solidFill>
                 <a:latin typeface="Aptos"/>
               </a:defRPr>
             </a:pPr>
             <a:r>
-              <a:t>AGRI</a:t>
-            </a:r>
-          </a:p>
-          <a:p>
-            <a:pPr algn="l">
-              <a:spcAft>
-                <a:spcPts val="900"/>
-              </a:spcAft>
-              <a:defRPr sz="11800" b="1">
-                <a:solidFill>
-                  <a:srgbClr val="173F32"/>
-                </a:solidFill>
-                <a:latin typeface="Aptos"/>
-              </a:defRPr>
-            </a:pPr>
-            <a:r>
-              <a:t>VISION</a:t>
-            </a:r>
-          </a:p>
-        </p:txBody>
-      </p:sp>
-      <p:sp>
-        <p:nvSpPr>
-          <p:cNvPr id="5" name="TextBox 4"/>
-          <p:cNvSpPr txBox="1"/>
-          <p:nvPr/>
-        </p:nvSpPr>
-        <p:spPr>
-          <a:xfrm>
-            <a:off x="868680" y="5166360"/>
-            <a:ext cx="9692640" cy="1143000"/>
-          </a:xfrm>
-          <a:prstGeom prst="rect">
-            <a:avLst/>
-          </a:prstGeom>
-          <a:noFill/>
-        </p:spPr>
-        <p:txBody>
-          <a:bodyPr wrap="square" lIns="18288" rIns="18288" tIns="18288" bIns="18288">
-            <a:spAutoFit/>
-          </a:bodyPr>
-          <a:lstStyle/>
-          <a:p>
-            <a:pPr algn="l">
-              <a:spcAft>
-                <a:spcPts val="900"/>
-              </a:spcAft>
-              <a:defRPr sz="3400" b="1">
-                <a:solidFill>
-                  <a:srgbClr val="173F32"/>
-                </a:solidFill>
-                <a:latin typeface="Aptos"/>
-              </a:defRPr>
-            </a:pPr>
-            <a:r>
-              <a:t>Federated learning for</a:t>
-            </a:r>
-          </a:p>
-          <a:p>
-            <a:pPr algn="l">
-              <a:spcAft>
-                <a:spcPts val="900"/>
-              </a:spcAft>
-              <a:defRPr sz="3400" b="1">
-                <a:solidFill>
-                  <a:srgbClr val="173F32"/>
-                </a:solidFill>
-                <a:latin typeface="Aptos"/>
-              </a:defRPr>
-            </a:pPr>
-            <a:r>
-              <a:t>crop-disease detection</a:t>
-            </a:r>
-          </a:p>
-        </p:txBody>
-      </p:sp>
-      <p:sp>
-        <p:nvSpPr>
-          <p:cNvPr id="6" name="TextBox 5"/>
-          <p:cNvSpPr txBox="1"/>
-          <p:nvPr/>
-        </p:nvSpPr>
-        <p:spPr>
-          <a:xfrm>
-            <a:off x="868680" y="6537960"/>
-            <a:ext cx="19568160" cy="502920"/>
-          </a:xfrm>
-          <a:prstGeom prst="rect">
-            <a:avLst/>
-          </a:prstGeom>
-          <a:noFill/>
-        </p:spPr>
-        <p:txBody>
-          <a:bodyPr wrap="square" lIns="18288" rIns="18288" tIns="18288" bIns="18288">
-            <a:spAutoFit/>
-          </a:bodyPr>
-          <a:lstStyle/>
-          <a:p>
-            <a:pPr algn="l">
-              <a:spcAft>
-                <a:spcPts val="900"/>
-              </a:spcAft>
-              <a:defRPr sz="2700" b="1">
-                <a:solidFill>
-                  <a:srgbClr val="173F32"/>
-                </a:solidFill>
-                <a:latin typeface="Aptos"/>
-              </a:defRPr>
-            </a:pPr>
-            <a:r>
-              <a:t>Hannan Rehman  •  Fuzail Talpur  •  Ali</a:t>
-            </a:r>
-          </a:p>
-        </p:txBody>
-      </p:sp>
-      <p:sp>
-        <p:nvSpPr>
-          <p:cNvPr id="7" name="TextBox 6"/>
-          <p:cNvSpPr txBox="1"/>
-          <p:nvPr/>
-        </p:nvSpPr>
-        <p:spPr>
-          <a:xfrm>
-            <a:off x="868680" y="7132320"/>
-            <a:ext cx="19568160" cy="502920"/>
-          </a:xfrm>
-          <a:prstGeom prst="rect">
-            <a:avLst/>
-          </a:prstGeom>
-          <a:noFill/>
-        </p:spPr>
-        <p:txBody>
-          <a:bodyPr wrap="square" lIns="18288" rIns="18288" tIns="18288" bIns="18288">
-            <a:spAutoFit/>
-          </a:bodyPr>
-          <a:lstStyle/>
-          <a:p>
-            <a:pPr algn="l">
-              <a:spcAft>
-                <a:spcPts val="900"/>
-              </a:spcAft>
-              <a:defRPr sz="2700" b="0">
-                <a:solidFill>
-                  <a:srgbClr val="53685F"/>
-                </a:solidFill>
-                <a:latin typeface="Aptos"/>
-              </a:defRPr>
-            </a:pPr>
-            <a:r>
-              <a:t>Supervisor: Dr Rabeea Jaffari</a:t>
-            </a:r>
-          </a:p>
-        </p:txBody>
-      </p:sp>
-      <p:sp>
-        <p:nvSpPr>
-          <p:cNvPr id="8" name="Rectangle 7"/>
+              <a:t>Federated learning for crop-disease detection</a:t>
+            </a:r>
+          </a:p>
+        </p:txBody>
+      </p:sp>
+      <p:sp>
+        <p:nvSpPr>
+          <p:cNvPr id="4" name="Oval 3"/>
           <p:cNvSpPr/>
           <p:nvPr/>
         </p:nvSpPr>
         <p:spPr>
-          <a:xfrm>
-            <a:off x="0" y="7909560"/>
-            <a:ext cx="21387816" cy="868680"/>
-          </a:xfrm>
-          <a:prstGeom prst="rect">
+          <a:xfrm rot="2220000">
+            <a:off x="11951208" y="356616"/>
+            <a:ext cx="395020" cy="630936"/>
+          </a:xfrm>
+          <a:prstGeom prst="ellipse">
             <a:avLst/>
           </a:prstGeom>
           <a:solidFill>
-            <a:srgbClr val="173F32"/>
+            <a:srgbClr val="226D4A"/>
           </a:solidFill>
           <a:ln>
             <a:noFill/>
@@ -3617,14 +3225,185 @@
       </p:sp>
       <p:sp>
         <p:nvSpPr>
+          <p:cNvPr id="5" name="Rectangle 4"/>
+          <p:cNvSpPr/>
+          <p:nvPr/>
+        </p:nvSpPr>
+        <p:spPr>
+          <a:xfrm rot="2220000">
+            <a:off x="12165177" y="493776"/>
+            <a:ext cx="19202" cy="427939"/>
+          </a:xfrm>
+          <a:prstGeom prst="rect">
+            <a:avLst/>
+          </a:prstGeom>
+          <a:solidFill>
+            <a:srgbClr val="C8E6D3"/>
+          </a:solidFill>
+          <a:ln>
+            <a:noFill/>
+          </a:ln>
+        </p:spPr>
+        <p:style>
+          <a:lnRef idx="1">
+            <a:schemeClr val="accent1"/>
+          </a:lnRef>
+          <a:fillRef idx="3">
+            <a:schemeClr val="accent1"/>
+          </a:fillRef>
+          <a:effectRef idx="2">
+            <a:schemeClr val="accent1"/>
+          </a:effectRef>
+          <a:fontRef idx="minor">
+            <a:schemeClr val="lt1"/>
+          </a:fontRef>
+        </p:style>
+        <p:txBody>
+          <a:bodyPr rtlCol="0" anchor="ctr"/>
+          <a:lstStyle/>
+          <a:p>
+            <a:pPr algn="ctr"/>
+          </a:p>
+        </p:txBody>
+      </p:sp>
+      <p:sp>
+        <p:nvSpPr>
+          <p:cNvPr id="6" name="TextBox 5"/>
+          <p:cNvSpPr txBox="1"/>
+          <p:nvPr/>
+        </p:nvSpPr>
+        <p:spPr>
+          <a:xfrm>
+            <a:off x="11201400" y="1161288"/>
+            <a:ext cx="2212848" cy="320040"/>
+          </a:xfrm>
+          <a:prstGeom prst="rect">
+            <a:avLst/>
+          </a:prstGeom>
+          <a:noFill/>
+        </p:spPr>
+        <p:txBody>
+          <a:bodyPr wrap="square" lIns="36576" rIns="36576" tIns="13716" bIns="13716">
+            <a:spAutoFit/>
+          </a:bodyPr>
+          <a:lstStyle/>
+          <a:p>
+            <a:pPr algn="ctr">
+              <a:spcBef>
+                <a:spcPts val="0"/>
+              </a:spcBef>
+              <a:spcAft>
+                <a:spcPts val="500"/>
+              </a:spcAft>
+              <a:defRPr sz="1600" b="1">
+                <a:solidFill>
+                  <a:srgbClr val="226D4A"/>
+                </a:solidFill>
+                <a:latin typeface="Aptos"/>
+              </a:defRPr>
+            </a:pPr>
+            <a:r>
+              <a:t>BANANA</a:t>
+            </a:r>
+          </a:p>
+        </p:txBody>
+      </p:sp>
+      <p:sp>
+        <p:nvSpPr>
+          <p:cNvPr id="7" name="Oval 6"/>
+          <p:cNvSpPr/>
+          <p:nvPr/>
+        </p:nvSpPr>
+        <p:spPr>
+          <a:xfrm rot="2220000">
+            <a:off x="14209776" y="356616"/>
+            <a:ext cx="395020" cy="630936"/>
+          </a:xfrm>
+          <a:prstGeom prst="ellipse">
+            <a:avLst/>
+          </a:prstGeom>
+          <a:solidFill>
+            <a:srgbClr val="226D4A"/>
+          </a:solidFill>
+          <a:ln>
+            <a:noFill/>
+          </a:ln>
+        </p:spPr>
+        <p:style>
+          <a:lnRef idx="1">
+            <a:schemeClr val="accent1"/>
+          </a:lnRef>
+          <a:fillRef idx="3">
+            <a:schemeClr val="accent1"/>
+          </a:fillRef>
+          <a:effectRef idx="2">
+            <a:schemeClr val="accent1"/>
+          </a:effectRef>
+          <a:fontRef idx="minor">
+            <a:schemeClr val="lt1"/>
+          </a:fontRef>
+        </p:style>
+        <p:txBody>
+          <a:bodyPr rtlCol="0" anchor="ctr"/>
+          <a:lstStyle/>
+          <a:p>
+            <a:pPr algn="ctr"/>
+          </a:p>
+        </p:txBody>
+      </p:sp>
+      <p:sp>
+        <p:nvSpPr>
+          <p:cNvPr id="8" name="Rectangle 7"/>
+          <p:cNvSpPr/>
+          <p:nvPr/>
+        </p:nvSpPr>
+        <p:spPr>
+          <a:xfrm rot="2220000">
+            <a:off x="14423745" y="493776"/>
+            <a:ext cx="19202" cy="427939"/>
+          </a:xfrm>
+          <a:prstGeom prst="rect">
+            <a:avLst/>
+          </a:prstGeom>
+          <a:solidFill>
+            <a:srgbClr val="C8E6D3"/>
+          </a:solidFill>
+          <a:ln>
+            <a:noFill/>
+          </a:ln>
+        </p:spPr>
+        <p:style>
+          <a:lnRef idx="1">
+            <a:schemeClr val="accent1"/>
+          </a:lnRef>
+          <a:fillRef idx="3">
+            <a:schemeClr val="accent1"/>
+          </a:fillRef>
+          <a:effectRef idx="2">
+            <a:schemeClr val="accent1"/>
+          </a:effectRef>
+          <a:fontRef idx="minor">
+            <a:schemeClr val="lt1"/>
+          </a:fontRef>
+        </p:style>
+        <p:txBody>
+          <a:bodyPr rtlCol="0" anchor="ctr"/>
+          <a:lstStyle/>
+          <a:p>
+            <a:pPr algn="ctr"/>
+          </a:p>
+        </p:txBody>
+      </p:sp>
+      <p:sp>
+        <p:nvSpPr>
           <p:cNvPr id="9" name="TextBox 8"/>
           <p:cNvSpPr txBox="1"/>
           <p:nvPr/>
         </p:nvSpPr>
         <p:spPr>
           <a:xfrm>
-            <a:off x="731520" y="8092440"/>
-            <a:ext cx="19933920" cy="457200"/>
+            <a:off x="13459968" y="1161288"/>
+            <a:ext cx="2212848" cy="320040"/>
           </a:xfrm>
           <a:prstGeom prst="rect">
             <a:avLst/>
@@ -3632,16 +3411,360 @@
           <a:noFill/>
         </p:spPr>
         <p:txBody>
-          <a:bodyPr wrap="square" lIns="18288" rIns="18288" tIns="18288" bIns="18288">
+          <a:bodyPr wrap="square" lIns="36576" rIns="36576" tIns="13716" bIns="13716">
             <a:spAutoFit/>
           </a:bodyPr>
           <a:lstStyle/>
           <a:p>
             <a:pPr algn="ctr">
+              <a:spcBef>
+                <a:spcPts val="0"/>
+              </a:spcBef>
               <a:spcAft>
-                <a:spcPts val="900"/>
+                <a:spcPts val="500"/>
               </a:spcAft>
-              <a:defRPr sz="2700" b="1">
+              <a:defRPr sz="1600" b="1">
+                <a:solidFill>
+                  <a:srgbClr val="226D4A"/>
+                </a:solidFill>
+                <a:latin typeface="Aptos"/>
+              </a:defRPr>
+            </a:pPr>
+            <a:r>
+              <a:t>CAULIFLOWER</a:t>
+            </a:r>
+          </a:p>
+        </p:txBody>
+      </p:sp>
+      <p:sp>
+        <p:nvSpPr>
+          <p:cNvPr id="10" name="Oval 9"/>
+          <p:cNvSpPr/>
+          <p:nvPr/>
+        </p:nvSpPr>
+        <p:spPr>
+          <a:xfrm rot="2220000">
+            <a:off x="16468344" y="356616"/>
+            <a:ext cx="395020" cy="630936"/>
+          </a:xfrm>
+          <a:prstGeom prst="ellipse">
+            <a:avLst/>
+          </a:prstGeom>
+          <a:solidFill>
+            <a:srgbClr val="226D4A"/>
+          </a:solidFill>
+          <a:ln>
+            <a:noFill/>
+          </a:ln>
+        </p:spPr>
+        <p:style>
+          <a:lnRef idx="1">
+            <a:schemeClr val="accent1"/>
+          </a:lnRef>
+          <a:fillRef idx="3">
+            <a:schemeClr val="accent1"/>
+          </a:fillRef>
+          <a:effectRef idx="2">
+            <a:schemeClr val="accent1"/>
+          </a:effectRef>
+          <a:fontRef idx="minor">
+            <a:schemeClr val="lt1"/>
+          </a:fontRef>
+        </p:style>
+        <p:txBody>
+          <a:bodyPr rtlCol="0" anchor="ctr"/>
+          <a:lstStyle/>
+          <a:p>
+            <a:pPr algn="ctr"/>
+          </a:p>
+        </p:txBody>
+      </p:sp>
+      <p:sp>
+        <p:nvSpPr>
+          <p:cNvPr id="11" name="Rectangle 10"/>
+          <p:cNvSpPr/>
+          <p:nvPr/>
+        </p:nvSpPr>
+        <p:spPr>
+          <a:xfrm rot="2220000">
+            <a:off x="16682313" y="493776"/>
+            <a:ext cx="19202" cy="427939"/>
+          </a:xfrm>
+          <a:prstGeom prst="rect">
+            <a:avLst/>
+          </a:prstGeom>
+          <a:solidFill>
+            <a:srgbClr val="C8E6D3"/>
+          </a:solidFill>
+          <a:ln>
+            <a:noFill/>
+          </a:ln>
+        </p:spPr>
+        <p:style>
+          <a:lnRef idx="1">
+            <a:schemeClr val="accent1"/>
+          </a:lnRef>
+          <a:fillRef idx="3">
+            <a:schemeClr val="accent1"/>
+          </a:fillRef>
+          <a:effectRef idx="2">
+            <a:schemeClr val="accent1"/>
+          </a:effectRef>
+          <a:fontRef idx="minor">
+            <a:schemeClr val="lt1"/>
+          </a:fontRef>
+        </p:style>
+        <p:txBody>
+          <a:bodyPr rtlCol="0" anchor="ctr"/>
+          <a:lstStyle/>
+          <a:p>
+            <a:pPr algn="ctr"/>
+          </a:p>
+        </p:txBody>
+      </p:sp>
+      <p:sp>
+        <p:nvSpPr>
+          <p:cNvPr id="12" name="TextBox 11"/>
+          <p:cNvSpPr txBox="1"/>
+          <p:nvPr/>
+        </p:nvSpPr>
+        <p:spPr>
+          <a:xfrm>
+            <a:off x="15718536" y="1161288"/>
+            <a:ext cx="2212848" cy="320040"/>
+          </a:xfrm>
+          <a:prstGeom prst="rect">
+            <a:avLst/>
+          </a:prstGeom>
+          <a:noFill/>
+        </p:spPr>
+        <p:txBody>
+          <a:bodyPr wrap="square" lIns="36576" rIns="36576" tIns="13716" bIns="13716">
+            <a:spAutoFit/>
+          </a:bodyPr>
+          <a:lstStyle/>
+          <a:p>
+            <a:pPr algn="ctr">
+              <a:spcBef>
+                <a:spcPts val="0"/>
+              </a:spcBef>
+              <a:spcAft>
+                <a:spcPts val="500"/>
+              </a:spcAft>
+              <a:defRPr sz="1600" b="1">
+                <a:solidFill>
+                  <a:srgbClr val="226D4A"/>
+                </a:solidFill>
+                <a:latin typeface="Aptos"/>
+              </a:defRPr>
+            </a:pPr>
+            <a:r>
+              <a:t>GROUNDNUT</a:t>
+            </a:r>
+          </a:p>
+        </p:txBody>
+      </p:sp>
+      <p:sp>
+        <p:nvSpPr>
+          <p:cNvPr id="13" name="Oval 12"/>
+          <p:cNvSpPr/>
+          <p:nvPr/>
+        </p:nvSpPr>
+        <p:spPr>
+          <a:xfrm rot="2220000">
+            <a:off x="18726912" y="356616"/>
+            <a:ext cx="395020" cy="630936"/>
+          </a:xfrm>
+          <a:prstGeom prst="ellipse">
+            <a:avLst/>
+          </a:prstGeom>
+          <a:solidFill>
+            <a:srgbClr val="226D4A"/>
+          </a:solidFill>
+          <a:ln>
+            <a:noFill/>
+          </a:ln>
+        </p:spPr>
+        <p:style>
+          <a:lnRef idx="1">
+            <a:schemeClr val="accent1"/>
+          </a:lnRef>
+          <a:fillRef idx="3">
+            <a:schemeClr val="accent1"/>
+          </a:fillRef>
+          <a:effectRef idx="2">
+            <a:schemeClr val="accent1"/>
+          </a:effectRef>
+          <a:fontRef idx="minor">
+            <a:schemeClr val="lt1"/>
+          </a:fontRef>
+        </p:style>
+        <p:txBody>
+          <a:bodyPr rtlCol="0" anchor="ctr"/>
+          <a:lstStyle/>
+          <a:p>
+            <a:pPr algn="ctr"/>
+          </a:p>
+        </p:txBody>
+      </p:sp>
+      <p:sp>
+        <p:nvSpPr>
+          <p:cNvPr id="14" name="Rectangle 13"/>
+          <p:cNvSpPr/>
+          <p:nvPr/>
+        </p:nvSpPr>
+        <p:spPr>
+          <a:xfrm rot="2220000">
+            <a:off x="18940881" y="493776"/>
+            <a:ext cx="19202" cy="427939"/>
+          </a:xfrm>
+          <a:prstGeom prst="rect">
+            <a:avLst/>
+          </a:prstGeom>
+          <a:solidFill>
+            <a:srgbClr val="C8E6D3"/>
+          </a:solidFill>
+          <a:ln>
+            <a:noFill/>
+          </a:ln>
+        </p:spPr>
+        <p:style>
+          <a:lnRef idx="1">
+            <a:schemeClr val="accent1"/>
+          </a:lnRef>
+          <a:fillRef idx="3">
+            <a:schemeClr val="accent1"/>
+          </a:fillRef>
+          <a:effectRef idx="2">
+            <a:schemeClr val="accent1"/>
+          </a:effectRef>
+          <a:fontRef idx="minor">
+            <a:schemeClr val="lt1"/>
+          </a:fontRef>
+        </p:style>
+        <p:txBody>
+          <a:bodyPr rtlCol="0" anchor="ctr"/>
+          <a:lstStyle/>
+          <a:p>
+            <a:pPr algn="ctr"/>
+          </a:p>
+        </p:txBody>
+      </p:sp>
+      <p:sp>
+        <p:nvSpPr>
+          <p:cNvPr id="15" name="TextBox 14"/>
+          <p:cNvSpPr txBox="1"/>
+          <p:nvPr/>
+        </p:nvSpPr>
+        <p:spPr>
+          <a:xfrm>
+            <a:off x="17977104" y="1161288"/>
+            <a:ext cx="2212848" cy="320040"/>
+          </a:xfrm>
+          <a:prstGeom prst="rect">
+            <a:avLst/>
+          </a:prstGeom>
+          <a:noFill/>
+        </p:spPr>
+        <p:txBody>
+          <a:bodyPr wrap="square" lIns="36576" rIns="36576" tIns="13716" bIns="13716">
+            <a:spAutoFit/>
+          </a:bodyPr>
+          <a:lstStyle/>
+          <a:p>
+            <a:pPr algn="ctr">
+              <a:spcBef>
+                <a:spcPts val="0"/>
+              </a:spcBef>
+              <a:spcAft>
+                <a:spcPts val="500"/>
+              </a:spcAft>
+              <a:defRPr sz="1600" b="1">
+                <a:solidFill>
+                  <a:srgbClr val="226D4A"/>
+                </a:solidFill>
+                <a:latin typeface="Aptos"/>
+              </a:defRPr>
+            </a:pPr>
+            <a:r>
+              <a:t>RADISH</a:t>
+            </a:r>
+          </a:p>
+        </p:txBody>
+      </p:sp>
+      <p:sp>
+        <p:nvSpPr>
+          <p:cNvPr id="16" name="Rectangle 15"/>
+          <p:cNvSpPr/>
+          <p:nvPr/>
+        </p:nvSpPr>
+        <p:spPr>
+          <a:xfrm>
+            <a:off x="0" y="1828800"/>
+            <a:ext cx="21384000" cy="1856231"/>
+          </a:xfrm>
+          <a:prstGeom prst="rect">
+            <a:avLst/>
+          </a:prstGeom>
+          <a:solidFill>
+            <a:srgbClr val="075D93"/>
+          </a:solidFill>
+          <a:ln>
+            <a:noFill/>
+          </a:ln>
+        </p:spPr>
+        <p:style>
+          <a:lnRef idx="1">
+            <a:schemeClr val="accent1"/>
+          </a:lnRef>
+          <a:fillRef idx="3">
+            <a:schemeClr val="accent1"/>
+          </a:fillRef>
+          <a:effectRef idx="2">
+            <a:schemeClr val="accent1"/>
+          </a:effectRef>
+          <a:fontRef idx="minor">
+            <a:schemeClr val="lt1"/>
+          </a:fontRef>
+        </p:style>
+        <p:txBody>
+          <a:bodyPr rtlCol="0" anchor="ctr"/>
+          <a:lstStyle/>
+          <a:p>
+            <a:pPr algn="ctr"/>
+          </a:p>
+        </p:txBody>
+      </p:sp>
+      <p:sp>
+        <p:nvSpPr>
+          <p:cNvPr id="17" name="TextBox 16"/>
+          <p:cNvSpPr txBox="1"/>
+          <p:nvPr/>
+        </p:nvSpPr>
+        <p:spPr>
+          <a:xfrm>
+            <a:off x="914400" y="1901952"/>
+            <a:ext cx="19555200" cy="1161288"/>
+          </a:xfrm>
+          <a:prstGeom prst="rect">
+            <a:avLst/>
+          </a:prstGeom>
+          <a:noFill/>
+        </p:spPr>
+        <p:txBody>
+          <a:bodyPr wrap="square" lIns="36576" rIns="36576" tIns="13716" bIns="13716">
+            <a:spAutoFit/>
+          </a:bodyPr>
+          <a:lstStyle/>
+          <a:p>
+            <a:pPr algn="ctr">
+              <a:spcBef>
+                <a:spcPts val="0"/>
+              </a:spcBef>
+              <a:spcAft>
+                <a:spcPts val="500"/>
+              </a:spcAft>
+              <a:defRPr sz="7300" b="1">
                 <a:solidFill>
                   <a:srgbClr val="FFFFFF"/>
                 </a:solidFill>
@@ -3649,21 +3772,21 @@
               </a:defRPr>
             </a:pPr>
             <a:r>
-              <a:t>BANANA   •   CAULIFLOWER   •   CHILI   •   GROUNDNUT   •   RADISH</a:t>
-            </a:r>
-          </a:p>
-        </p:txBody>
-      </p:sp>
-      <p:sp>
-        <p:nvSpPr>
-          <p:cNvPr id="10" name="TextBox 9"/>
+              <a:t>AGRI VISION</a:t>
+            </a:r>
+          </a:p>
+        </p:txBody>
+      </p:sp>
+      <p:sp>
+        <p:nvSpPr>
+          <p:cNvPr id="18" name="TextBox 17"/>
           <p:cNvSpPr txBox="1"/>
           <p:nvPr/>
         </p:nvSpPr>
         <p:spPr>
           <a:xfrm>
-            <a:off x="868680" y="9189720"/>
-            <a:ext cx="19659600" cy="502920"/>
+            <a:off x="914400" y="3191256"/>
+            <a:ext cx="19555200" cy="411480"/>
           </a:xfrm>
           <a:prstGeom prst="rect">
             <a:avLst/>
@@ -3671,63 +3794,41 @@
           <a:noFill/>
         </p:spPr>
         <p:txBody>
-          <a:bodyPr wrap="square" lIns="18288" rIns="18288" tIns="18288" bIns="18288">
+          <a:bodyPr wrap="square" lIns="36576" rIns="36576" tIns="13716" bIns="13716">
             <a:spAutoFit/>
           </a:bodyPr>
           <a:lstStyle/>
           <a:p>
-            <a:pPr algn="l">
+            <a:pPr algn="ctr">
+              <a:spcBef>
+                <a:spcPts val="0"/>
+              </a:spcBef>
               <a:spcAft>
-                <a:spcPts val="900"/>
+                <a:spcPts val="500"/>
               </a:spcAft>
-              <a:defRPr sz="3100" b="1">
+              <a:defRPr sz="2500" b="0">
                 <a:solidFill>
-                  <a:srgbClr val="173F32"/>
+                  <a:srgbClr val="FFFFFF"/>
                 </a:solidFill>
                 <a:latin typeface="Aptos"/>
               </a:defRPr>
             </a:pPr>
             <a:r>
-              <a:t>FIVE CROPS. THIRTY DETECTION CLASSES.</a:t>
-            </a:r>
-          </a:p>
-        </p:txBody>
-      </p:sp>
-      <p:pic>
-        <p:nvPicPr>
-          <p:cNvPr id="11" name="Picture 10" descr="sigatoka-794-_jpeg.rf.86c015db5501df3588751a4b00f25849.jpg"/>
-          <p:cNvPicPr>
-            <a:picLocks noChangeAspect="1"/>
-          </p:cNvPicPr>
-          <p:nvPr/>
-        </p:nvPicPr>
-        <p:blipFill>
-          <a:blip r:embed="rId3"/>
-          <a:srcRect t="24629" b="24629"/>
-          <a:stretch>
-            <a:fillRect/>
-          </a:stretch>
-        </p:blipFill>
-        <p:spPr>
-          <a:xfrm>
-            <a:off x="868680" y="9921240"/>
-            <a:ext cx="3694176" cy="1874519"/>
-          </a:xfrm>
-          <a:prstGeom prst="rect">
-            <a:avLst/>
-          </a:prstGeom>
-        </p:spPr>
-      </p:pic>
-      <p:sp>
-        <p:nvSpPr>
-          <p:cNvPr id="12" name="TextBox 11"/>
+              <a:t>Detecting crop symptoms. Comparing lightweight one-stage detectors.</a:t>
+            </a:r>
+          </a:p>
+        </p:txBody>
+      </p:sp>
+      <p:sp>
+        <p:nvSpPr>
+          <p:cNvPr id="19" name="TextBox 18"/>
           <p:cNvSpPr txBox="1"/>
           <p:nvPr/>
         </p:nvSpPr>
         <p:spPr>
           <a:xfrm>
-            <a:off x="868680" y="11923776"/>
-            <a:ext cx="3694176" cy="457200"/>
+            <a:off x="914400" y="3831336"/>
+            <a:ext cx="11521440" cy="475488"/>
           </a:xfrm>
           <a:prstGeom prst="rect">
             <a:avLst/>
@@ -3735,63 +3836,41 @@
           <a:noFill/>
         </p:spPr>
         <p:txBody>
-          <a:bodyPr wrap="square" lIns="18288" rIns="18288" tIns="18288" bIns="18288">
+          <a:bodyPr wrap="square" lIns="36576" rIns="36576" tIns="13716" bIns="13716">
             <a:spAutoFit/>
           </a:bodyPr>
           <a:lstStyle/>
           <a:p>
-            <a:pPr algn="ctr">
+            <a:pPr algn="l">
+              <a:spcBef>
+                <a:spcPts val="0"/>
+              </a:spcBef>
               <a:spcAft>
-                <a:spcPts val="900"/>
+                <a:spcPts val="500"/>
               </a:spcAft>
               <a:defRPr sz="2600" b="1">
                 <a:solidFill>
-                  <a:srgbClr val="173F32"/>
+                  <a:srgbClr val="075D93"/>
                 </a:solidFill>
                 <a:latin typeface="Aptos"/>
               </a:defRPr>
             </a:pPr>
             <a:r>
-              <a:t>Banana</a:t>
-            </a:r>
-          </a:p>
-        </p:txBody>
-      </p:sp>
-      <p:pic>
-        <p:nvPicPr>
-          <p:cNvPr id="13" name="Picture 12" descr="Black-Rot-11-_jpeg.rf.b0ad96c41b1eb43d30080bd3b82425fc.jpg"/>
-          <p:cNvPicPr>
-            <a:picLocks noChangeAspect="1"/>
-          </p:cNvPicPr>
-          <p:nvPr/>
-        </p:nvPicPr>
-        <p:blipFill>
-          <a:blip r:embed="rId4"/>
-          <a:srcRect t="24629" b="24629"/>
-          <a:stretch>
-            <a:fillRect/>
-          </a:stretch>
-        </p:blipFill>
-        <p:spPr>
-          <a:xfrm>
-            <a:off x="4855464" y="9921240"/>
-            <a:ext cx="3694176" cy="1874519"/>
-          </a:xfrm>
-          <a:prstGeom prst="rect">
-            <a:avLst/>
-          </a:prstGeom>
-        </p:spPr>
-      </p:pic>
-      <p:sp>
-        <p:nvSpPr>
-          <p:cNvPr id="14" name="TextBox 13"/>
+              <a:t>Hannan Rehman  •  Fuzail Talpur  •  Ali</a:t>
+            </a:r>
+          </a:p>
+        </p:txBody>
+      </p:sp>
+      <p:sp>
+        <p:nvSpPr>
+          <p:cNvPr id="20" name="TextBox 19"/>
           <p:cNvSpPr txBox="1"/>
           <p:nvPr/>
         </p:nvSpPr>
         <p:spPr>
           <a:xfrm>
-            <a:off x="4855464" y="11923776"/>
-            <a:ext cx="3694176" cy="457200"/>
+            <a:off x="11887200" y="3831336"/>
+            <a:ext cx="8549640" cy="475488"/>
           </a:xfrm>
           <a:prstGeom prst="rect">
             <a:avLst/>
@@ -3799,356 +3878,54 @@
           <a:noFill/>
         </p:spPr>
         <p:txBody>
-          <a:bodyPr wrap="square" lIns="18288" rIns="18288" tIns="18288" bIns="18288">
+          <a:bodyPr wrap="square" lIns="36576" rIns="36576" tIns="13716" bIns="13716">
             <a:spAutoFit/>
           </a:bodyPr>
           <a:lstStyle/>
           <a:p>
-            <a:pPr algn="ctr">
+            <a:pPr algn="r">
+              <a:spcBef>
+                <a:spcPts val="0"/>
+              </a:spcBef>
               <a:spcAft>
-                <a:spcPts val="900"/>
+                <a:spcPts val="500"/>
               </a:spcAft>
-              <a:defRPr sz="2600" b="1">
+              <a:defRPr sz="2600" b="0">
                 <a:solidFill>
-                  <a:srgbClr val="173F32"/>
+                  <a:srgbClr val="526779"/>
                 </a:solidFill>
                 <a:latin typeface="Aptos"/>
               </a:defRPr>
             </a:pPr>
             <a:r>
-              <a:t>Cauliflower</a:t>
-            </a:r>
-          </a:p>
-        </p:txBody>
-      </p:sp>
-      <p:pic>
-        <p:nvPicPr>
-          <p:cNvPr id="15" name="Picture 14" descr="Anthracnose-186-_jpg.rf.fd2b7a00d806739bd6fb96f1957c7d81.jpg"/>
-          <p:cNvPicPr>
-            <a:picLocks noChangeAspect="1"/>
-          </p:cNvPicPr>
-          <p:nvPr/>
-        </p:nvPicPr>
-        <p:blipFill>
-          <a:blip r:embed="rId5"/>
-          <a:srcRect t="24629" b="24629"/>
-          <a:stretch>
-            <a:fillRect/>
-          </a:stretch>
-        </p:blipFill>
-        <p:spPr>
-          <a:xfrm>
-            <a:off x="8842248" y="9921240"/>
-            <a:ext cx="3694176" cy="1874519"/>
-          </a:xfrm>
-          <a:prstGeom prst="rect">
-            <a:avLst/>
-          </a:prstGeom>
-        </p:spPr>
-      </p:pic>
-      <p:sp>
-        <p:nvSpPr>
-          <p:cNvPr id="16" name="TextBox 15"/>
-          <p:cNvSpPr txBox="1"/>
-          <p:nvPr/>
-        </p:nvSpPr>
-        <p:spPr>
-          <a:xfrm>
-            <a:off x="8842248" y="11923776"/>
-            <a:ext cx="3694176" cy="457200"/>
-          </a:xfrm>
-          <a:prstGeom prst="rect">
-            <a:avLst/>
-          </a:prstGeom>
-          <a:noFill/>
-        </p:spPr>
-        <p:txBody>
-          <a:bodyPr wrap="square" lIns="18288" rIns="18288" tIns="18288" bIns="18288">
-            <a:spAutoFit/>
-          </a:bodyPr>
-          <a:lstStyle/>
-          <a:p>
-            <a:pPr algn="ctr">
-              <a:spcAft>
-                <a:spcPts val="900"/>
-              </a:spcAft>
-              <a:defRPr sz="2600" b="1">
-                <a:solidFill>
-                  <a:srgbClr val="173F32"/>
-                </a:solidFill>
-                <a:latin typeface="Aptos"/>
-              </a:defRPr>
-            </a:pPr>
-            <a:r>
-              <a:t>Chili</a:t>
-            </a:r>
-          </a:p>
-        </p:txBody>
-      </p:sp>
-      <p:pic>
-        <p:nvPicPr>
-          <p:cNvPr id="17" name="Picture 16" descr="Early-Leaf-Spot-818-_jpg.rf.bf70e3ba056b64179ac0a53c1bc83e55.jpg"/>
-          <p:cNvPicPr>
-            <a:picLocks noChangeAspect="1"/>
-          </p:cNvPicPr>
-          <p:nvPr/>
-        </p:nvPicPr>
-        <p:blipFill>
-          <a:blip r:embed="rId6"/>
-          <a:srcRect t="24629" b="24629"/>
-          <a:stretch>
-            <a:fillRect/>
-          </a:stretch>
-        </p:blipFill>
-        <p:spPr>
-          <a:xfrm>
-            <a:off x="12829032" y="9921240"/>
-            <a:ext cx="3694176" cy="1874519"/>
-          </a:xfrm>
-          <a:prstGeom prst="rect">
-            <a:avLst/>
-          </a:prstGeom>
-        </p:spPr>
-      </p:pic>
-      <p:sp>
-        <p:nvSpPr>
-          <p:cNvPr id="18" name="TextBox 17"/>
-          <p:cNvSpPr txBox="1"/>
-          <p:nvPr/>
-        </p:nvSpPr>
-        <p:spPr>
-          <a:xfrm>
-            <a:off x="12829032" y="11923776"/>
-            <a:ext cx="3694176" cy="457200"/>
-          </a:xfrm>
-          <a:prstGeom prst="rect">
-            <a:avLst/>
-          </a:prstGeom>
-          <a:noFill/>
-        </p:spPr>
-        <p:txBody>
-          <a:bodyPr wrap="square" lIns="18288" rIns="18288" tIns="18288" bIns="18288">
-            <a:spAutoFit/>
-          </a:bodyPr>
-          <a:lstStyle/>
-          <a:p>
-            <a:pPr algn="ctr">
-              <a:spcAft>
-                <a:spcPts val="900"/>
-              </a:spcAft>
-              <a:defRPr sz="2600" b="1">
-                <a:solidFill>
-                  <a:srgbClr val="173F32"/>
-                </a:solidFill>
-                <a:latin typeface="Aptos"/>
-              </a:defRPr>
-            </a:pPr>
-            <a:r>
-              <a:t>Groundnut</a:t>
-            </a:r>
-          </a:p>
-        </p:txBody>
-      </p:sp>
-      <p:pic>
-        <p:nvPicPr>
-          <p:cNvPr id="19" name="Picture 18" descr="Black-Leaf-Spot-483-_jpg.rf.509f411998b8ebf4a23e60fda7766d89.jpg"/>
-          <p:cNvPicPr>
-            <a:picLocks noChangeAspect="1"/>
-          </p:cNvPicPr>
-          <p:nvPr/>
-        </p:nvPicPr>
-        <p:blipFill>
-          <a:blip r:embed="rId7"/>
-          <a:srcRect t="24629" b="24629"/>
-          <a:stretch>
-            <a:fillRect/>
-          </a:stretch>
-        </p:blipFill>
-        <p:spPr>
-          <a:xfrm>
-            <a:off x="16815816" y="9921240"/>
-            <a:ext cx="3694176" cy="1874519"/>
-          </a:xfrm>
-          <a:prstGeom prst="rect">
-            <a:avLst/>
-          </a:prstGeom>
-        </p:spPr>
-      </p:pic>
-      <p:sp>
-        <p:nvSpPr>
-          <p:cNvPr id="20" name="TextBox 19"/>
-          <p:cNvSpPr txBox="1"/>
-          <p:nvPr/>
-        </p:nvSpPr>
-        <p:spPr>
-          <a:xfrm>
-            <a:off x="16815816" y="11923776"/>
-            <a:ext cx="3694176" cy="457200"/>
-          </a:xfrm>
-          <a:prstGeom prst="rect">
-            <a:avLst/>
-          </a:prstGeom>
-          <a:noFill/>
-        </p:spPr>
-        <p:txBody>
-          <a:bodyPr wrap="square" lIns="18288" rIns="18288" tIns="18288" bIns="18288">
-            <a:spAutoFit/>
-          </a:bodyPr>
-          <a:lstStyle/>
-          <a:p>
-            <a:pPr algn="ctr">
-              <a:spcAft>
-                <a:spcPts val="900"/>
-              </a:spcAft>
-              <a:defRPr sz="2600" b="1">
-                <a:solidFill>
-                  <a:srgbClr val="173F32"/>
-                </a:solidFill>
-                <a:latin typeface="Aptos"/>
-              </a:defRPr>
-            </a:pPr>
-            <a:r>
-              <a:t>Radish</a:t>
-            </a:r>
-          </a:p>
-        </p:txBody>
-      </p:sp>
-      <p:sp>
-        <p:nvSpPr>
-          <p:cNvPr id="21" name="TextBox 20"/>
-          <p:cNvSpPr txBox="1"/>
-          <p:nvPr/>
-        </p:nvSpPr>
-        <p:spPr>
-          <a:xfrm>
-            <a:off x="868680" y="12527280"/>
-            <a:ext cx="19568160" cy="457200"/>
-          </a:xfrm>
-          <a:prstGeom prst="rect">
-            <a:avLst/>
-          </a:prstGeom>
-          <a:noFill/>
-        </p:spPr>
-        <p:txBody>
-          <a:bodyPr wrap="square" lIns="18288" rIns="18288" tIns="18288" bIns="18288">
-            <a:spAutoFit/>
-          </a:bodyPr>
-          <a:lstStyle/>
-          <a:p>
-            <a:pPr algn="l">
-              <a:spcAft>
-                <a:spcPts val="900"/>
-              </a:spcAft>
-              <a:defRPr sz="2200" b="0">
-                <a:solidFill>
-                  <a:srgbClr val="53685F"/>
-                </a:solidFill>
-                <a:latin typeface="Aptos"/>
-              </a:defRPr>
-            </a:pPr>
-            <a:r>
-              <a:t>Examples from the labelled dataset; these photographs are not model predictions.</a:t>
-            </a:r>
-          </a:p>
-        </p:txBody>
-      </p:sp>
-      <p:sp>
-        <p:nvSpPr>
-          <p:cNvPr id="22" name="TextBox 21"/>
-          <p:cNvSpPr txBox="1"/>
-          <p:nvPr/>
-        </p:nvSpPr>
-        <p:spPr>
-          <a:xfrm>
-            <a:off x="868680" y="13304520"/>
-            <a:ext cx="548640" cy="548640"/>
-          </a:xfrm>
-          <a:prstGeom prst="rect">
-            <a:avLst/>
-          </a:prstGeom>
-          <a:noFill/>
-        </p:spPr>
-        <p:txBody>
-          <a:bodyPr wrap="square" lIns="18288" rIns="18288" tIns="18288" bIns="18288">
-            <a:spAutoFit/>
-          </a:bodyPr>
-          <a:lstStyle/>
-          <a:p>
-            <a:pPr algn="l">
-              <a:spcAft>
-                <a:spcPts val="900"/>
-              </a:spcAft>
-              <a:defRPr sz="2800" b="1">
-                <a:solidFill>
-                  <a:srgbClr val="B97722"/>
-                </a:solidFill>
-                <a:latin typeface="Aptos"/>
-              </a:defRPr>
-            </a:pPr>
-            <a:r>
-              <a:t>01</a:t>
-            </a:r>
-          </a:p>
-        </p:txBody>
-      </p:sp>
-      <p:sp>
-        <p:nvSpPr>
-          <p:cNvPr id="23" name="TextBox 22"/>
-          <p:cNvSpPr txBox="1"/>
-          <p:nvPr/>
-        </p:nvSpPr>
-        <p:spPr>
-          <a:xfrm>
-            <a:off x="1508760" y="13304520"/>
-            <a:ext cx="8686800" cy="594360"/>
-          </a:xfrm>
-          <a:prstGeom prst="rect">
-            <a:avLst/>
-          </a:prstGeom>
-          <a:noFill/>
-        </p:spPr>
-        <p:txBody>
-          <a:bodyPr wrap="square" lIns="18288" rIns="18288" tIns="18288" bIns="18288">
-            <a:spAutoFit/>
-          </a:bodyPr>
-          <a:lstStyle/>
-          <a:p>
-            <a:pPr algn="l">
-              <a:spcAft>
-                <a:spcPts val="900"/>
-              </a:spcAft>
-              <a:defRPr sz="3200" b="1">
-                <a:solidFill>
-                  <a:srgbClr val="173F32"/>
-                </a:solidFill>
-                <a:latin typeface="Aptos"/>
-              </a:defRPr>
-            </a:pPr>
-            <a:r>
-              <a:t>THE CHALLENGE</a:t>
-            </a:r>
-          </a:p>
-        </p:txBody>
-      </p:sp>
-      <p:sp>
-        <p:nvSpPr>
-          <p:cNvPr id="24" name="Rectangle 23"/>
+              <a:t>Supervisor: Dr Rabeea Jaffari</a:t>
+            </a:r>
+          </a:p>
+        </p:txBody>
+      </p:sp>
+      <p:sp>
+        <p:nvSpPr>
+          <p:cNvPr id="21" name="Rounded Rectangle 20"/>
           <p:cNvSpPr/>
           <p:nvPr/>
         </p:nvSpPr>
         <p:spPr>
           <a:xfrm>
-            <a:off x="868680" y="14017752"/>
-            <a:ext cx="9326880" cy="32004"/>
-          </a:xfrm>
-          <a:prstGeom prst="rect">
-            <a:avLst/>
+            <a:off x="640080" y="4572000"/>
+            <a:ext cx="20103840" cy="2606040"/>
+          </a:xfrm>
+          <a:prstGeom prst="roundRect">
+            <a:avLst>
+              <a:gd name="adj" fmla="val 8000"/>
+            </a:avLst>
           </a:prstGeom>
           <a:solidFill>
-            <a:srgbClr val="173F32"/>
+            <a:srgbClr val="FFFFFF"/>
           </a:solidFill>
-          <a:ln>
-            <a:noFill/>
+          <a:ln w="22860">
+            <a:solidFill>
+              <a:srgbClr val="39BED1"/>
+            </a:solidFill>
           </a:ln>
         </p:spPr>
         <p:style>
@@ -4175,14 +3952,14 @@
       </p:sp>
       <p:sp>
         <p:nvSpPr>
-          <p:cNvPr id="25" name="TextBox 24"/>
+          <p:cNvPr id="22" name="TextBox 21"/>
           <p:cNvSpPr txBox="1"/>
           <p:nvPr/>
         </p:nvSpPr>
         <p:spPr>
           <a:xfrm>
-            <a:off x="868680" y="14310360"/>
-            <a:ext cx="9326880" cy="2103120"/>
+            <a:off x="1097280" y="4718304"/>
+            <a:ext cx="19189440" cy="502920"/>
           </a:xfrm>
           <a:prstGeom prst="rect">
             <a:avLst/>
@@ -4190,122 +3967,47 @@
           <a:noFill/>
         </p:spPr>
         <p:txBody>
-          <a:bodyPr wrap="square" lIns="18288" rIns="18288" tIns="18288" bIns="18288">
+          <a:bodyPr wrap="square" lIns="36576" rIns="36576" tIns="13716" bIns="13716">
             <a:spAutoFit/>
           </a:bodyPr>
           <a:lstStyle/>
           <a:p>
-            <a:pPr algn="l">
+            <a:pPr algn="ctr">
+              <a:spcBef>
+                <a:spcPts val="0"/>
+              </a:spcBef>
               <a:spcAft>
-                <a:spcPts val="900"/>
+                <a:spcPts val="500"/>
               </a:spcAft>
-              <a:defRPr sz="2800" b="0">
+              <a:defRPr sz="3000" b="1">
                 <a:solidFill>
-                  <a:srgbClr val="233B32"/>
+                  <a:srgbClr val="075D93"/>
                 </a:solidFill>
                 <a:latin typeface="Aptos"/>
               </a:defRPr>
             </a:pPr>
             <a:r>
-              <a:t>Visible disease symptoms can be small, similar across classes, and unevenly represented in crop datasets. Agri Vision explores automated symptom localisation while training a shared model across separate client partitions.</a:t>
-            </a:r>
-          </a:p>
-        </p:txBody>
-      </p:sp>
-      <p:sp>
-        <p:nvSpPr>
-          <p:cNvPr id="26" name="TextBox 25"/>
-          <p:cNvSpPr txBox="1"/>
-          <p:nvPr/>
-        </p:nvSpPr>
-        <p:spPr>
-          <a:xfrm>
-            <a:off x="868680" y="16596359"/>
-            <a:ext cx="548640" cy="548640"/>
-          </a:xfrm>
-          <a:prstGeom prst="rect">
-            <a:avLst/>
-          </a:prstGeom>
-          <a:noFill/>
-        </p:spPr>
-        <p:txBody>
-          <a:bodyPr wrap="square" lIns="18288" rIns="18288" tIns="18288" bIns="18288">
-            <a:spAutoFit/>
-          </a:bodyPr>
-          <a:lstStyle/>
-          <a:p>
-            <a:pPr algn="l">
-              <a:spcAft>
-                <a:spcPts val="900"/>
-              </a:spcAft>
-              <a:defRPr sz="2800" b="1">
-                <a:solidFill>
-                  <a:srgbClr val="B97722"/>
-                </a:solidFill>
-                <a:latin typeface="Aptos"/>
-              </a:defRPr>
-            </a:pPr>
-            <a:r>
-              <a:t>02</a:t>
-            </a:r>
-          </a:p>
-        </p:txBody>
-      </p:sp>
-      <p:sp>
-        <p:nvSpPr>
-          <p:cNvPr id="27" name="TextBox 26"/>
-          <p:cNvSpPr txBox="1"/>
-          <p:nvPr/>
-        </p:nvSpPr>
-        <p:spPr>
-          <a:xfrm>
-            <a:off x="1508760" y="16596359"/>
-            <a:ext cx="8686800" cy="594360"/>
-          </a:xfrm>
-          <a:prstGeom prst="rect">
-            <a:avLst/>
-          </a:prstGeom>
-          <a:noFill/>
-        </p:spPr>
-        <p:txBody>
-          <a:bodyPr wrap="square" lIns="18288" rIns="18288" tIns="18288" bIns="18288">
-            <a:spAutoFit/>
-          </a:bodyPr>
-          <a:lstStyle/>
-          <a:p>
-            <a:pPr algn="l">
-              <a:spcAft>
-                <a:spcPts val="900"/>
-              </a:spcAft>
-              <a:defRPr sz="3200" b="1">
-                <a:solidFill>
-                  <a:srgbClr val="173F32"/>
-                </a:solidFill>
-                <a:latin typeface="Aptos"/>
-              </a:defRPr>
-            </a:pPr>
-            <a:r>
-              <a:t>OUR APPROACH</a:t>
-            </a:r>
-          </a:p>
-        </p:txBody>
-      </p:sp>
-      <p:sp>
-        <p:nvSpPr>
-          <p:cNvPr id="28" name="Rectangle 27"/>
+              <a:t>ABSTRACT</a:t>
+            </a:r>
+          </a:p>
+        </p:txBody>
+      </p:sp>
+      <p:sp>
+        <p:nvSpPr>
+          <p:cNvPr id="23" name="Rectangle 22"/>
           <p:cNvSpPr/>
           <p:nvPr/>
         </p:nvSpPr>
         <p:spPr>
           <a:xfrm>
-            <a:off x="868680" y="17309592"/>
-            <a:ext cx="9326880" cy="32004"/>
+            <a:off x="1922526" y="5741517"/>
+            <a:ext cx="55686" cy="954633"/>
           </a:xfrm>
           <a:prstGeom prst="rect">
             <a:avLst/>
           </a:prstGeom>
           <a:solidFill>
-            <a:srgbClr val="173F32"/>
+            <a:srgbClr val="226D4A"/>
           </a:solidFill>
           <a:ln>
             <a:noFill/>
@@ -4335,61 +4037,20 @@
       </p:sp>
       <p:sp>
         <p:nvSpPr>
-          <p:cNvPr id="29" name="TextBox 28"/>
-          <p:cNvSpPr txBox="1"/>
-          <p:nvPr/>
-        </p:nvSpPr>
-        <p:spPr>
-          <a:xfrm>
-            <a:off x="868680" y="17602200"/>
-            <a:ext cx="9326880" cy="1737360"/>
-          </a:xfrm>
-          <a:prstGeom prst="rect">
-            <a:avLst/>
-          </a:prstGeom>
-          <a:noFill/>
-        </p:spPr>
-        <p:txBody>
-          <a:bodyPr wrap="square" lIns="18288" rIns="18288" tIns="18288" bIns="18288">
-            <a:spAutoFit/>
-          </a:bodyPr>
-          <a:lstStyle/>
-          <a:p>
-            <a:pPr algn="l">
-              <a:spcAft>
-                <a:spcPts val="900"/>
-              </a:spcAft>
-              <a:defRPr sz="2800" b="0">
-                <a:solidFill>
-                  <a:srgbClr val="233B32"/>
-                </a:solidFill>
-                <a:latin typeface="Aptos"/>
-              </a:defRPr>
-            </a:pPr>
-            <a:r>
-              <a:t>YOLOv8n detects symptom regions and predicts their classes. Three clients train locally from a shared checkpoint; sample-weighted FedAvg combines their model weights.</a:t>
-            </a:r>
-          </a:p>
-        </p:txBody>
-      </p:sp>
-      <p:sp>
-        <p:nvSpPr>
-          <p:cNvPr id="30" name="Rounded Rectangle 29"/>
+          <p:cNvPr id="24" name="Oval 23"/>
           <p:cNvSpPr/>
           <p:nvPr/>
         </p:nvSpPr>
         <p:spPr>
-          <a:xfrm>
-            <a:off x="868680" y="19613880"/>
-            <a:ext cx="2880360" cy="1051560"/>
-          </a:xfrm>
-          <a:prstGeom prst="roundRect">
-            <a:avLst>
-              <a:gd name="adj" fmla="val 8000"/>
-            </a:avLst>
+          <a:xfrm rot="2220000">
+            <a:off x="1484985" y="5566501"/>
+            <a:ext cx="429585" cy="686142"/>
+          </a:xfrm>
+          <a:prstGeom prst="ellipse">
+            <a:avLst/>
           </a:prstGeom>
           <a:solidFill>
-            <a:srgbClr val="E7EDE3"/>
+            <a:srgbClr val="226D4A"/>
           </a:solidFill>
           <a:ln>
             <a:noFill/>
@@ -4419,75 +4080,20 @@
       </p:sp>
       <p:sp>
         <p:nvSpPr>
-          <p:cNvPr id="31" name="TextBox 30"/>
-          <p:cNvSpPr txBox="1"/>
-          <p:nvPr/>
-        </p:nvSpPr>
-        <p:spPr>
-          <a:xfrm>
-            <a:off x="978407" y="19741896"/>
-            <a:ext cx="2660904" cy="841248"/>
-          </a:xfrm>
-          <a:prstGeom prst="rect">
-            <a:avLst/>
-          </a:prstGeom>
-          <a:noFill/>
-        </p:spPr>
-        <p:txBody>
-          <a:bodyPr wrap="square" lIns="18288" rIns="18288" tIns="18288" bIns="18288">
-            <a:spAutoFit/>
-          </a:bodyPr>
-          <a:lstStyle/>
-          <a:p>
-            <a:pPr algn="ctr">
-              <a:spcAft>
-                <a:spcPts val="900"/>
-              </a:spcAft>
-              <a:defRPr sz="2300" b="1">
-                <a:solidFill>
-                  <a:srgbClr val="173F32"/>
-                </a:solidFill>
-                <a:latin typeface="Aptos"/>
-              </a:defRPr>
-            </a:pPr>
-            <a:r>
-              <a:t>CLIENT 1</a:t>
-            </a:r>
-          </a:p>
-          <a:p>
-            <a:pPr algn="ctr">
-              <a:spcAft>
-                <a:spcPts val="900"/>
-              </a:spcAft>
-              <a:defRPr sz="2300" b="1">
-                <a:solidFill>
-                  <a:srgbClr val="173F32"/>
-                </a:solidFill>
-                <a:latin typeface="Aptos"/>
-              </a:defRPr>
-            </a:pPr>
-            <a:r>
-              <a:t>Local training</a:t>
-            </a:r>
-          </a:p>
-        </p:txBody>
-      </p:sp>
-      <p:sp>
-        <p:nvSpPr>
-          <p:cNvPr id="32" name="Down Arrow 31"/>
+          <p:cNvPr id="25" name="Rectangle 24"/>
           <p:cNvSpPr/>
           <p:nvPr/>
         </p:nvSpPr>
         <p:spPr>
-          <a:xfrm>
-            <a:off x="2103120" y="20784312"/>
-            <a:ext cx="411480" cy="548640"/>
-          </a:xfrm>
-          <a:prstGeom prst="downArrow">
+          <a:xfrm rot="2220000">
+            <a:off x="1717677" y="5715662"/>
+            <a:ext cx="20882" cy="465383"/>
+          </a:xfrm>
+          <a:prstGeom prst="rect">
             <a:avLst/>
           </a:prstGeom>
           <a:solidFill>
-            <a:srgbClr val="B97722"/>
+            <a:srgbClr val="C8E6D3"/>
           </a:solidFill>
           <a:ln>
             <a:noFill/>
@@ -4517,22 +4123,20 @@
       </p:sp>
       <p:sp>
         <p:nvSpPr>
-          <p:cNvPr id="33" name="Rounded Rectangle 32"/>
+          <p:cNvPr id="26" name="Oval 25"/>
           <p:cNvSpPr/>
           <p:nvPr/>
         </p:nvSpPr>
         <p:spPr>
-          <a:xfrm>
-            <a:off x="4032504" y="19613880"/>
-            <a:ext cx="2880360" cy="1051560"/>
-          </a:xfrm>
-          <a:prstGeom prst="roundRect">
-            <a:avLst>
-              <a:gd name="adj" fmla="val 8000"/>
-            </a:avLst>
+          <a:xfrm rot="2220000">
+            <a:off x="2002078" y="5327843"/>
+            <a:ext cx="429585" cy="686142"/>
+          </a:xfrm>
+          <a:prstGeom prst="ellipse">
+            <a:avLst/>
           </a:prstGeom>
           <a:solidFill>
-            <a:srgbClr val="E7EDE3"/>
+            <a:srgbClr val="226D4A"/>
           </a:solidFill>
           <a:ln>
             <a:noFill/>
@@ -4562,75 +4166,20 @@
       </p:sp>
       <p:sp>
         <p:nvSpPr>
-          <p:cNvPr id="34" name="TextBox 33"/>
-          <p:cNvSpPr txBox="1"/>
-          <p:nvPr/>
-        </p:nvSpPr>
-        <p:spPr>
-          <a:xfrm>
-            <a:off x="4142232" y="19741896"/>
-            <a:ext cx="2660904" cy="841248"/>
-          </a:xfrm>
-          <a:prstGeom prst="rect">
-            <a:avLst/>
-          </a:prstGeom>
-          <a:noFill/>
-        </p:spPr>
-        <p:txBody>
-          <a:bodyPr wrap="square" lIns="18288" rIns="18288" tIns="18288" bIns="18288">
-            <a:spAutoFit/>
-          </a:bodyPr>
-          <a:lstStyle/>
-          <a:p>
-            <a:pPr algn="ctr">
-              <a:spcAft>
-                <a:spcPts val="900"/>
-              </a:spcAft>
-              <a:defRPr sz="2300" b="1">
-                <a:solidFill>
-                  <a:srgbClr val="173F32"/>
-                </a:solidFill>
-                <a:latin typeface="Aptos"/>
-              </a:defRPr>
-            </a:pPr>
-            <a:r>
-              <a:t>CLIENT 2</a:t>
-            </a:r>
-          </a:p>
-          <a:p>
-            <a:pPr algn="ctr">
-              <a:spcAft>
-                <a:spcPts val="900"/>
-              </a:spcAft>
-              <a:defRPr sz="2300" b="1">
-                <a:solidFill>
-                  <a:srgbClr val="173F32"/>
-                </a:solidFill>
-                <a:latin typeface="Aptos"/>
-              </a:defRPr>
-            </a:pPr>
-            <a:r>
-              <a:t>Local training</a:t>
-            </a:r>
-          </a:p>
-        </p:txBody>
-      </p:sp>
-      <p:sp>
-        <p:nvSpPr>
-          <p:cNvPr id="35" name="Down Arrow 34"/>
+          <p:cNvPr id="27" name="Rectangle 26"/>
           <p:cNvSpPr/>
           <p:nvPr/>
         </p:nvSpPr>
         <p:spPr>
-          <a:xfrm>
-            <a:off x="5266944" y="20784312"/>
-            <a:ext cx="411480" cy="548640"/>
-          </a:xfrm>
-          <a:prstGeom prst="downArrow">
+          <a:xfrm rot="2220000">
+            <a:off x="2234770" y="5477004"/>
+            <a:ext cx="20882" cy="465383"/>
+          </a:xfrm>
+          <a:prstGeom prst="rect">
             <a:avLst/>
           </a:prstGeom>
           <a:solidFill>
-            <a:srgbClr val="B97722"/>
+            <a:srgbClr val="C8E6D3"/>
           </a:solidFill>
           <a:ln>
             <a:noFill/>
@@ -4660,22 +4209,20 @@
       </p:sp>
       <p:sp>
         <p:nvSpPr>
-          <p:cNvPr id="36" name="Rounded Rectangle 35"/>
+          <p:cNvPr id="28" name="Trapezoid 27"/>
           <p:cNvSpPr/>
           <p:nvPr/>
         </p:nvSpPr>
         <p:spPr>
           <a:xfrm>
-            <a:off x="7196328" y="19613880"/>
-            <a:ext cx="2880360" cy="1051560"/>
-          </a:xfrm>
-          <a:prstGeom prst="roundRect">
-            <a:avLst>
-              <a:gd name="adj" fmla="val 8000"/>
-            </a:avLst>
+            <a:off x="1484985" y="6616598"/>
+            <a:ext cx="954633" cy="397764"/>
+          </a:xfrm>
+          <a:prstGeom prst="trapezoid">
+            <a:avLst/>
           </a:prstGeom>
           <a:solidFill>
-            <a:srgbClr val="E7EDE3"/>
+            <a:srgbClr val="075D93"/>
           </a:solidFill>
           <a:ln>
             <a:noFill/>
@@ -4705,14 +4252,14 @@
       </p:sp>
       <p:sp>
         <p:nvSpPr>
-          <p:cNvPr id="37" name="TextBox 36"/>
+          <p:cNvPr id="29" name="TextBox 28"/>
           <p:cNvSpPr txBox="1"/>
           <p:nvPr/>
         </p:nvSpPr>
         <p:spPr>
           <a:xfrm>
-            <a:off x="7306056" y="19741896"/>
-            <a:ext cx="2660904" cy="841248"/>
+            <a:off x="3657600" y="5321808"/>
+            <a:ext cx="16230600" cy="1664208"/>
           </a:xfrm>
           <a:prstGeom prst="rect">
             <a:avLst/>
@@ -4720,63 +4267,54 @@
           <a:noFill/>
         </p:spPr>
         <p:txBody>
-          <a:bodyPr wrap="square" lIns="18288" rIns="18288" tIns="18288" bIns="18288">
+          <a:bodyPr wrap="square" lIns="36576" rIns="36576" tIns="13716" bIns="13716">
             <a:spAutoFit/>
           </a:bodyPr>
           <a:lstStyle/>
           <a:p>
-            <a:pPr algn="ctr">
+            <a:pPr algn="l">
+              <a:spcBef>
+                <a:spcPts val="0"/>
+              </a:spcBef>
               <a:spcAft>
-                <a:spcPts val="900"/>
+                <a:spcPts val="500"/>
               </a:spcAft>
-              <a:defRPr sz="2300" b="1">
+              <a:defRPr sz="2600" b="0">
                 <a:solidFill>
-                  <a:srgbClr val="173F32"/>
+                  <a:srgbClr val="243747"/>
                 </a:solidFill>
                 <a:latin typeface="Aptos"/>
               </a:defRPr>
             </a:pPr>
             <a:r>
-              <a:t>CLIENT 3</a:t>
-            </a:r>
-          </a:p>
-          <a:p>
-            <a:pPr algn="ctr">
-              <a:spcAft>
-                <a:spcPts val="900"/>
-              </a:spcAft>
-              <a:defRPr sz="2300" b="1">
-                <a:solidFill>
-                  <a:srgbClr val="173F32"/>
-                </a:solidFill>
-                <a:latin typeface="Aptos"/>
-              </a:defRPr>
-            </a:pPr>
-            <a:r>
-              <a:t>Local training</a:t>
-            </a:r>
-          </a:p>
-        </p:txBody>
-      </p:sp>
-      <p:sp>
-        <p:nvSpPr>
-          <p:cNvPr id="38" name="Down Arrow 37"/>
+              <a:t>Agri Vision investigates crop-disease and pest-symptom detection using bounding boxes and disease labels. A three-client federated-learning simulation trains a shared detector across separate data partitions. The revised study covers banana, cauliflower, groundnut and radish across 24 classes. SSDLite, SSD–MobileNetV3 and EfficientDet-D0 are being compared with the retained historical YOLOv8n baseline.</a:t>
+            </a:r>
+          </a:p>
+        </p:txBody>
+      </p:sp>
+      <p:sp>
+        <p:nvSpPr>
+          <p:cNvPr id="30" name="Rounded Rectangle 29"/>
           <p:cNvSpPr/>
           <p:nvPr/>
         </p:nvSpPr>
         <p:spPr>
           <a:xfrm>
-            <a:off x="8430768" y="20784312"/>
-            <a:ext cx="411480" cy="548640"/>
-          </a:xfrm>
-          <a:prstGeom prst="downArrow">
-            <a:avLst/>
+            <a:off x="640080" y="7406640"/>
+            <a:ext cx="20103840" cy="2331720"/>
+          </a:xfrm>
+          <a:prstGeom prst="roundRect">
+            <a:avLst>
+              <a:gd name="adj" fmla="val 8000"/>
+            </a:avLst>
           </a:prstGeom>
           <a:solidFill>
-            <a:srgbClr val="B97722"/>
+            <a:srgbClr val="FFFFFF"/>
           </a:solidFill>
-          <a:ln>
-            <a:noFill/>
+          <a:ln w="22860">
+            <a:solidFill>
+              <a:srgbClr val="39BED1"/>
+            </a:solidFill>
           </a:ln>
         </p:spPr>
         <p:style>
@@ -4803,22 +4341,142 @@
       </p:sp>
       <p:sp>
         <p:nvSpPr>
-          <p:cNvPr id="39" name="Rounded Rectangle 38"/>
+          <p:cNvPr id="31" name="TextBox 30"/>
+          <p:cNvSpPr txBox="1"/>
+          <p:nvPr/>
+        </p:nvSpPr>
+        <p:spPr>
+          <a:xfrm>
+            <a:off x="1097280" y="7552944"/>
+            <a:ext cx="19189440" cy="502920"/>
+          </a:xfrm>
+          <a:prstGeom prst="rect">
+            <a:avLst/>
+          </a:prstGeom>
+          <a:noFill/>
+        </p:spPr>
+        <p:txBody>
+          <a:bodyPr wrap="square" lIns="36576" rIns="36576" tIns="13716" bIns="13716">
+            <a:spAutoFit/>
+          </a:bodyPr>
+          <a:lstStyle/>
+          <a:p>
+            <a:pPr algn="ctr">
+              <a:spcBef>
+                <a:spcPts val="0"/>
+              </a:spcBef>
+              <a:spcAft>
+                <a:spcPts val="500"/>
+              </a:spcAft>
+              <a:defRPr sz="3000" b="1">
+                <a:solidFill>
+                  <a:srgbClr val="075D93"/>
+                </a:solidFill>
+                <a:latin typeface="Aptos"/>
+              </a:defRPr>
+            </a:pPr>
+            <a:r>
+              <a:t>PROBLEM STATEMENT</a:t>
+            </a:r>
+          </a:p>
+        </p:txBody>
+      </p:sp>
+      <p:sp>
+        <p:nvSpPr>
+          <p:cNvPr id="32" name="TextBox 31"/>
+          <p:cNvSpPr txBox="1"/>
+          <p:nvPr/>
+        </p:nvSpPr>
+        <p:spPr>
+          <a:xfrm>
+            <a:off x="1234440" y="8129016"/>
+            <a:ext cx="15910559" cy="1380744"/>
+          </a:xfrm>
+          <a:prstGeom prst="rect">
+            <a:avLst/>
+          </a:prstGeom>
+          <a:noFill/>
+        </p:spPr>
+        <p:txBody>
+          <a:bodyPr wrap="square" lIns="36576" rIns="36576" tIns="13716" bIns="13716">
+            <a:spAutoFit/>
+          </a:bodyPr>
+          <a:lstStyle/>
+          <a:p>
+            <a:pPr algn="l">
+              <a:spcBef>
+                <a:spcPts val="0"/>
+              </a:spcBef>
+              <a:spcAft>
+                <a:spcPts val="500"/>
+              </a:spcAft>
+              <a:defRPr sz="2600" b="0">
+                <a:solidFill>
+                  <a:srgbClr val="243747"/>
+                </a:solidFill>
+                <a:latin typeface="Aptos"/>
+              </a:defRPr>
+            </a:pPr>
+            <a:r>
+              <a:t>• Small lesions and similar symptoms make visual diagnosis difficult.</a:t>
+            </a:r>
+          </a:p>
+          <a:p>
+            <a:pPr algn="l">
+              <a:spcBef>
+                <a:spcPts val="0"/>
+              </a:spcBef>
+              <a:spcAft>
+                <a:spcPts val="500"/>
+              </a:spcAft>
+              <a:defRPr sz="2600" b="0">
+                <a:solidFill>
+                  <a:srgbClr val="243747"/>
+                </a:solidFill>
+                <a:latin typeface="Aptos"/>
+              </a:defRPr>
+            </a:pPr>
+            <a:r>
+              <a:t>• Uneven class representation and variable image quality affect detection.</a:t>
+            </a:r>
+          </a:p>
+          <a:p>
+            <a:pPr algn="l">
+              <a:spcBef>
+                <a:spcPts val="0"/>
+              </a:spcBef>
+              <a:spcAft>
+                <a:spcPts val="500"/>
+              </a:spcAft>
+              <a:defRPr sz="2600" b="0">
+                <a:solidFill>
+                  <a:srgbClr val="243747"/>
+                </a:solidFill>
+                <a:latin typeface="Aptos"/>
+              </a:defRPr>
+            </a:pPr>
+            <a:r>
+              <a:t>• A useful detector must balance precision, recall, localisation and computing cost.</a:t>
+            </a:r>
+          </a:p>
+        </p:txBody>
+      </p:sp>
+      <p:sp>
+        <p:nvSpPr>
+          <p:cNvPr id="33" name="Oval 32"/>
           <p:cNvSpPr/>
           <p:nvPr/>
         </p:nvSpPr>
         <p:spPr>
           <a:xfrm>
-            <a:off x="868680" y="21534120"/>
-            <a:ext cx="9326880" cy="841248"/>
-          </a:xfrm>
-          <a:prstGeom prst="roundRect">
-            <a:avLst>
-              <a:gd name="adj" fmla="val 8000"/>
-            </a:avLst>
+            <a:off x="17785080" y="8165592"/>
+            <a:ext cx="1188720" cy="1188720"/>
+          </a:xfrm>
+          <a:prstGeom prst="ellipse">
+            <a:avLst/>
           </a:prstGeom>
           <a:solidFill>
-            <a:srgbClr val="173F32"/>
+            <a:srgbClr val="EEF7F3"/>
           </a:solidFill>
           <a:ln>
             <a:noFill/>
@@ -4848,14 +4506,319 @@
       </p:sp>
       <p:sp>
         <p:nvSpPr>
-          <p:cNvPr id="40" name="TextBox 39"/>
+          <p:cNvPr id="34" name="Oval 33"/>
+          <p:cNvSpPr/>
+          <p:nvPr/>
+        </p:nvSpPr>
+        <p:spPr>
+          <a:xfrm rot="2220000">
+            <a:off x="18114264" y="8247888"/>
+            <a:ext cx="559612" cy="893825"/>
+          </a:xfrm>
+          <a:prstGeom prst="ellipse">
+            <a:avLst/>
+          </a:prstGeom>
+          <a:solidFill>
+            <a:srgbClr val="226D4A"/>
+          </a:solidFill>
+          <a:ln>
+            <a:noFill/>
+          </a:ln>
+        </p:spPr>
+        <p:style>
+          <a:lnRef idx="1">
+            <a:schemeClr val="accent1"/>
+          </a:lnRef>
+          <a:fillRef idx="3">
+            <a:schemeClr val="accent1"/>
+          </a:fillRef>
+          <a:effectRef idx="2">
+            <a:schemeClr val="accent1"/>
+          </a:effectRef>
+          <a:fontRef idx="minor">
+            <a:schemeClr val="lt1"/>
+          </a:fontRef>
+        </p:style>
+        <p:txBody>
+          <a:bodyPr rtlCol="0" anchor="ctr"/>
+          <a:lstStyle/>
+          <a:p>
+            <a:pPr algn="ctr"/>
+          </a:p>
+        </p:txBody>
+      </p:sp>
+      <p:sp>
+        <p:nvSpPr>
+          <p:cNvPr id="35" name="Rectangle 34"/>
+          <p:cNvSpPr/>
+          <p:nvPr/>
+        </p:nvSpPr>
+        <p:spPr>
+          <a:xfrm rot="2220000">
+            <a:off x="18417387" y="8442198"/>
+            <a:ext cx="27203" cy="606247"/>
+          </a:xfrm>
+          <a:prstGeom prst="rect">
+            <a:avLst/>
+          </a:prstGeom>
+          <a:solidFill>
+            <a:srgbClr val="C8E6D3"/>
+          </a:solidFill>
+          <a:ln>
+            <a:noFill/>
+          </a:ln>
+        </p:spPr>
+        <p:style>
+          <a:lnRef idx="1">
+            <a:schemeClr val="accent1"/>
+          </a:lnRef>
+          <a:fillRef idx="3">
+            <a:schemeClr val="accent1"/>
+          </a:fillRef>
+          <a:effectRef idx="2">
+            <a:schemeClr val="accent1"/>
+          </a:effectRef>
+          <a:fontRef idx="minor">
+            <a:schemeClr val="lt1"/>
+          </a:fontRef>
+        </p:style>
+        <p:txBody>
+          <a:bodyPr rtlCol="0" anchor="ctr"/>
+          <a:lstStyle/>
+          <a:p>
+            <a:pPr algn="ctr"/>
+          </a:p>
+        </p:txBody>
+      </p:sp>
+      <p:sp>
+        <p:nvSpPr>
+          <p:cNvPr id="36" name="Oval 35"/>
+          <p:cNvSpPr/>
+          <p:nvPr/>
+        </p:nvSpPr>
+        <p:spPr>
+          <a:xfrm>
+            <a:off x="18315431" y="8577072"/>
+            <a:ext cx="128016" cy="128016"/>
+          </a:xfrm>
+          <a:prstGeom prst="ellipse">
+            <a:avLst/>
+          </a:prstGeom>
+          <a:solidFill>
+            <a:srgbClr val="AE6B38"/>
+          </a:solidFill>
+          <a:ln>
+            <a:noFill/>
+          </a:ln>
+        </p:spPr>
+        <p:style>
+          <a:lnRef idx="1">
+            <a:schemeClr val="accent1"/>
+          </a:lnRef>
+          <a:fillRef idx="3">
+            <a:schemeClr val="accent1"/>
+          </a:fillRef>
+          <a:effectRef idx="2">
+            <a:schemeClr val="accent1"/>
+          </a:effectRef>
+          <a:fontRef idx="minor">
+            <a:schemeClr val="lt1"/>
+          </a:fontRef>
+        </p:style>
+        <p:txBody>
+          <a:bodyPr rtlCol="0" anchor="ctr"/>
+          <a:lstStyle/>
+          <a:p>
+            <a:pPr algn="ctr"/>
+          </a:p>
+        </p:txBody>
+      </p:sp>
+      <p:sp>
+        <p:nvSpPr>
+          <p:cNvPr id="37" name="Oval 36"/>
+          <p:cNvSpPr/>
+          <p:nvPr/>
+        </p:nvSpPr>
+        <p:spPr>
+          <a:xfrm>
+            <a:off x="18562319" y="8805672"/>
+            <a:ext cx="128016" cy="128016"/>
+          </a:xfrm>
+          <a:prstGeom prst="ellipse">
+            <a:avLst/>
+          </a:prstGeom>
+          <a:solidFill>
+            <a:srgbClr val="AE6B38"/>
+          </a:solidFill>
+          <a:ln>
+            <a:noFill/>
+          </a:ln>
+        </p:spPr>
+        <p:style>
+          <a:lnRef idx="1">
+            <a:schemeClr val="accent1"/>
+          </a:lnRef>
+          <a:fillRef idx="3">
+            <a:schemeClr val="accent1"/>
+          </a:fillRef>
+          <a:effectRef idx="2">
+            <a:schemeClr val="accent1"/>
+          </a:effectRef>
+          <a:fontRef idx="minor">
+            <a:schemeClr val="lt1"/>
+          </a:fontRef>
+        </p:style>
+        <p:txBody>
+          <a:bodyPr rtlCol="0" anchor="ctr"/>
+          <a:lstStyle/>
+          <a:p>
+            <a:pPr algn="ctr"/>
+          </a:p>
+        </p:txBody>
+      </p:sp>
+      <p:sp>
+        <p:nvSpPr>
+          <p:cNvPr id="38" name="Oval 37"/>
+          <p:cNvSpPr/>
+          <p:nvPr/>
+        </p:nvSpPr>
+        <p:spPr>
+          <a:xfrm>
+            <a:off x="18416015" y="8942832"/>
+            <a:ext cx="128016" cy="128016"/>
+          </a:xfrm>
+          <a:prstGeom prst="ellipse">
+            <a:avLst/>
+          </a:prstGeom>
+          <a:solidFill>
+            <a:srgbClr val="AE6B38"/>
+          </a:solidFill>
+          <a:ln>
+            <a:noFill/>
+          </a:ln>
+        </p:spPr>
+        <p:style>
+          <a:lnRef idx="1">
+            <a:schemeClr val="accent1"/>
+          </a:lnRef>
+          <a:fillRef idx="3">
+            <a:schemeClr val="accent1"/>
+          </a:fillRef>
+          <a:effectRef idx="2">
+            <a:schemeClr val="accent1"/>
+          </a:effectRef>
+          <a:fontRef idx="minor">
+            <a:schemeClr val="lt1"/>
+          </a:fontRef>
+        </p:style>
+        <p:txBody>
+          <a:bodyPr rtlCol="0" anchor="ctr"/>
+          <a:lstStyle/>
+          <a:p>
+            <a:pPr algn="ctr"/>
+          </a:p>
+        </p:txBody>
+      </p:sp>
+      <p:sp>
+        <p:nvSpPr>
+          <p:cNvPr id="39" name="Rectangle 38"/>
+          <p:cNvSpPr/>
+          <p:nvPr/>
+        </p:nvSpPr>
+        <p:spPr>
+          <a:xfrm rot="2700000">
+            <a:off x="18754344" y="9162288"/>
+            <a:ext cx="457200" cy="73152"/>
+          </a:xfrm>
+          <a:prstGeom prst="rect">
+            <a:avLst/>
+          </a:prstGeom>
+          <a:solidFill>
+            <a:srgbClr val="075D93"/>
+          </a:solidFill>
+          <a:ln>
+            <a:noFill/>
+          </a:ln>
+        </p:spPr>
+        <p:style>
+          <a:lnRef idx="1">
+            <a:schemeClr val="accent1"/>
+          </a:lnRef>
+          <a:fillRef idx="3">
+            <a:schemeClr val="accent1"/>
+          </a:fillRef>
+          <a:effectRef idx="2">
+            <a:schemeClr val="accent1"/>
+          </a:effectRef>
+          <a:fontRef idx="minor">
+            <a:schemeClr val="lt1"/>
+          </a:fontRef>
+        </p:style>
+        <p:txBody>
+          <a:bodyPr rtlCol="0" anchor="ctr"/>
+          <a:lstStyle/>
+          <a:p>
+            <a:pPr algn="ctr"/>
+          </a:p>
+        </p:txBody>
+      </p:sp>
+      <p:sp>
+        <p:nvSpPr>
+          <p:cNvPr id="40" name="Rounded Rectangle 39"/>
+          <p:cNvSpPr/>
+          <p:nvPr/>
+        </p:nvSpPr>
+        <p:spPr>
+          <a:xfrm>
+            <a:off x="640080" y="9966960"/>
+            <a:ext cx="20103840" cy="2468880"/>
+          </a:xfrm>
+          <a:prstGeom prst="roundRect">
+            <a:avLst>
+              <a:gd name="adj" fmla="val 8000"/>
+            </a:avLst>
+          </a:prstGeom>
+          <a:solidFill>
+            <a:srgbClr val="FFFFFF"/>
+          </a:solidFill>
+          <a:ln w="22860">
+            <a:solidFill>
+              <a:srgbClr val="39BED1"/>
+            </a:solidFill>
+          </a:ln>
+        </p:spPr>
+        <p:style>
+          <a:lnRef idx="1">
+            <a:schemeClr val="accent1"/>
+          </a:lnRef>
+          <a:fillRef idx="3">
+            <a:schemeClr val="accent1"/>
+          </a:fillRef>
+          <a:effectRef idx="2">
+            <a:schemeClr val="accent1"/>
+          </a:effectRef>
+          <a:fontRef idx="minor">
+            <a:schemeClr val="lt1"/>
+          </a:fontRef>
+        </p:style>
+        <p:txBody>
+          <a:bodyPr rtlCol="0" anchor="ctr"/>
+          <a:lstStyle/>
+          <a:p>
+            <a:pPr algn="ctr"/>
+          </a:p>
+        </p:txBody>
+      </p:sp>
+      <p:sp>
+        <p:nvSpPr>
+          <p:cNvPr id="41" name="TextBox 40"/>
           <p:cNvSpPr txBox="1"/>
           <p:nvPr/>
         </p:nvSpPr>
         <p:spPr>
           <a:xfrm>
-            <a:off x="1051560" y="21735288"/>
-            <a:ext cx="8961120" cy="457200"/>
+            <a:off x="1097280" y="10113264"/>
+            <a:ext cx="19189440" cy="502920"/>
           </a:xfrm>
           <a:prstGeom prst="rect">
             <a:avLst/>
@@ -4863,14 +4826,988 @@
           <a:noFill/>
         </p:spPr>
         <p:txBody>
-          <a:bodyPr wrap="square" lIns="18288" rIns="18288" tIns="18288" bIns="18288">
+          <a:bodyPr wrap="square" lIns="36576" rIns="36576" tIns="13716" bIns="13716">
             <a:spAutoFit/>
           </a:bodyPr>
           <a:lstStyle/>
           <a:p>
             <a:pPr algn="ctr">
+              <a:spcBef>
+                <a:spcPts val="0"/>
+              </a:spcBef>
               <a:spcAft>
-                <a:spcPts val="900"/>
+                <a:spcPts val="500"/>
+              </a:spcAft>
+              <a:defRPr sz="3000" b="1">
+                <a:solidFill>
+                  <a:srgbClr val="075D93"/>
+                </a:solidFill>
+                <a:latin typeface="Aptos"/>
+              </a:defRPr>
+            </a:pPr>
+            <a:r>
+              <a:t>AIM AND OBJECTIVES</a:t>
+            </a:r>
+          </a:p>
+        </p:txBody>
+      </p:sp>
+      <p:sp>
+        <p:nvSpPr>
+          <p:cNvPr id="42" name="Rectangle 41"/>
+          <p:cNvSpPr/>
+          <p:nvPr/>
+        </p:nvSpPr>
+        <p:spPr>
+          <a:xfrm>
+            <a:off x="1801368" y="11029492"/>
+            <a:ext cx="48646" cy="833932"/>
+          </a:xfrm>
+          <a:prstGeom prst="rect">
+            <a:avLst/>
+          </a:prstGeom>
+          <a:solidFill>
+            <a:srgbClr val="226D4A"/>
+          </a:solidFill>
+          <a:ln>
+            <a:noFill/>
+          </a:ln>
+        </p:spPr>
+        <p:style>
+          <a:lnRef idx="1">
+            <a:schemeClr val="accent1"/>
+          </a:lnRef>
+          <a:fillRef idx="3">
+            <a:schemeClr val="accent1"/>
+          </a:fillRef>
+          <a:effectRef idx="2">
+            <a:schemeClr val="accent1"/>
+          </a:effectRef>
+          <a:fontRef idx="minor">
+            <a:schemeClr val="lt1"/>
+          </a:fontRef>
+        </p:style>
+        <p:txBody>
+          <a:bodyPr rtlCol="0" anchor="ctr"/>
+          <a:lstStyle/>
+          <a:p>
+            <a:pPr algn="ctr"/>
+          </a:p>
+        </p:txBody>
+      </p:sp>
+      <p:sp>
+        <p:nvSpPr>
+          <p:cNvPr id="43" name="Oval 42"/>
+          <p:cNvSpPr/>
+          <p:nvPr/>
+        </p:nvSpPr>
+        <p:spPr>
+          <a:xfrm rot="2220000">
+            <a:off x="1419148" y="10876605"/>
+            <a:ext cx="375269" cy="599389"/>
+          </a:xfrm>
+          <a:prstGeom prst="ellipse">
+            <a:avLst/>
+          </a:prstGeom>
+          <a:solidFill>
+            <a:srgbClr val="226D4A"/>
+          </a:solidFill>
+          <a:ln>
+            <a:noFill/>
+          </a:ln>
+        </p:spPr>
+        <p:style>
+          <a:lnRef idx="1">
+            <a:schemeClr val="accent1"/>
+          </a:lnRef>
+          <a:fillRef idx="3">
+            <a:schemeClr val="accent1"/>
+          </a:fillRef>
+          <a:effectRef idx="2">
+            <a:schemeClr val="accent1"/>
+          </a:effectRef>
+          <a:fontRef idx="minor">
+            <a:schemeClr val="lt1"/>
+          </a:fontRef>
+        </p:style>
+        <p:txBody>
+          <a:bodyPr rtlCol="0" anchor="ctr"/>
+          <a:lstStyle/>
+          <a:p>
+            <a:pPr algn="ctr"/>
+          </a:p>
+        </p:txBody>
+      </p:sp>
+      <p:sp>
+        <p:nvSpPr>
+          <p:cNvPr id="44" name="Rectangle 43"/>
+          <p:cNvSpPr/>
+          <p:nvPr/>
+        </p:nvSpPr>
+        <p:spPr>
+          <a:xfrm rot="2220000">
+            <a:off x="1622419" y="11006907"/>
+            <a:ext cx="18242" cy="406542"/>
+          </a:xfrm>
+          <a:prstGeom prst="rect">
+            <a:avLst/>
+          </a:prstGeom>
+          <a:solidFill>
+            <a:srgbClr val="C8E6D3"/>
+          </a:solidFill>
+          <a:ln>
+            <a:noFill/>
+          </a:ln>
+        </p:spPr>
+        <p:style>
+          <a:lnRef idx="1">
+            <a:schemeClr val="accent1"/>
+          </a:lnRef>
+          <a:fillRef idx="3">
+            <a:schemeClr val="accent1"/>
+          </a:fillRef>
+          <a:effectRef idx="2">
+            <a:schemeClr val="accent1"/>
+          </a:effectRef>
+          <a:fontRef idx="minor">
+            <a:schemeClr val="lt1"/>
+          </a:fontRef>
+        </p:style>
+        <p:txBody>
+          <a:bodyPr rtlCol="0" anchor="ctr"/>
+          <a:lstStyle/>
+          <a:p>
+            <a:pPr algn="ctr"/>
+          </a:p>
+        </p:txBody>
+      </p:sp>
+      <p:sp>
+        <p:nvSpPr>
+          <p:cNvPr id="45" name="Oval 44"/>
+          <p:cNvSpPr/>
+          <p:nvPr/>
+        </p:nvSpPr>
+        <p:spPr>
+          <a:xfrm rot="2220000">
+            <a:off x="1870862" y="10668121"/>
+            <a:ext cx="375269" cy="599389"/>
+          </a:xfrm>
+          <a:prstGeom prst="ellipse">
+            <a:avLst/>
+          </a:prstGeom>
+          <a:solidFill>
+            <a:srgbClr val="226D4A"/>
+          </a:solidFill>
+          <a:ln>
+            <a:noFill/>
+          </a:ln>
+        </p:spPr>
+        <p:style>
+          <a:lnRef idx="1">
+            <a:schemeClr val="accent1"/>
+          </a:lnRef>
+          <a:fillRef idx="3">
+            <a:schemeClr val="accent1"/>
+          </a:fillRef>
+          <a:effectRef idx="2">
+            <a:schemeClr val="accent1"/>
+          </a:effectRef>
+          <a:fontRef idx="minor">
+            <a:schemeClr val="lt1"/>
+          </a:fontRef>
+        </p:style>
+        <p:txBody>
+          <a:bodyPr rtlCol="0" anchor="ctr"/>
+          <a:lstStyle/>
+          <a:p>
+            <a:pPr algn="ctr"/>
+          </a:p>
+        </p:txBody>
+      </p:sp>
+      <p:sp>
+        <p:nvSpPr>
+          <p:cNvPr id="46" name="Rectangle 45"/>
+          <p:cNvSpPr/>
+          <p:nvPr/>
+        </p:nvSpPr>
+        <p:spPr>
+          <a:xfrm rot="2220000">
+            <a:off x="2074133" y="10798423"/>
+            <a:ext cx="18242" cy="406542"/>
+          </a:xfrm>
+          <a:prstGeom prst="rect">
+            <a:avLst/>
+          </a:prstGeom>
+          <a:solidFill>
+            <a:srgbClr val="C8E6D3"/>
+          </a:solidFill>
+          <a:ln>
+            <a:noFill/>
+          </a:ln>
+        </p:spPr>
+        <p:style>
+          <a:lnRef idx="1">
+            <a:schemeClr val="accent1"/>
+          </a:lnRef>
+          <a:fillRef idx="3">
+            <a:schemeClr val="accent1"/>
+          </a:fillRef>
+          <a:effectRef idx="2">
+            <a:schemeClr val="accent1"/>
+          </a:effectRef>
+          <a:fontRef idx="minor">
+            <a:schemeClr val="lt1"/>
+          </a:fontRef>
+        </p:style>
+        <p:txBody>
+          <a:bodyPr rtlCol="0" anchor="ctr"/>
+          <a:lstStyle/>
+          <a:p>
+            <a:pPr algn="ctr"/>
+          </a:p>
+        </p:txBody>
+      </p:sp>
+      <p:sp>
+        <p:nvSpPr>
+          <p:cNvPr id="47" name="Trapezoid 46"/>
+          <p:cNvSpPr/>
+          <p:nvPr/>
+        </p:nvSpPr>
+        <p:spPr>
+          <a:xfrm>
+            <a:off x="1419148" y="11793931"/>
+            <a:ext cx="833932" cy="347472"/>
+          </a:xfrm>
+          <a:prstGeom prst="trapezoid">
+            <a:avLst/>
+          </a:prstGeom>
+          <a:solidFill>
+            <a:srgbClr val="075D93"/>
+          </a:solidFill>
+          <a:ln>
+            <a:noFill/>
+          </a:ln>
+        </p:spPr>
+        <p:style>
+          <a:lnRef idx="1">
+            <a:schemeClr val="accent1"/>
+          </a:lnRef>
+          <a:fillRef idx="3">
+            <a:schemeClr val="accent1"/>
+          </a:fillRef>
+          <a:effectRef idx="2">
+            <a:schemeClr val="accent1"/>
+          </a:effectRef>
+          <a:fontRef idx="minor">
+            <a:schemeClr val="lt1"/>
+          </a:fontRef>
+        </p:style>
+        <p:txBody>
+          <a:bodyPr rtlCol="0" anchor="ctr"/>
+          <a:lstStyle/>
+          <a:p>
+            <a:pPr algn="ctr"/>
+          </a:p>
+        </p:txBody>
+      </p:sp>
+      <p:sp>
+        <p:nvSpPr>
+          <p:cNvPr id="48" name="TextBox 47"/>
+          <p:cNvSpPr txBox="1"/>
+          <p:nvPr/>
+        </p:nvSpPr>
+        <p:spPr>
+          <a:xfrm>
+            <a:off x="3657600" y="10634472"/>
+            <a:ext cx="16230600" cy="1755648"/>
+          </a:xfrm>
+          <a:prstGeom prst="rect">
+            <a:avLst/>
+          </a:prstGeom>
+          <a:noFill/>
+        </p:spPr>
+        <p:txBody>
+          <a:bodyPr wrap="square" lIns="36576" rIns="36576" tIns="13716" bIns="13716">
+            <a:spAutoFit/>
+          </a:bodyPr>
+          <a:lstStyle/>
+          <a:p>
+            <a:pPr algn="l">
+              <a:spcBef>
+                <a:spcPts val="0"/>
+              </a:spcBef>
+              <a:spcAft>
+                <a:spcPts val="500"/>
+              </a:spcAft>
+              <a:defRPr sz="2500" b="0">
+                <a:solidFill>
+                  <a:srgbClr val="243747"/>
+                </a:solidFill>
+                <a:latin typeface="Aptos"/>
+              </a:defRPr>
+            </a:pPr>
+            <a:r>
+              <a:t>Develop and assess an efficient federated crop-symptom detector.</a:t>
+            </a:r>
+          </a:p>
+          <a:p>
+            <a:pPr algn="l">
+              <a:spcBef>
+                <a:spcPts val="0"/>
+              </a:spcBef>
+              <a:spcAft>
+                <a:spcPts val="500"/>
+              </a:spcAft>
+              <a:defRPr sz="2500" b="0">
+                <a:solidFill>
+                  <a:srgbClr val="243747"/>
+                </a:solidFill>
+                <a:latin typeface="Aptos"/>
+              </a:defRPr>
+            </a:pPr>
+            <a:r>
+              <a:t>• Use one verified 24-class dataset with fixed train, validation and test splits.</a:t>
+            </a:r>
+          </a:p>
+          <a:p>
+            <a:pPr algn="l">
+              <a:spcBef>
+                <a:spcPts val="0"/>
+              </a:spcBef>
+              <a:spcAft>
+                <a:spcPts val="500"/>
+              </a:spcAft>
+              <a:defRPr sz="2500" b="0">
+                <a:solidFill>
+                  <a:srgbClr val="243747"/>
+                </a:solidFill>
+                <a:latin typeface="Aptos"/>
+              </a:defRPr>
+            </a:pPr>
+            <a:r>
+              <a:t>• Compare four complete one-stage detectors through separate experiments.</a:t>
+            </a:r>
+          </a:p>
+          <a:p>
+            <a:pPr algn="l">
+              <a:spcBef>
+                <a:spcPts val="0"/>
+              </a:spcBef>
+              <a:spcAft>
+                <a:spcPts val="500"/>
+              </a:spcAft>
+              <a:defRPr sz="2500" b="0">
+                <a:solidFill>
+                  <a:srgbClr val="243747"/>
+                </a:solidFill>
+                <a:latin typeface="Aptos"/>
+              </a:defRPr>
+            </a:pPr>
+            <a:r>
+              <a:t>• Measure precision, recall, mAP, inference speed and model size.</a:t>
+            </a:r>
+          </a:p>
+        </p:txBody>
+      </p:sp>
+      <p:sp>
+        <p:nvSpPr>
+          <p:cNvPr id="49" name="Rounded Rectangle 48"/>
+          <p:cNvSpPr/>
+          <p:nvPr/>
+        </p:nvSpPr>
+        <p:spPr>
+          <a:xfrm>
+            <a:off x="640080" y="12664440"/>
+            <a:ext cx="20103840" cy="4846320"/>
+          </a:xfrm>
+          <a:prstGeom prst="roundRect">
+            <a:avLst>
+              <a:gd name="adj" fmla="val 8000"/>
+            </a:avLst>
+          </a:prstGeom>
+          <a:solidFill>
+            <a:srgbClr val="FFFFFF"/>
+          </a:solidFill>
+          <a:ln w="22860">
+            <a:solidFill>
+              <a:srgbClr val="39BED1"/>
+            </a:solidFill>
+          </a:ln>
+        </p:spPr>
+        <p:style>
+          <a:lnRef idx="1">
+            <a:schemeClr val="accent1"/>
+          </a:lnRef>
+          <a:fillRef idx="3">
+            <a:schemeClr val="accent1"/>
+          </a:fillRef>
+          <a:effectRef idx="2">
+            <a:schemeClr val="accent1"/>
+          </a:effectRef>
+          <a:fontRef idx="minor">
+            <a:schemeClr val="lt1"/>
+          </a:fontRef>
+        </p:style>
+        <p:txBody>
+          <a:bodyPr rtlCol="0" anchor="ctr"/>
+          <a:lstStyle/>
+          <a:p>
+            <a:pPr algn="ctr"/>
+          </a:p>
+        </p:txBody>
+      </p:sp>
+      <p:sp>
+        <p:nvSpPr>
+          <p:cNvPr id="50" name="TextBox 49"/>
+          <p:cNvSpPr txBox="1"/>
+          <p:nvPr/>
+        </p:nvSpPr>
+        <p:spPr>
+          <a:xfrm>
+            <a:off x="1097280" y="12810744"/>
+            <a:ext cx="19189440" cy="502920"/>
+          </a:xfrm>
+          <a:prstGeom prst="rect">
+            <a:avLst/>
+          </a:prstGeom>
+          <a:noFill/>
+        </p:spPr>
+        <p:txBody>
+          <a:bodyPr wrap="square" lIns="36576" rIns="36576" tIns="13716" bIns="13716">
+            <a:spAutoFit/>
+          </a:bodyPr>
+          <a:lstStyle/>
+          <a:p>
+            <a:pPr algn="ctr">
+              <a:spcBef>
+                <a:spcPts val="0"/>
+              </a:spcBef>
+              <a:spcAft>
+                <a:spcPts val="500"/>
+              </a:spcAft>
+              <a:defRPr sz="3000" b="1">
+                <a:solidFill>
+                  <a:srgbClr val="075D93"/>
+                </a:solidFill>
+                <a:latin typeface="Aptos"/>
+              </a:defRPr>
+            </a:pPr>
+            <a:r>
+              <a:t>METHODOLOGY</a:t>
+            </a:r>
+          </a:p>
+        </p:txBody>
+      </p:sp>
+      <p:sp>
+        <p:nvSpPr>
+          <p:cNvPr id="51" name="TextBox 50"/>
+          <p:cNvSpPr txBox="1"/>
+          <p:nvPr/>
+        </p:nvSpPr>
+        <p:spPr>
+          <a:xfrm>
+            <a:off x="1005840" y="13331952"/>
+            <a:ext cx="19372320" cy="420624"/>
+          </a:xfrm>
+          <a:prstGeom prst="rect">
+            <a:avLst/>
+          </a:prstGeom>
+          <a:noFill/>
+        </p:spPr>
+        <p:txBody>
+          <a:bodyPr wrap="square" lIns="36576" rIns="36576" tIns="13716" bIns="13716">
+            <a:spAutoFit/>
+          </a:bodyPr>
+          <a:lstStyle/>
+          <a:p>
+            <a:pPr algn="ctr">
+              <a:spcBef>
+                <a:spcPts val="0"/>
+              </a:spcBef>
+              <a:spcAft>
+                <a:spcPts val="500"/>
+              </a:spcAft>
+              <a:defRPr sz="2500" b="0">
+                <a:solidFill>
+                  <a:srgbClr val="526779"/>
+                </a:solidFill>
+                <a:latin typeface="Aptos"/>
+              </a:defRPr>
+            </a:pPr>
+            <a:r>
+              <a:t>Shared 24-class dataset  →  fixed three-client partitions  →  independent detector experiments</a:t>
+            </a:r>
+          </a:p>
+        </p:txBody>
+      </p:sp>
+      <p:sp>
+        <p:nvSpPr>
+          <p:cNvPr id="52" name="Rounded Rectangle 51"/>
+          <p:cNvSpPr/>
+          <p:nvPr/>
+        </p:nvSpPr>
+        <p:spPr>
+          <a:xfrm>
+            <a:off x="1828800" y="13944600"/>
+            <a:ext cx="4846320" cy="804672"/>
+          </a:xfrm>
+          <a:prstGeom prst="roundRect">
+            <a:avLst>
+              <a:gd name="adj" fmla="val 8000"/>
+            </a:avLst>
+          </a:prstGeom>
+          <a:solidFill>
+            <a:srgbClr val="EEF7F3"/>
+          </a:solidFill>
+          <a:ln w="17780">
+            <a:solidFill>
+              <a:srgbClr val="D8E8ED"/>
+            </a:solidFill>
+          </a:ln>
+        </p:spPr>
+        <p:style>
+          <a:lnRef idx="1">
+            <a:schemeClr val="accent1"/>
+          </a:lnRef>
+          <a:fillRef idx="3">
+            <a:schemeClr val="accent1"/>
+          </a:fillRef>
+          <a:effectRef idx="2">
+            <a:schemeClr val="accent1"/>
+          </a:effectRef>
+          <a:fontRef idx="minor">
+            <a:schemeClr val="lt1"/>
+          </a:fontRef>
+        </p:style>
+        <p:txBody>
+          <a:bodyPr rtlCol="0" anchor="ctr"/>
+          <a:lstStyle/>
+          <a:p>
+            <a:pPr algn="ctr"/>
+          </a:p>
+        </p:txBody>
+      </p:sp>
+      <p:sp>
+        <p:nvSpPr>
+          <p:cNvPr id="53" name="TextBox 52"/>
+          <p:cNvSpPr txBox="1"/>
+          <p:nvPr/>
+        </p:nvSpPr>
+        <p:spPr>
+          <a:xfrm>
+            <a:off x="1965960" y="14127480"/>
+            <a:ext cx="4572000" cy="411480"/>
+          </a:xfrm>
+          <a:prstGeom prst="rect">
+            <a:avLst/>
+          </a:prstGeom>
+          <a:noFill/>
+        </p:spPr>
+        <p:txBody>
+          <a:bodyPr wrap="square" lIns="36576" rIns="36576" tIns="13716" bIns="13716">
+            <a:spAutoFit/>
+          </a:bodyPr>
+          <a:lstStyle/>
+          <a:p>
+            <a:pPr algn="ctr">
+              <a:spcBef>
+                <a:spcPts val="0"/>
+              </a:spcBef>
+              <a:spcAft>
+                <a:spcPts val="500"/>
+              </a:spcAft>
+              <a:defRPr sz="2400" b="1">
+                <a:solidFill>
+                  <a:srgbClr val="226D4A"/>
+                </a:solidFill>
+                <a:latin typeface="Aptos"/>
+              </a:defRPr>
+            </a:pPr>
+            <a:r>
+              <a:t>CLIENT 1  •  LOCAL TRAINING</a:t>
+            </a:r>
+          </a:p>
+        </p:txBody>
+      </p:sp>
+      <p:sp>
+        <p:nvSpPr>
+          <p:cNvPr id="54" name="Down Arrow 53"/>
+          <p:cNvSpPr/>
+          <p:nvPr/>
+        </p:nvSpPr>
+        <p:spPr>
+          <a:xfrm>
+            <a:off x="4078224" y="14785848"/>
+            <a:ext cx="329184" cy="320040"/>
+          </a:xfrm>
+          <a:prstGeom prst="downArrow">
+            <a:avLst/>
+          </a:prstGeom>
+          <a:solidFill>
+            <a:srgbClr val="39BED1"/>
+          </a:solidFill>
+          <a:ln>
+            <a:noFill/>
+          </a:ln>
+        </p:spPr>
+        <p:style>
+          <a:lnRef idx="1">
+            <a:schemeClr val="accent1"/>
+          </a:lnRef>
+          <a:fillRef idx="3">
+            <a:schemeClr val="accent1"/>
+          </a:fillRef>
+          <a:effectRef idx="2">
+            <a:schemeClr val="accent1"/>
+          </a:effectRef>
+          <a:fontRef idx="minor">
+            <a:schemeClr val="lt1"/>
+          </a:fontRef>
+        </p:style>
+        <p:txBody>
+          <a:bodyPr rtlCol="0" anchor="ctr"/>
+          <a:lstStyle/>
+          <a:p>
+            <a:pPr algn="ctr"/>
+          </a:p>
+        </p:txBody>
+      </p:sp>
+      <p:sp>
+        <p:nvSpPr>
+          <p:cNvPr id="55" name="Rounded Rectangle 54"/>
+          <p:cNvSpPr/>
+          <p:nvPr/>
+        </p:nvSpPr>
+        <p:spPr>
+          <a:xfrm>
+            <a:off x="8229600" y="13944600"/>
+            <a:ext cx="4846320" cy="804672"/>
+          </a:xfrm>
+          <a:prstGeom prst="roundRect">
+            <a:avLst>
+              <a:gd name="adj" fmla="val 8000"/>
+            </a:avLst>
+          </a:prstGeom>
+          <a:solidFill>
+            <a:srgbClr val="EEF7F3"/>
+          </a:solidFill>
+          <a:ln w="17780">
+            <a:solidFill>
+              <a:srgbClr val="D8E8ED"/>
+            </a:solidFill>
+          </a:ln>
+        </p:spPr>
+        <p:style>
+          <a:lnRef idx="1">
+            <a:schemeClr val="accent1"/>
+          </a:lnRef>
+          <a:fillRef idx="3">
+            <a:schemeClr val="accent1"/>
+          </a:fillRef>
+          <a:effectRef idx="2">
+            <a:schemeClr val="accent1"/>
+          </a:effectRef>
+          <a:fontRef idx="minor">
+            <a:schemeClr val="lt1"/>
+          </a:fontRef>
+        </p:style>
+        <p:txBody>
+          <a:bodyPr rtlCol="0" anchor="ctr"/>
+          <a:lstStyle/>
+          <a:p>
+            <a:pPr algn="ctr"/>
+          </a:p>
+        </p:txBody>
+      </p:sp>
+      <p:sp>
+        <p:nvSpPr>
+          <p:cNvPr id="56" name="TextBox 55"/>
+          <p:cNvSpPr txBox="1"/>
+          <p:nvPr/>
+        </p:nvSpPr>
+        <p:spPr>
+          <a:xfrm>
+            <a:off x="8366760" y="14127480"/>
+            <a:ext cx="4572000" cy="411480"/>
+          </a:xfrm>
+          <a:prstGeom prst="rect">
+            <a:avLst/>
+          </a:prstGeom>
+          <a:noFill/>
+        </p:spPr>
+        <p:txBody>
+          <a:bodyPr wrap="square" lIns="36576" rIns="36576" tIns="13716" bIns="13716">
+            <a:spAutoFit/>
+          </a:bodyPr>
+          <a:lstStyle/>
+          <a:p>
+            <a:pPr algn="ctr">
+              <a:spcBef>
+                <a:spcPts val="0"/>
+              </a:spcBef>
+              <a:spcAft>
+                <a:spcPts val="500"/>
+              </a:spcAft>
+              <a:defRPr sz="2400" b="1">
+                <a:solidFill>
+                  <a:srgbClr val="226D4A"/>
+                </a:solidFill>
+                <a:latin typeface="Aptos"/>
+              </a:defRPr>
+            </a:pPr>
+            <a:r>
+              <a:t>CLIENT 2  •  LOCAL TRAINING</a:t>
+            </a:r>
+          </a:p>
+        </p:txBody>
+      </p:sp>
+      <p:sp>
+        <p:nvSpPr>
+          <p:cNvPr id="57" name="Down Arrow 56"/>
+          <p:cNvSpPr/>
+          <p:nvPr/>
+        </p:nvSpPr>
+        <p:spPr>
+          <a:xfrm>
+            <a:off x="10479024" y="14785848"/>
+            <a:ext cx="329184" cy="320040"/>
+          </a:xfrm>
+          <a:prstGeom prst="downArrow">
+            <a:avLst/>
+          </a:prstGeom>
+          <a:solidFill>
+            <a:srgbClr val="39BED1"/>
+          </a:solidFill>
+          <a:ln>
+            <a:noFill/>
+          </a:ln>
+        </p:spPr>
+        <p:style>
+          <a:lnRef idx="1">
+            <a:schemeClr val="accent1"/>
+          </a:lnRef>
+          <a:fillRef idx="3">
+            <a:schemeClr val="accent1"/>
+          </a:fillRef>
+          <a:effectRef idx="2">
+            <a:schemeClr val="accent1"/>
+          </a:effectRef>
+          <a:fontRef idx="minor">
+            <a:schemeClr val="lt1"/>
+          </a:fontRef>
+        </p:style>
+        <p:txBody>
+          <a:bodyPr rtlCol="0" anchor="ctr"/>
+          <a:lstStyle/>
+          <a:p>
+            <a:pPr algn="ctr"/>
+          </a:p>
+        </p:txBody>
+      </p:sp>
+      <p:sp>
+        <p:nvSpPr>
+          <p:cNvPr id="58" name="Rounded Rectangle 57"/>
+          <p:cNvSpPr/>
+          <p:nvPr/>
+        </p:nvSpPr>
+        <p:spPr>
+          <a:xfrm>
+            <a:off x="14630400" y="13944600"/>
+            <a:ext cx="4846320" cy="804672"/>
+          </a:xfrm>
+          <a:prstGeom prst="roundRect">
+            <a:avLst>
+              <a:gd name="adj" fmla="val 8000"/>
+            </a:avLst>
+          </a:prstGeom>
+          <a:solidFill>
+            <a:srgbClr val="EEF7F3"/>
+          </a:solidFill>
+          <a:ln w="17780">
+            <a:solidFill>
+              <a:srgbClr val="D8E8ED"/>
+            </a:solidFill>
+          </a:ln>
+        </p:spPr>
+        <p:style>
+          <a:lnRef idx="1">
+            <a:schemeClr val="accent1"/>
+          </a:lnRef>
+          <a:fillRef idx="3">
+            <a:schemeClr val="accent1"/>
+          </a:fillRef>
+          <a:effectRef idx="2">
+            <a:schemeClr val="accent1"/>
+          </a:effectRef>
+          <a:fontRef idx="minor">
+            <a:schemeClr val="lt1"/>
+          </a:fontRef>
+        </p:style>
+        <p:txBody>
+          <a:bodyPr rtlCol="0" anchor="ctr"/>
+          <a:lstStyle/>
+          <a:p>
+            <a:pPr algn="ctr"/>
+          </a:p>
+        </p:txBody>
+      </p:sp>
+      <p:sp>
+        <p:nvSpPr>
+          <p:cNvPr id="59" name="TextBox 58"/>
+          <p:cNvSpPr txBox="1"/>
+          <p:nvPr/>
+        </p:nvSpPr>
+        <p:spPr>
+          <a:xfrm>
+            <a:off x="14767559" y="14127480"/>
+            <a:ext cx="4572000" cy="411480"/>
+          </a:xfrm>
+          <a:prstGeom prst="rect">
+            <a:avLst/>
+          </a:prstGeom>
+          <a:noFill/>
+        </p:spPr>
+        <p:txBody>
+          <a:bodyPr wrap="square" lIns="36576" rIns="36576" tIns="13716" bIns="13716">
+            <a:spAutoFit/>
+          </a:bodyPr>
+          <a:lstStyle/>
+          <a:p>
+            <a:pPr algn="ctr">
+              <a:spcBef>
+                <a:spcPts val="0"/>
+              </a:spcBef>
+              <a:spcAft>
+                <a:spcPts val="500"/>
+              </a:spcAft>
+              <a:defRPr sz="2400" b="1">
+                <a:solidFill>
+                  <a:srgbClr val="226D4A"/>
+                </a:solidFill>
+                <a:latin typeface="Aptos"/>
+              </a:defRPr>
+            </a:pPr>
+            <a:r>
+              <a:t>CLIENT 3  •  LOCAL TRAINING</a:t>
+            </a:r>
+          </a:p>
+        </p:txBody>
+      </p:sp>
+      <p:sp>
+        <p:nvSpPr>
+          <p:cNvPr id="60" name="Down Arrow 59"/>
+          <p:cNvSpPr/>
+          <p:nvPr/>
+        </p:nvSpPr>
+        <p:spPr>
+          <a:xfrm>
+            <a:off x="16879824" y="14785848"/>
+            <a:ext cx="329184" cy="320040"/>
+          </a:xfrm>
+          <a:prstGeom prst="downArrow">
+            <a:avLst/>
+          </a:prstGeom>
+          <a:solidFill>
+            <a:srgbClr val="39BED1"/>
+          </a:solidFill>
+          <a:ln>
+            <a:noFill/>
+          </a:ln>
+        </p:spPr>
+        <p:style>
+          <a:lnRef idx="1">
+            <a:schemeClr val="accent1"/>
+          </a:lnRef>
+          <a:fillRef idx="3">
+            <a:schemeClr val="accent1"/>
+          </a:fillRef>
+          <a:effectRef idx="2">
+            <a:schemeClr val="accent1"/>
+          </a:effectRef>
+          <a:fontRef idx="minor">
+            <a:schemeClr val="lt1"/>
+          </a:fontRef>
+        </p:style>
+        <p:txBody>
+          <a:bodyPr rtlCol="0" anchor="ctr"/>
+          <a:lstStyle/>
+          <a:p>
+            <a:pPr algn="ctr"/>
+          </a:p>
+        </p:txBody>
+      </p:sp>
+      <p:sp>
+        <p:nvSpPr>
+          <p:cNvPr id="61" name="Rounded Rectangle 60"/>
+          <p:cNvSpPr/>
+          <p:nvPr/>
+        </p:nvSpPr>
+        <p:spPr>
+          <a:xfrm>
+            <a:off x="1828800" y="15197328"/>
+            <a:ext cx="17647920" cy="612648"/>
+          </a:xfrm>
+          <a:prstGeom prst="roundRect">
+            <a:avLst>
+              <a:gd name="adj" fmla="val 8000"/>
+            </a:avLst>
+          </a:prstGeom>
+          <a:solidFill>
+            <a:srgbClr val="075D93"/>
+          </a:solidFill>
+          <a:ln>
+            <a:noFill/>
+          </a:ln>
+        </p:spPr>
+        <p:style>
+          <a:lnRef idx="1">
+            <a:schemeClr val="accent1"/>
+          </a:lnRef>
+          <a:fillRef idx="3">
+            <a:schemeClr val="accent1"/>
+          </a:fillRef>
+          <a:effectRef idx="2">
+            <a:schemeClr val="accent1"/>
+          </a:effectRef>
+          <a:fontRef idx="minor">
+            <a:schemeClr val="lt1"/>
+          </a:fontRef>
+        </p:style>
+        <p:txBody>
+          <a:bodyPr rtlCol="0" anchor="ctr"/>
+          <a:lstStyle/>
+          <a:p>
+            <a:pPr algn="ctr"/>
+          </a:p>
+        </p:txBody>
+      </p:sp>
+      <p:sp>
+        <p:nvSpPr>
+          <p:cNvPr id="62" name="TextBox 61"/>
+          <p:cNvSpPr txBox="1"/>
+          <p:nvPr/>
+        </p:nvSpPr>
+        <p:spPr>
+          <a:xfrm>
+            <a:off x="2057400" y="15297912"/>
+            <a:ext cx="17190720" cy="411480"/>
+          </a:xfrm>
+          <a:prstGeom prst="rect">
+            <a:avLst/>
+          </a:prstGeom>
+          <a:noFill/>
+        </p:spPr>
+        <p:txBody>
+          <a:bodyPr wrap="square" lIns="36576" rIns="36576" tIns="13716" bIns="13716">
+            <a:spAutoFit/>
+          </a:bodyPr>
+          <a:lstStyle/>
+          <a:p>
+            <a:pPr algn="ctr">
+              <a:spcBef>
+                <a:spcPts val="0"/>
+              </a:spcBef>
+              <a:spcAft>
+                <a:spcPts val="500"/>
               </a:spcAft>
               <a:defRPr sz="2500" b="1">
                 <a:solidFill>
@@ -4880,186 +5817,34 @@
               </a:defRPr>
             </a:pPr>
             <a:r>
-              <a:t>SAMPLE-WEIGHTED FEDAVG  →  GLOBAL MODEL</a:t>
-            </a:r>
-          </a:p>
-        </p:txBody>
-      </p:sp>
-      <p:sp>
-        <p:nvSpPr>
-          <p:cNvPr id="41" name="TextBox 40"/>
-          <p:cNvSpPr txBox="1"/>
-          <p:nvPr/>
-        </p:nvSpPr>
-        <p:spPr>
-          <a:xfrm>
-            <a:off x="868680" y="22585680"/>
-            <a:ext cx="9326880" cy="502920"/>
-          </a:xfrm>
-          <a:prstGeom prst="rect">
-            <a:avLst/>
-          </a:prstGeom>
-          <a:noFill/>
-        </p:spPr>
-        <p:txBody>
-          <a:bodyPr wrap="square" lIns="18288" rIns="18288" tIns="18288" bIns="18288">
-            <a:spAutoFit/>
-          </a:bodyPr>
-          <a:lstStyle/>
-          <a:p>
-            <a:pPr algn="ctr">
-              <a:spcAft>
-                <a:spcPts val="900"/>
-              </a:spcAft>
-              <a:defRPr sz="2500" b="0">
-                <a:solidFill>
-                  <a:srgbClr val="53685F"/>
-                </a:solidFill>
-                <a:latin typeface="Aptos"/>
-              </a:defRPr>
-            </a:pPr>
-            <a:r>
-              <a:t>Repeat local training → aggregate → validate</a:t>
-            </a:r>
-          </a:p>
-        </p:txBody>
-      </p:sp>
-      <p:sp>
-        <p:nvSpPr>
-          <p:cNvPr id="42" name="TextBox 41"/>
-          <p:cNvSpPr txBox="1"/>
-          <p:nvPr/>
-        </p:nvSpPr>
-        <p:spPr>
-          <a:xfrm>
-            <a:off x="868680" y="23225760"/>
-            <a:ext cx="9326880" cy="914400"/>
-          </a:xfrm>
-          <a:prstGeom prst="rect">
-            <a:avLst/>
-          </a:prstGeom>
-          <a:noFill/>
-        </p:spPr>
-        <p:txBody>
-          <a:bodyPr wrap="square" lIns="18288" rIns="18288" tIns="18288" bIns="18288">
-            <a:spAutoFit/>
-          </a:bodyPr>
-          <a:lstStyle/>
-          <a:p>
-            <a:pPr algn="l">
-              <a:spcAft>
-                <a:spcPts val="900"/>
-              </a:spcAft>
-              <a:defRPr sz="2300" b="0">
-                <a:solidFill>
-                  <a:srgbClr val="53685F"/>
-                </a:solidFill>
-                <a:latin typeface="Aptos"/>
-              </a:defRPr>
-            </a:pPr>
-            <a:r>
-              <a:t>Prototype: sequential three-client simulation on one Tesla T4. This is not a deployed multi-device system.</a:t>
-            </a:r>
-          </a:p>
-        </p:txBody>
-      </p:sp>
-      <p:sp>
-        <p:nvSpPr>
-          <p:cNvPr id="43" name="TextBox 42"/>
-          <p:cNvSpPr txBox="1"/>
-          <p:nvPr/>
-        </p:nvSpPr>
-        <p:spPr>
-          <a:xfrm>
-            <a:off x="11018520" y="13304520"/>
-            <a:ext cx="548640" cy="548640"/>
-          </a:xfrm>
-          <a:prstGeom prst="rect">
-            <a:avLst/>
-          </a:prstGeom>
-          <a:noFill/>
-        </p:spPr>
-        <p:txBody>
-          <a:bodyPr wrap="square" lIns="18288" rIns="18288" tIns="18288" bIns="18288">
-            <a:spAutoFit/>
-          </a:bodyPr>
-          <a:lstStyle/>
-          <a:p>
-            <a:pPr algn="l">
-              <a:spcAft>
-                <a:spcPts val="900"/>
-              </a:spcAft>
-              <a:defRPr sz="2800" b="1">
-                <a:solidFill>
-                  <a:srgbClr val="B97722"/>
-                </a:solidFill>
-                <a:latin typeface="Aptos"/>
-              </a:defRPr>
-            </a:pPr>
-            <a:r>
-              <a:t>03</a:t>
-            </a:r>
-          </a:p>
-        </p:txBody>
-      </p:sp>
-      <p:sp>
-        <p:nvSpPr>
-          <p:cNvPr id="44" name="TextBox 43"/>
-          <p:cNvSpPr txBox="1"/>
-          <p:nvPr/>
-        </p:nvSpPr>
-        <p:spPr>
-          <a:xfrm>
-            <a:off x="11658600" y="13304520"/>
-            <a:ext cx="8686800" cy="594360"/>
-          </a:xfrm>
-          <a:prstGeom prst="rect">
-            <a:avLst/>
-          </a:prstGeom>
-          <a:noFill/>
-        </p:spPr>
-        <p:txBody>
-          <a:bodyPr wrap="square" lIns="18288" rIns="18288" tIns="18288" bIns="18288">
-            <a:spAutoFit/>
-          </a:bodyPr>
-          <a:lstStyle/>
-          <a:p>
-            <a:pPr algn="l">
-              <a:spcAft>
-                <a:spcPts val="900"/>
-              </a:spcAft>
-              <a:defRPr sz="3200" b="1">
-                <a:solidFill>
-                  <a:srgbClr val="173F32"/>
-                </a:solidFill>
-                <a:latin typeface="Aptos"/>
-              </a:defRPr>
-            </a:pPr>
-            <a:r>
-              <a:t>HELD-OUT TEST RESULTS</a:t>
-            </a:r>
-          </a:p>
-        </p:txBody>
-      </p:sp>
-      <p:sp>
-        <p:nvSpPr>
-          <p:cNvPr id="45" name="Rectangle 44"/>
+              <a:t>TRAINING-IMAGE-WEIGHTED FEDAVG  →  GLOBAL DETECTOR</a:t>
+            </a:r>
+          </a:p>
+        </p:txBody>
+      </p:sp>
+      <p:sp>
+        <p:nvSpPr>
+          <p:cNvPr id="63" name="Rounded Rectangle 62"/>
           <p:cNvSpPr/>
           <p:nvPr/>
         </p:nvSpPr>
         <p:spPr>
           <a:xfrm>
-            <a:off x="11018520" y="14017752"/>
-            <a:ext cx="9326880" cy="32004"/>
-          </a:xfrm>
-          <a:prstGeom prst="rect">
-            <a:avLst/>
+            <a:off x="1280160" y="16203167"/>
+            <a:ext cx="4617720" cy="585216"/>
+          </a:xfrm>
+          <a:prstGeom prst="roundRect">
+            <a:avLst>
+              <a:gd name="adj" fmla="val 8000"/>
+            </a:avLst>
           </a:prstGeom>
           <a:solidFill>
-            <a:srgbClr val="173F32"/>
+            <a:srgbClr val="EEF7F3"/>
           </a:solidFill>
-          <a:ln>
-            <a:noFill/>
+          <a:ln w="17780">
+            <a:solidFill>
+              <a:srgbClr val="D8E8ED"/>
+            </a:solidFill>
           </a:ln>
         </p:spPr>
         <p:style>
@@ -5086,14 +5871,14 @@
       </p:sp>
       <p:sp>
         <p:nvSpPr>
-          <p:cNvPr id="46" name="TextBox 45"/>
+          <p:cNvPr id="64" name="TextBox 63"/>
           <p:cNvSpPr txBox="1"/>
           <p:nvPr/>
         </p:nvSpPr>
         <p:spPr>
           <a:xfrm>
-            <a:off x="11018520" y="14264640"/>
-            <a:ext cx="9326880" cy="548640"/>
+            <a:off x="1353312" y="16294608"/>
+            <a:ext cx="4471416" cy="393192"/>
           </a:xfrm>
           <a:prstGeom prst="rect">
             <a:avLst/>
@@ -5101,38 +5886,41 @@
           <a:noFill/>
         </p:spPr>
         <p:txBody>
-          <a:bodyPr wrap="square" lIns="18288" rIns="18288" tIns="18288" bIns="18288">
+          <a:bodyPr wrap="square" lIns="36576" rIns="36576" tIns="13716" bIns="13716">
             <a:spAutoFit/>
           </a:bodyPr>
           <a:lstStyle/>
           <a:p>
-            <a:pPr algn="l">
+            <a:pPr algn="ctr">
+              <a:spcBef>
+                <a:spcPts val="0"/>
+              </a:spcBef>
               <a:spcAft>
-                <a:spcPts val="900"/>
+                <a:spcPts val="500"/>
               </a:spcAft>
-              <a:defRPr sz="2500" b="0">
+              <a:defRPr sz="2300" b="1">
                 <a:solidFill>
-                  <a:srgbClr val="53685F"/>
+                  <a:srgbClr val="226D4A"/>
                 </a:solidFill>
                 <a:latin typeface="Aptos"/>
               </a:defRPr>
             </a:pPr>
             <a:r>
-              <a:t>Round 35  •  All 30 classes  •  2,191 test images</a:t>
-            </a:r>
-          </a:p>
-        </p:txBody>
-      </p:sp>
-      <p:sp>
-        <p:nvSpPr>
-          <p:cNvPr id="47" name="Rounded Rectangle 46"/>
+              <a:t>YOLOv8n</a:t>
+            </a:r>
+          </a:p>
+        </p:txBody>
+      </p:sp>
+      <p:sp>
+        <p:nvSpPr>
+          <p:cNvPr id="65" name="Rounded Rectangle 64"/>
           <p:cNvSpPr/>
           <p:nvPr/>
         </p:nvSpPr>
         <p:spPr>
           <a:xfrm>
-            <a:off x="11018520" y="15179040"/>
-            <a:ext cx="4544568" cy="1463040"/>
+            <a:off x="6172200" y="16203167"/>
+            <a:ext cx="4617720" cy="585216"/>
           </a:xfrm>
           <a:prstGeom prst="roundRect">
             <a:avLst>
@@ -5140,10 +5928,12 @@
             </a:avLst>
           </a:prstGeom>
           <a:solidFill>
-            <a:srgbClr val="E7EDE3"/>
+            <a:srgbClr val="EEF7F3"/>
           </a:solidFill>
-          <a:ln>
-            <a:noFill/>
+          <a:ln w="17780">
+            <a:solidFill>
+              <a:srgbClr val="D8E8ED"/>
+            </a:solidFill>
           </a:ln>
         </p:spPr>
         <p:style>
@@ -5170,14 +5960,14 @@
       </p:sp>
       <p:sp>
         <p:nvSpPr>
-          <p:cNvPr id="48" name="TextBox 47"/>
+          <p:cNvPr id="66" name="TextBox 65"/>
           <p:cNvSpPr txBox="1"/>
           <p:nvPr/>
         </p:nvSpPr>
         <p:spPr>
           <a:xfrm>
-            <a:off x="11201400" y="15288768"/>
-            <a:ext cx="4178808" cy="768096"/>
+            <a:off x="6245352" y="16294608"/>
+            <a:ext cx="4471416" cy="393192"/>
           </a:xfrm>
           <a:prstGeom prst="rect">
             <a:avLst/>
@@ -5185,77 +5975,41 @@
           <a:noFill/>
         </p:spPr>
         <p:txBody>
-          <a:bodyPr wrap="square" lIns="18288" rIns="18288" tIns="18288" bIns="18288">
+          <a:bodyPr wrap="square" lIns="36576" rIns="36576" tIns="13716" bIns="13716">
             <a:spAutoFit/>
           </a:bodyPr>
           <a:lstStyle/>
           <a:p>
-            <a:pPr algn="l">
+            <a:pPr algn="ctr">
+              <a:spcBef>
+                <a:spcPts val="0"/>
+              </a:spcBef>
               <a:spcAft>
-                <a:spcPts val="900"/>
+                <a:spcPts val="500"/>
               </a:spcAft>
-              <a:defRPr sz="4700" b="1">
+              <a:defRPr sz="2300" b="1">
                 <a:solidFill>
-                  <a:srgbClr val="173F32"/>
+                  <a:srgbClr val="226D4A"/>
                 </a:solidFill>
                 <a:latin typeface="Aptos"/>
               </a:defRPr>
             </a:pPr>
             <a:r>
-              <a:t>63.72%</a:t>
-            </a:r>
-          </a:p>
-        </p:txBody>
-      </p:sp>
-      <p:sp>
-        <p:nvSpPr>
-          <p:cNvPr id="49" name="TextBox 48"/>
-          <p:cNvSpPr txBox="1"/>
-          <p:nvPr/>
-        </p:nvSpPr>
-        <p:spPr>
-          <a:xfrm>
-            <a:off x="11201400" y="16111728"/>
-            <a:ext cx="4178808" cy="429768"/>
-          </a:xfrm>
-          <a:prstGeom prst="rect">
-            <a:avLst/>
-          </a:prstGeom>
-          <a:noFill/>
-        </p:spPr>
-        <p:txBody>
-          <a:bodyPr wrap="square" lIns="18288" rIns="18288" tIns="18288" bIns="18288">
-            <a:spAutoFit/>
-          </a:bodyPr>
-          <a:lstStyle/>
-          <a:p>
-            <a:pPr algn="l">
-              <a:spcAft>
-                <a:spcPts val="900"/>
-              </a:spcAft>
-              <a:defRPr sz="2500" b="0">
-                <a:solidFill>
-                  <a:srgbClr val="53685F"/>
-                </a:solidFill>
-                <a:latin typeface="Aptos"/>
-              </a:defRPr>
-            </a:pPr>
-            <a:r>
-              <a:t>Precision</a:t>
-            </a:r>
-          </a:p>
-        </p:txBody>
-      </p:sp>
-      <p:sp>
-        <p:nvSpPr>
-          <p:cNvPr id="50" name="Rounded Rectangle 49"/>
+              <a:t>SSDLite</a:t>
+            </a:r>
+          </a:p>
+        </p:txBody>
+      </p:sp>
+      <p:sp>
+        <p:nvSpPr>
+          <p:cNvPr id="67" name="Rounded Rectangle 66"/>
           <p:cNvSpPr/>
           <p:nvPr/>
         </p:nvSpPr>
         <p:spPr>
           <a:xfrm>
-            <a:off x="15773400" y="15179040"/>
-            <a:ext cx="4544568" cy="1463040"/>
+            <a:off x="11064240" y="16203167"/>
+            <a:ext cx="4617720" cy="585216"/>
           </a:xfrm>
           <a:prstGeom prst="roundRect">
             <a:avLst>
@@ -5263,10 +6017,12 @@
             </a:avLst>
           </a:prstGeom>
           <a:solidFill>
-            <a:srgbClr val="E7EDE3"/>
+            <a:srgbClr val="EEF7F3"/>
           </a:solidFill>
-          <a:ln>
-            <a:noFill/>
+          <a:ln w="17780">
+            <a:solidFill>
+              <a:srgbClr val="D8E8ED"/>
+            </a:solidFill>
           </a:ln>
         </p:spPr>
         <p:style>
@@ -5293,14 +6049,14 @@
       </p:sp>
       <p:sp>
         <p:nvSpPr>
-          <p:cNvPr id="51" name="TextBox 50"/>
+          <p:cNvPr id="68" name="TextBox 67"/>
           <p:cNvSpPr txBox="1"/>
           <p:nvPr/>
         </p:nvSpPr>
         <p:spPr>
           <a:xfrm>
-            <a:off x="15956280" y="15288768"/>
-            <a:ext cx="4178808" cy="768096"/>
+            <a:off x="11137392" y="16294608"/>
+            <a:ext cx="4471416" cy="393192"/>
           </a:xfrm>
           <a:prstGeom prst="rect">
             <a:avLst/>
@@ -5308,77 +6064,41 @@
           <a:noFill/>
         </p:spPr>
         <p:txBody>
-          <a:bodyPr wrap="square" lIns="18288" rIns="18288" tIns="18288" bIns="18288">
+          <a:bodyPr wrap="square" lIns="36576" rIns="36576" tIns="13716" bIns="13716">
             <a:spAutoFit/>
           </a:bodyPr>
           <a:lstStyle/>
           <a:p>
-            <a:pPr algn="l">
+            <a:pPr algn="ctr">
+              <a:spcBef>
+                <a:spcPts val="0"/>
+              </a:spcBef>
               <a:spcAft>
-                <a:spcPts val="900"/>
+                <a:spcPts val="500"/>
               </a:spcAft>
-              <a:defRPr sz="4700" b="1">
+              <a:defRPr sz="2300" b="1">
                 <a:solidFill>
-                  <a:srgbClr val="173F32"/>
+                  <a:srgbClr val="226D4A"/>
                 </a:solidFill>
                 <a:latin typeface="Aptos"/>
               </a:defRPr>
             </a:pPr>
             <a:r>
-              <a:t>54.81%</a:t>
-            </a:r>
-          </a:p>
-        </p:txBody>
-      </p:sp>
-      <p:sp>
-        <p:nvSpPr>
-          <p:cNvPr id="52" name="TextBox 51"/>
-          <p:cNvSpPr txBox="1"/>
-          <p:nvPr/>
-        </p:nvSpPr>
-        <p:spPr>
-          <a:xfrm>
-            <a:off x="15956280" y="16111728"/>
-            <a:ext cx="4178808" cy="429768"/>
-          </a:xfrm>
-          <a:prstGeom prst="rect">
-            <a:avLst/>
-          </a:prstGeom>
-          <a:noFill/>
-        </p:spPr>
-        <p:txBody>
-          <a:bodyPr wrap="square" lIns="18288" rIns="18288" tIns="18288" bIns="18288">
-            <a:spAutoFit/>
-          </a:bodyPr>
-          <a:lstStyle/>
-          <a:p>
-            <a:pPr algn="l">
-              <a:spcAft>
-                <a:spcPts val="900"/>
-              </a:spcAft>
-              <a:defRPr sz="2500" b="0">
-                <a:solidFill>
-                  <a:srgbClr val="53685F"/>
-                </a:solidFill>
-                <a:latin typeface="Aptos"/>
-              </a:defRPr>
-            </a:pPr>
-            <a:r>
-              <a:t>Recall</a:t>
-            </a:r>
-          </a:p>
-        </p:txBody>
-      </p:sp>
-      <p:sp>
-        <p:nvSpPr>
-          <p:cNvPr id="53" name="Rounded Rectangle 52"/>
+              <a:t>SSD–MobileNetV3</a:t>
+            </a:r>
+          </a:p>
+        </p:txBody>
+      </p:sp>
+      <p:sp>
+        <p:nvSpPr>
+          <p:cNvPr id="69" name="Rounded Rectangle 68"/>
           <p:cNvSpPr/>
           <p:nvPr/>
         </p:nvSpPr>
         <p:spPr>
           <a:xfrm>
-            <a:off x="11018520" y="16824960"/>
-            <a:ext cx="4544568" cy="1463040"/>
+            <a:off x="15956279" y="16203167"/>
+            <a:ext cx="4617720" cy="585216"/>
           </a:xfrm>
           <a:prstGeom prst="roundRect">
             <a:avLst>
@@ -5386,10 +6106,12 @@
             </a:avLst>
           </a:prstGeom>
           <a:solidFill>
-            <a:srgbClr val="E7EDE3"/>
+            <a:srgbClr val="EEF7F3"/>
           </a:solidFill>
-          <a:ln>
-            <a:noFill/>
+          <a:ln w="17780">
+            <a:solidFill>
+              <a:srgbClr val="D8E8ED"/>
+            </a:solidFill>
           </a:ln>
         </p:spPr>
         <p:style>
@@ -5416,14 +6138,14 @@
       </p:sp>
       <p:sp>
         <p:nvSpPr>
-          <p:cNvPr id="54" name="TextBox 53"/>
+          <p:cNvPr id="70" name="TextBox 69"/>
           <p:cNvSpPr txBox="1"/>
           <p:nvPr/>
         </p:nvSpPr>
         <p:spPr>
           <a:xfrm>
-            <a:off x="11201400" y="16934688"/>
-            <a:ext cx="4178808" cy="768096"/>
+            <a:off x="16029431" y="16294608"/>
+            <a:ext cx="4471416" cy="393192"/>
           </a:xfrm>
           <a:prstGeom prst="rect">
             <a:avLst/>
@@ -5431,38 +6153,41 @@
           <a:noFill/>
         </p:spPr>
         <p:txBody>
-          <a:bodyPr wrap="square" lIns="18288" rIns="18288" tIns="18288" bIns="18288">
+          <a:bodyPr wrap="square" lIns="36576" rIns="36576" tIns="13716" bIns="13716">
             <a:spAutoFit/>
           </a:bodyPr>
           <a:lstStyle/>
           <a:p>
-            <a:pPr algn="l">
+            <a:pPr algn="ctr">
+              <a:spcBef>
+                <a:spcPts val="0"/>
+              </a:spcBef>
               <a:spcAft>
-                <a:spcPts val="900"/>
+                <a:spcPts val="500"/>
               </a:spcAft>
-              <a:defRPr sz="4700" b="1">
+              <a:defRPr sz="2300" b="1">
                 <a:solidFill>
-                  <a:srgbClr val="173F32"/>
+                  <a:srgbClr val="226D4A"/>
                 </a:solidFill>
                 <a:latin typeface="Aptos"/>
               </a:defRPr>
             </a:pPr>
             <a:r>
-              <a:t>55.72%</a:t>
-            </a:r>
-          </a:p>
-        </p:txBody>
-      </p:sp>
-      <p:sp>
-        <p:nvSpPr>
-          <p:cNvPr id="55" name="TextBox 54"/>
+              <a:t>EfficientDet-D0</a:t>
+            </a:r>
+          </a:p>
+        </p:txBody>
+      </p:sp>
+      <p:sp>
+        <p:nvSpPr>
+          <p:cNvPr id="71" name="TextBox 70"/>
           <p:cNvSpPr txBox="1"/>
           <p:nvPr/>
         </p:nvSpPr>
         <p:spPr>
           <a:xfrm>
-            <a:off x="11201400" y="17757648"/>
-            <a:ext cx="4178808" cy="429768"/>
+            <a:off x="1143000" y="16843248"/>
+            <a:ext cx="19098000" cy="411480"/>
           </a:xfrm>
           <a:prstGeom prst="rect">
             <a:avLst/>
@@ -5470,38 +6195,83 @@
           <a:noFill/>
         </p:spPr>
         <p:txBody>
-          <a:bodyPr wrap="square" lIns="18288" rIns="18288" tIns="18288" bIns="18288">
+          <a:bodyPr wrap="square" lIns="36576" rIns="36576" tIns="13716" bIns="13716">
             <a:spAutoFit/>
           </a:bodyPr>
           <a:lstStyle/>
           <a:p>
-            <a:pPr algn="l">
+            <a:pPr algn="ctr">
+              <a:spcBef>
+                <a:spcPts val="0"/>
+              </a:spcBef>
               <a:spcAft>
-                <a:spcPts val="900"/>
+                <a:spcPts val="500"/>
               </a:spcAft>
-              <a:defRPr sz="2500" b="0">
+              <a:defRPr sz="2400" b="1">
                 <a:solidFill>
-                  <a:srgbClr val="53685F"/>
+                  <a:srgbClr val="075D93"/>
                 </a:solidFill>
                 <a:latin typeface="Aptos"/>
               </a:defRPr>
             </a:pPr>
             <a:r>
-              <a:t>mAP@50</a:t>
-            </a:r>
-          </a:p>
-        </p:txBody>
-      </p:sp>
-      <p:sp>
-        <p:nvSpPr>
-          <p:cNvPr id="56" name="Rounded Rectangle 55"/>
+              <a:t>Train locally  →  aggregate  →  validate  →  save best/latest checkpoint  →  repeat</a:t>
+            </a:r>
+          </a:p>
+        </p:txBody>
+      </p:sp>
+      <p:sp>
+        <p:nvSpPr>
+          <p:cNvPr id="72" name="TextBox 71"/>
+          <p:cNvSpPr txBox="1"/>
+          <p:nvPr/>
+        </p:nvSpPr>
+        <p:spPr>
+          <a:xfrm>
+            <a:off x="1188720" y="17291304"/>
+            <a:ext cx="19006560" cy="210312"/>
+          </a:xfrm>
+          <a:prstGeom prst="rect">
+            <a:avLst/>
+          </a:prstGeom>
+          <a:noFill/>
+        </p:spPr>
+        <p:txBody>
+          <a:bodyPr wrap="square" lIns="36576" rIns="36576" tIns="13716" bIns="13716">
+            <a:spAutoFit/>
+          </a:bodyPr>
+          <a:lstStyle/>
+          <a:p>
+            <a:pPr algn="ctr">
+              <a:spcBef>
+                <a:spcPts val="0"/>
+              </a:spcBef>
+              <a:spcAft>
+                <a:spcPts val="500"/>
+              </a:spcAft>
+              <a:defRPr sz="1400" b="0">
+                <a:solidFill>
+                  <a:srgbClr val="526779"/>
+                </a:solidFill>
+                <a:latin typeface="Aptos"/>
+              </a:defRPr>
+            </a:pPr>
+            <a:r>
+              <a:t>Each architecture has its own weights and run. Clients are simulated sequentially on one GPU; this is not a deployed multi-device network.</a:t>
+            </a:r>
+          </a:p>
+        </p:txBody>
+      </p:sp>
+      <p:sp>
+        <p:nvSpPr>
+          <p:cNvPr id="73" name="Rounded Rectangle 72"/>
           <p:cNvSpPr/>
           <p:nvPr/>
         </p:nvSpPr>
         <p:spPr>
           <a:xfrm>
-            <a:off x="15773400" y="16824960"/>
-            <a:ext cx="4544568" cy="1463040"/>
+            <a:off x="640080" y="17785080"/>
+            <a:ext cx="20103840" cy="8092440"/>
           </a:xfrm>
           <a:prstGeom prst="roundRect">
             <a:avLst>
@@ -5509,10 +6279,12 @@
             </a:avLst>
           </a:prstGeom>
           <a:solidFill>
-            <a:srgbClr val="E7EDE3"/>
+            <a:srgbClr val="FFFFFF"/>
           </a:solidFill>
-          <a:ln>
-            <a:noFill/>
+          <a:ln w="22860">
+            <a:solidFill>
+              <a:srgbClr val="39BED1"/>
+            </a:solidFill>
           </a:ln>
         </p:spPr>
         <p:style>
@@ -5539,14 +6311,14 @@
       </p:sp>
       <p:sp>
         <p:nvSpPr>
-          <p:cNvPr id="57" name="TextBox 56"/>
+          <p:cNvPr id="74" name="TextBox 73"/>
           <p:cNvSpPr txBox="1"/>
           <p:nvPr/>
         </p:nvSpPr>
         <p:spPr>
           <a:xfrm>
-            <a:off x="15956280" y="16934688"/>
-            <a:ext cx="4178808" cy="768096"/>
+            <a:off x="1097280" y="17931384"/>
+            <a:ext cx="19189440" cy="502920"/>
           </a:xfrm>
           <a:prstGeom prst="rect">
             <a:avLst/>
@@ -5554,38 +6326,41 @@
           <a:noFill/>
         </p:spPr>
         <p:txBody>
-          <a:bodyPr wrap="square" lIns="18288" rIns="18288" tIns="18288" bIns="18288">
+          <a:bodyPr wrap="square" lIns="36576" rIns="36576" tIns="13716" bIns="13716">
             <a:spAutoFit/>
           </a:bodyPr>
           <a:lstStyle/>
           <a:p>
-            <a:pPr algn="l">
+            <a:pPr algn="ctr">
+              <a:spcBef>
+                <a:spcPts val="0"/>
+              </a:spcBef>
               <a:spcAft>
-                <a:spcPts val="900"/>
+                <a:spcPts val="500"/>
               </a:spcAft>
-              <a:defRPr sz="4700" b="1">
+              <a:defRPr sz="3000" b="1">
                 <a:solidFill>
-                  <a:srgbClr val="173F32"/>
+                  <a:srgbClr val="075D93"/>
                 </a:solidFill>
                 <a:latin typeface="Aptos"/>
               </a:defRPr>
             </a:pPr>
             <a:r>
-              <a:t>37.26%</a:t>
-            </a:r>
-          </a:p>
-        </p:txBody>
-      </p:sp>
-      <p:sp>
-        <p:nvSpPr>
-          <p:cNvPr id="58" name="TextBox 57"/>
+              <a:t>RESULTS AND CURRENT PROGRESS</a:t>
+            </a:r>
+          </a:p>
+        </p:txBody>
+      </p:sp>
+      <p:sp>
+        <p:nvSpPr>
+          <p:cNvPr id="75" name="TextBox 74"/>
           <p:cNvSpPr txBox="1"/>
           <p:nvPr/>
         </p:nvSpPr>
         <p:spPr>
           <a:xfrm>
-            <a:off x="15956280" y="17757648"/>
-            <a:ext cx="4178808" cy="429768"/>
+            <a:off x="1234440" y="18525744"/>
+            <a:ext cx="10149840" cy="484632"/>
           </a:xfrm>
           <a:prstGeom prst="rect">
             <a:avLst/>
@@ -5593,161 +6368,47 @@
           <a:noFill/>
         </p:spPr>
         <p:txBody>
-          <a:bodyPr wrap="square" lIns="18288" rIns="18288" tIns="18288" bIns="18288">
+          <a:bodyPr wrap="square" lIns="36576" rIns="36576" tIns="13716" bIns="13716">
             <a:spAutoFit/>
           </a:bodyPr>
           <a:lstStyle/>
           <a:p>
             <a:pPr algn="l">
+              <a:spcBef>
+                <a:spcPts val="0"/>
+              </a:spcBef>
               <a:spcAft>
-                <a:spcPts val="900"/>
+                <a:spcPts val="500"/>
               </a:spcAft>
-              <a:defRPr sz="2500" b="0">
+              <a:defRPr sz="2500" b="1">
                 <a:solidFill>
-                  <a:srgbClr val="53685F"/>
+                  <a:srgbClr val="226D4A"/>
                 </a:solidFill>
                 <a:latin typeface="Aptos"/>
               </a:defRPr>
             </a:pPr>
             <a:r>
-              <a:t>mAP@50–95</a:t>
-            </a:r>
-          </a:p>
-        </p:txBody>
-      </p:sp>
-      <p:sp>
-        <p:nvSpPr>
-          <p:cNvPr id="59" name="TextBox 58"/>
-          <p:cNvSpPr txBox="1"/>
-          <p:nvPr/>
-        </p:nvSpPr>
-        <p:spPr>
-          <a:xfrm>
-            <a:off x="11018520" y="18580608"/>
-            <a:ext cx="9326880" cy="841248"/>
-          </a:xfrm>
-          <a:prstGeom prst="rect">
-            <a:avLst/>
-          </a:prstGeom>
-          <a:noFill/>
-        </p:spPr>
-        <p:txBody>
-          <a:bodyPr wrap="square" lIns="18288" rIns="18288" tIns="18288" bIns="18288">
-            <a:spAutoFit/>
-          </a:bodyPr>
-          <a:lstStyle/>
-          <a:p>
-            <a:pPr algn="l">
-              <a:spcAft>
-                <a:spcPts val="900"/>
-              </a:spcAft>
-              <a:defRPr sz="2200" b="0">
-                <a:solidFill>
-                  <a:srgbClr val="53685F"/>
-                </a:solidFill>
-                <a:latin typeface="Aptos"/>
-              </a:defRPr>
-            </a:pPr>
-            <a:r>
-              <a:t>Macro averages across classes. Precision and recall use the evaluation operating point selected over all 30 classes.</a:t>
-            </a:r>
-          </a:p>
-        </p:txBody>
-      </p:sp>
-      <p:sp>
-        <p:nvSpPr>
-          <p:cNvPr id="60" name="TextBox 59"/>
-          <p:cNvSpPr txBox="1"/>
-          <p:nvPr/>
-        </p:nvSpPr>
-        <p:spPr>
-          <a:xfrm>
-            <a:off x="11018520" y="19705320"/>
-            <a:ext cx="548640" cy="548640"/>
-          </a:xfrm>
-          <a:prstGeom prst="rect">
-            <a:avLst/>
-          </a:prstGeom>
-          <a:noFill/>
-        </p:spPr>
-        <p:txBody>
-          <a:bodyPr wrap="square" lIns="18288" rIns="18288" tIns="18288" bIns="18288">
-            <a:spAutoFit/>
-          </a:bodyPr>
-          <a:lstStyle/>
-          <a:p>
-            <a:pPr algn="l">
-              <a:spcAft>
-                <a:spcPts val="900"/>
-              </a:spcAft>
-              <a:defRPr sz="2800" b="1">
-                <a:solidFill>
-                  <a:srgbClr val="B97722"/>
-                </a:solidFill>
-                <a:latin typeface="Aptos"/>
-              </a:defRPr>
-            </a:pPr>
-            <a:r>
-              <a:t>04</a:t>
-            </a:r>
-          </a:p>
-        </p:txBody>
-      </p:sp>
-      <p:sp>
-        <p:nvSpPr>
-          <p:cNvPr id="61" name="TextBox 60"/>
-          <p:cNvSpPr txBox="1"/>
-          <p:nvPr/>
-        </p:nvSpPr>
-        <p:spPr>
-          <a:xfrm>
-            <a:off x="11658600" y="19705320"/>
-            <a:ext cx="8686800" cy="594360"/>
-          </a:xfrm>
-          <a:prstGeom prst="rect">
-            <a:avLst/>
-          </a:prstGeom>
-          <a:noFill/>
-        </p:spPr>
-        <p:txBody>
-          <a:bodyPr wrap="square" lIns="18288" rIns="18288" tIns="18288" bIns="18288">
-            <a:spAutoFit/>
-          </a:bodyPr>
-          <a:lstStyle/>
-          <a:p>
-            <a:pPr algn="l">
-              <a:spcAft>
-                <a:spcPts val="900"/>
-              </a:spcAft>
-              <a:defRPr sz="3200" b="1">
-                <a:solidFill>
-                  <a:srgbClr val="173F32"/>
-                </a:solidFill>
-                <a:latin typeface="Aptos"/>
-              </a:defRPr>
-            </a:pPr>
-            <a:r>
-              <a:t>TRAINING TREND</a:t>
-            </a:r>
-          </a:p>
-        </p:txBody>
-      </p:sp>
-      <p:sp>
-        <p:nvSpPr>
-          <p:cNvPr id="62" name="Rectangle 61"/>
+              <a:t>PROVISIONAL 24-CLASS VALIDATION</a:t>
+            </a:r>
+          </a:p>
+        </p:txBody>
+      </p:sp>
+      <p:sp>
+        <p:nvSpPr>
+          <p:cNvPr id="76" name="Rectangle 75"/>
           <p:cNvSpPr/>
           <p:nvPr/>
         </p:nvSpPr>
         <p:spPr>
           <a:xfrm>
-            <a:off x="11018520" y="20418552"/>
-            <a:ext cx="9326880" cy="32004"/>
+            <a:off x="1234440" y="19248120"/>
+            <a:ext cx="3246120" cy="530352"/>
           </a:xfrm>
           <a:prstGeom prst="rect">
             <a:avLst/>
           </a:prstGeom>
           <a:solidFill>
-            <a:srgbClr val="173F32"/>
+            <a:srgbClr val="075D93"/>
           </a:solidFill>
           <a:ln>
             <a:noFill/>
@@ -5775,34 +6436,16 @@
           </a:p>
         </p:txBody>
       </p:sp>
-      <p:graphicFrame>
-        <p:nvGraphicFramePr>
-          <p:cNvPr id="63" name="Chart 62"/>
-          <p:cNvGraphicFramePr>
-            <a:graphicFrameLocks noGrp="1"/>
-          </p:cNvGraphicFramePr>
-          <p:nvPr/>
-        </p:nvGraphicFramePr>
-        <p:xfrm>
-          <a:off x="10835640" y="20574000"/>
-          <a:ext cx="9646920" cy="2560320"/>
-        </p:xfrm>
-        <a:graphic>
-          <a:graphicData uri="http://schemas.openxmlformats.org/drawingml/2006/chart">
-            <c:chart xmlns:c="http://schemas.openxmlformats.org/drawingml/2006/chart" r:id="rId8"/>
-          </a:graphicData>
-        </a:graphic>
-      </p:graphicFrame>
-      <p:sp>
-        <p:nvSpPr>
-          <p:cNvPr id="64" name="TextBox 63"/>
+      <p:sp>
+        <p:nvSpPr>
+          <p:cNvPr id="77" name="TextBox 76"/>
           <p:cNvSpPr txBox="1"/>
           <p:nvPr/>
         </p:nvSpPr>
         <p:spPr>
           <a:xfrm>
-            <a:off x="11018520" y="23317200"/>
-            <a:ext cx="9326880" cy="457200"/>
+            <a:off x="1307592" y="19357848"/>
+            <a:ext cx="3099815" cy="338328"/>
           </a:xfrm>
           <a:prstGeom prst="rect">
             <a:avLst/>
@@ -5810,100 +6453,19 @@
           <a:noFill/>
         </p:spPr>
         <p:txBody>
-          <a:bodyPr wrap="square" lIns="18288" rIns="18288" tIns="18288" bIns="18288">
+          <a:bodyPr wrap="square" lIns="36576" rIns="36576" tIns="13716" bIns="13716">
             <a:spAutoFit/>
           </a:bodyPr>
           <a:lstStyle/>
           <a:p>
             <a:pPr algn="l">
+              <a:spcBef>
+                <a:spcPts val="0"/>
+              </a:spcBef>
               <a:spcAft>
-                <a:spcPts val="900"/>
+                <a:spcPts val="500"/>
               </a:spcAft>
-              <a:defRPr sz="2200" b="0">
-                <a:solidFill>
-                  <a:srgbClr val="53685F"/>
-                </a:solidFill>
-                <a:latin typeface="Aptos"/>
-              </a:defRPr>
-            </a:pPr>
-            <a:r>
-              <a:t>Rounds 26–40 · Client-weighted validation mAP@50</a:t>
-            </a:r>
-          </a:p>
-        </p:txBody>
-      </p:sp>
-      <p:sp>
-        <p:nvSpPr>
-          <p:cNvPr id="65" name="Rounded Rectangle 64"/>
-          <p:cNvSpPr/>
-          <p:nvPr/>
-        </p:nvSpPr>
-        <p:spPr>
-          <a:xfrm>
-            <a:off x="868680" y="24688800"/>
-            <a:ext cx="19476720" cy="3767328"/>
-          </a:xfrm>
-          <a:prstGeom prst="roundRect">
-            <a:avLst>
-              <a:gd name="adj" fmla="val 8000"/>
-            </a:avLst>
-          </a:prstGeom>
-          <a:solidFill>
-            <a:srgbClr val="173F32"/>
-          </a:solidFill>
-          <a:ln>
-            <a:noFill/>
-          </a:ln>
-        </p:spPr>
-        <p:style>
-          <a:lnRef idx="1">
-            <a:schemeClr val="accent1"/>
-          </a:lnRef>
-          <a:fillRef idx="3">
-            <a:schemeClr val="accent1"/>
-          </a:fillRef>
-          <a:effectRef idx="2">
-            <a:schemeClr val="accent1"/>
-          </a:effectRef>
-          <a:fontRef idx="minor">
-            <a:schemeClr val="lt1"/>
-          </a:fontRef>
-        </p:style>
-        <p:txBody>
-          <a:bodyPr rtlCol="0" anchor="ctr"/>
-          <a:lstStyle/>
-          <a:p>
-            <a:pPr algn="ctr"/>
-          </a:p>
-        </p:txBody>
-      </p:sp>
-      <p:sp>
-        <p:nvSpPr>
-          <p:cNvPr id="66" name="TextBox 65"/>
-          <p:cNvSpPr txBox="1"/>
-          <p:nvPr/>
-        </p:nvSpPr>
-        <p:spPr>
-          <a:xfrm>
-            <a:off x="1234440" y="25008840"/>
-            <a:ext cx="18699480" cy="594360"/>
-          </a:xfrm>
-          <a:prstGeom prst="rect">
-            <a:avLst/>
-          </a:prstGeom>
-          <a:noFill/>
-        </p:spPr>
-        <p:txBody>
-          <a:bodyPr wrap="square" lIns="18288" rIns="18288" tIns="18288" bIns="18288">
-            <a:spAutoFit/>
-          </a:bodyPr>
-          <a:lstStyle/>
-          <a:p>
-            <a:pPr algn="l">
-              <a:spcAft>
-                <a:spcPts val="900"/>
-              </a:spcAft>
-              <a:defRPr sz="3400" b="1">
+              <a:defRPr sz="2100" b="1">
                 <a:solidFill>
                   <a:srgbClr val="FFFFFF"/>
                 </a:solidFill>
@@ -5911,21 +6473,64 @@
               </a:defRPr>
             </a:pPr>
             <a:r>
-              <a:t>WHAT THE RESULTS SHOW</a:t>
-            </a:r>
-          </a:p>
-        </p:txBody>
-      </p:sp>
-      <p:sp>
-        <p:nvSpPr>
-          <p:cNvPr id="67" name="TextBox 66"/>
+              <a:t>Detector</a:t>
+            </a:r>
+          </a:p>
+        </p:txBody>
+      </p:sp>
+      <p:sp>
+        <p:nvSpPr>
+          <p:cNvPr id="78" name="Rectangle 77"/>
+          <p:cNvSpPr/>
+          <p:nvPr/>
+        </p:nvSpPr>
+        <p:spPr>
+          <a:xfrm>
+            <a:off x="4480560" y="19248120"/>
+            <a:ext cx="1024128" cy="530352"/>
+          </a:xfrm>
+          <a:prstGeom prst="rect">
+            <a:avLst/>
+          </a:prstGeom>
+          <a:solidFill>
+            <a:srgbClr val="075D93"/>
+          </a:solidFill>
+          <a:ln>
+            <a:noFill/>
+          </a:ln>
+        </p:spPr>
+        <p:style>
+          <a:lnRef idx="1">
+            <a:schemeClr val="accent1"/>
+          </a:lnRef>
+          <a:fillRef idx="3">
+            <a:schemeClr val="accent1"/>
+          </a:fillRef>
+          <a:effectRef idx="2">
+            <a:schemeClr val="accent1"/>
+          </a:effectRef>
+          <a:fontRef idx="minor">
+            <a:schemeClr val="lt1"/>
+          </a:fontRef>
+        </p:style>
+        <p:txBody>
+          <a:bodyPr rtlCol="0" anchor="ctr"/>
+          <a:lstStyle/>
+          <a:p>
+            <a:pPr algn="ctr"/>
+          </a:p>
+        </p:txBody>
+      </p:sp>
+      <p:sp>
+        <p:nvSpPr>
+          <p:cNvPr id="79" name="TextBox 78"/>
           <p:cNvSpPr txBox="1"/>
           <p:nvPr/>
         </p:nvSpPr>
         <p:spPr>
           <a:xfrm>
-            <a:off x="1234440" y="25786080"/>
-            <a:ext cx="18699480" cy="548640"/>
+            <a:off x="4553712" y="19357848"/>
+            <a:ext cx="877824" cy="338328"/>
           </a:xfrm>
           <a:prstGeom prst="rect">
             <a:avLst/>
@@ -5933,55 +6538,19 @@
           <a:noFill/>
         </p:spPr>
         <p:txBody>
-          <a:bodyPr wrap="square" lIns="18288" rIns="18288" tIns="18288" bIns="18288">
+          <a:bodyPr wrap="square" lIns="36576" rIns="36576" tIns="13716" bIns="13716">
             <a:spAutoFit/>
           </a:bodyPr>
           <a:lstStyle/>
           <a:p>
-            <a:pPr algn="l">
+            <a:pPr algn="ctr">
+              <a:spcBef>
+                <a:spcPts val="0"/>
+              </a:spcBef>
               <a:spcAft>
-                <a:spcPts val="900"/>
+                <a:spcPts val="500"/>
               </a:spcAft>
-              <a:defRPr sz="3000" b="1">
-                <a:solidFill>
-                  <a:srgbClr val="DCE8D2"/>
-                </a:solidFill>
-                <a:latin typeface="Aptos"/>
-              </a:defRPr>
-            </a:pPr>
-            <a:r>
-              <a:t>The latest checkpoint was not the strongest.</a:t>
-            </a:r>
-          </a:p>
-        </p:txBody>
-      </p:sp>
-      <p:sp>
-        <p:nvSpPr>
-          <p:cNvPr id="68" name="TextBox 67"/>
-          <p:cNvSpPr txBox="1"/>
-          <p:nvPr/>
-        </p:nvSpPr>
-        <p:spPr>
-          <a:xfrm>
-            <a:off x="1234440" y="26517600"/>
-            <a:ext cx="18699480" cy="1417320"/>
-          </a:xfrm>
-          <a:prstGeom prst="rect">
-            <a:avLst/>
-          </a:prstGeom>
-          <a:noFill/>
-        </p:spPr>
-        <p:txBody>
-          <a:bodyPr wrap="square" lIns="18288" rIns="18288" tIns="18288" bIns="18288">
-            <a:spAutoFit/>
-          </a:bodyPr>
-          <a:lstStyle/>
-          <a:p>
-            <a:pPr algn="l">
-              <a:spcAft>
-                <a:spcPts val="900"/>
-              </a:spcAft>
-              <a:defRPr sz="2700" b="0">
+              <a:defRPr sz="2100" b="1">
                 <a:solidFill>
                   <a:srgbClr val="FFFFFF"/>
                 </a:solidFill>
@@ -5989,21 +6558,64 @@
               </a:defRPr>
             </a:pPr>
             <a:r>
-              <a:t>Among rounds 26–40, validation mAP@50 peaked at 61.22% in round 33, then reached 59.55% in round 40. Validation mAP@50–95 peaked at 40.61% in round 30. These validation scores are separate from the held-out test results above.</a:t>
-            </a:r>
-          </a:p>
-        </p:txBody>
-      </p:sp>
-      <p:sp>
-        <p:nvSpPr>
-          <p:cNvPr id="69" name="TextBox 68"/>
+              <a:t>Round</a:t>
+            </a:r>
+          </a:p>
+        </p:txBody>
+      </p:sp>
+      <p:sp>
+        <p:nvSpPr>
+          <p:cNvPr id="80" name="Rectangle 79"/>
+          <p:cNvSpPr/>
+          <p:nvPr/>
+        </p:nvSpPr>
+        <p:spPr>
+          <a:xfrm>
+            <a:off x="5504688" y="19248120"/>
+            <a:ext cx="1865376" cy="530352"/>
+          </a:xfrm>
+          <a:prstGeom prst="rect">
+            <a:avLst/>
+          </a:prstGeom>
+          <a:solidFill>
+            <a:srgbClr val="075D93"/>
+          </a:solidFill>
+          <a:ln>
+            <a:noFill/>
+          </a:ln>
+        </p:spPr>
+        <p:style>
+          <a:lnRef idx="1">
+            <a:schemeClr val="accent1"/>
+          </a:lnRef>
+          <a:fillRef idx="3">
+            <a:schemeClr val="accent1"/>
+          </a:fillRef>
+          <a:effectRef idx="2">
+            <a:schemeClr val="accent1"/>
+          </a:effectRef>
+          <a:fontRef idx="minor">
+            <a:schemeClr val="lt1"/>
+          </a:fontRef>
+        </p:style>
+        <p:txBody>
+          <a:bodyPr rtlCol="0" anchor="ctr"/>
+          <a:lstStyle/>
+          <a:p>
+            <a:pPr algn="ctr"/>
+          </a:p>
+        </p:txBody>
+      </p:sp>
+      <p:sp>
+        <p:nvSpPr>
+          <p:cNvPr id="81" name="TextBox 80"/>
           <p:cNvSpPr txBox="1"/>
           <p:nvPr/>
         </p:nvSpPr>
         <p:spPr>
           <a:xfrm>
-            <a:off x="868680" y="28757880"/>
-            <a:ext cx="19476720" cy="868680"/>
+            <a:off x="5577840" y="19357848"/>
+            <a:ext cx="1719072" cy="338328"/>
           </a:xfrm>
           <a:prstGeom prst="rect">
             <a:avLst/>
@@ -6011,38 +6623,84 @@
           <a:noFill/>
         </p:spPr>
         <p:txBody>
-          <a:bodyPr wrap="square" lIns="18288" rIns="18288" tIns="18288" bIns="18288">
+          <a:bodyPr wrap="square" lIns="36576" rIns="36576" tIns="13716" bIns="13716">
             <a:spAutoFit/>
           </a:bodyPr>
           <a:lstStyle/>
           <a:p>
-            <a:pPr algn="l">
+            <a:pPr algn="ctr">
+              <a:spcBef>
+                <a:spcPts val="0"/>
+              </a:spcBef>
               <a:spcAft>
-                <a:spcPts val="900"/>
+                <a:spcPts val="500"/>
               </a:spcAft>
-              <a:defRPr sz="2500" b="1">
+              <a:defRPr sz="2100" b="1">
                 <a:solidFill>
-                  <a:srgbClr val="173F32"/>
+                  <a:srgbClr val="FFFFFF"/>
                 </a:solidFill>
                 <a:latin typeface="Aptos"/>
               </a:defRPr>
             </a:pPr>
             <a:r>
-              <a:t>NEXT: review weak-class labels and data balance; select checkpoints on validation performance; run a controlled Faster R-CNN comparison.</a:t>
-            </a:r>
-          </a:p>
-        </p:txBody>
-      </p:sp>
-      <p:sp>
-        <p:nvSpPr>
-          <p:cNvPr id="70" name="TextBox 69"/>
+              <a:t>Precision</a:t>
+            </a:r>
+          </a:p>
+        </p:txBody>
+      </p:sp>
+      <p:sp>
+        <p:nvSpPr>
+          <p:cNvPr id="82" name="Rectangle 81"/>
+          <p:cNvSpPr/>
+          <p:nvPr/>
+        </p:nvSpPr>
+        <p:spPr>
+          <a:xfrm>
+            <a:off x="7370064" y="19248120"/>
+            <a:ext cx="1673352" cy="530352"/>
+          </a:xfrm>
+          <a:prstGeom prst="rect">
+            <a:avLst/>
+          </a:prstGeom>
+          <a:solidFill>
+            <a:srgbClr val="075D93"/>
+          </a:solidFill>
+          <a:ln>
+            <a:noFill/>
+          </a:ln>
+        </p:spPr>
+        <p:style>
+          <a:lnRef idx="1">
+            <a:schemeClr val="accent1"/>
+          </a:lnRef>
+          <a:fillRef idx="3">
+            <a:schemeClr val="accent1"/>
+          </a:fillRef>
+          <a:effectRef idx="2">
+            <a:schemeClr val="accent1"/>
+          </a:effectRef>
+          <a:fontRef idx="minor">
+            <a:schemeClr val="lt1"/>
+          </a:fontRef>
+        </p:style>
+        <p:txBody>
+          <a:bodyPr rtlCol="0" anchor="ctr"/>
+          <a:lstStyle/>
+          <a:p>
+            <a:pPr algn="ctr"/>
+          </a:p>
+        </p:txBody>
+      </p:sp>
+      <p:sp>
+        <p:nvSpPr>
+          <p:cNvPr id="83" name="TextBox 82"/>
           <p:cNvSpPr txBox="1"/>
           <p:nvPr/>
         </p:nvSpPr>
         <p:spPr>
           <a:xfrm>
-            <a:off x="868680" y="29791152"/>
-            <a:ext cx="19476720" cy="365760"/>
+            <a:off x="7443216" y="19357848"/>
+            <a:ext cx="1527048" cy="338328"/>
           </a:xfrm>
           <a:prstGeom prst="rect">
             <a:avLst/>
@@ -6050,24 +6708,3651 @@
           <a:noFill/>
         </p:spPr>
         <p:txBody>
-          <a:bodyPr wrap="square" lIns="18288" rIns="18288" tIns="18288" bIns="18288">
+          <a:bodyPr wrap="square" lIns="36576" rIns="36576" tIns="13716" bIns="13716">
             <a:spAutoFit/>
           </a:bodyPr>
           <a:lstStyle/>
           <a:p>
-            <a:pPr algn="l">
+            <a:pPr algn="ctr">
+              <a:spcBef>
+                <a:spcPts val="0"/>
+              </a:spcBef>
               <a:spcAft>
-                <a:spcPts val="900"/>
+                <a:spcPts val="500"/>
               </a:spcAft>
-              <a:defRPr sz="2000" b="0">
+              <a:defRPr sz="2100" b="1">
                 <a:solidFill>
-                  <a:srgbClr val="53685F"/>
+                  <a:srgbClr val="FFFFFF"/>
                 </a:solidFill>
                 <a:latin typeface="Aptos"/>
               </a:defRPr>
             </a:pPr>
             <a:r>
-              <a:t>DATA SPLIT  15,512 train  /  4,374 validation  /  2,191 test     •     MODEL  YOLOv8n + FedAvg</a:t>
+              <a:t>Recall</a:t>
+            </a:r>
+          </a:p>
+        </p:txBody>
+      </p:sp>
+      <p:sp>
+        <p:nvSpPr>
+          <p:cNvPr id="84" name="Rectangle 83"/>
+          <p:cNvSpPr/>
+          <p:nvPr/>
+        </p:nvSpPr>
+        <p:spPr>
+          <a:xfrm>
+            <a:off x="9043416" y="19248120"/>
+            <a:ext cx="2029968" cy="530352"/>
+          </a:xfrm>
+          <a:prstGeom prst="rect">
+            <a:avLst/>
+          </a:prstGeom>
+          <a:solidFill>
+            <a:srgbClr val="075D93"/>
+          </a:solidFill>
+          <a:ln>
+            <a:noFill/>
+          </a:ln>
+        </p:spPr>
+        <p:style>
+          <a:lnRef idx="1">
+            <a:schemeClr val="accent1"/>
+          </a:lnRef>
+          <a:fillRef idx="3">
+            <a:schemeClr val="accent1"/>
+          </a:fillRef>
+          <a:effectRef idx="2">
+            <a:schemeClr val="accent1"/>
+          </a:effectRef>
+          <a:fontRef idx="minor">
+            <a:schemeClr val="lt1"/>
+          </a:fontRef>
+        </p:style>
+        <p:txBody>
+          <a:bodyPr rtlCol="0" anchor="ctr"/>
+          <a:lstStyle/>
+          <a:p>
+            <a:pPr algn="ctr"/>
+          </a:p>
+        </p:txBody>
+      </p:sp>
+      <p:sp>
+        <p:nvSpPr>
+          <p:cNvPr id="85" name="TextBox 84"/>
+          <p:cNvSpPr txBox="1"/>
+          <p:nvPr/>
+        </p:nvSpPr>
+        <p:spPr>
+          <a:xfrm>
+            <a:off x="9116568" y="19357848"/>
+            <a:ext cx="1883664" cy="338328"/>
+          </a:xfrm>
+          <a:prstGeom prst="rect">
+            <a:avLst/>
+          </a:prstGeom>
+          <a:noFill/>
+        </p:spPr>
+        <p:txBody>
+          <a:bodyPr wrap="square" lIns="36576" rIns="36576" tIns="13716" bIns="13716">
+            <a:spAutoFit/>
+          </a:bodyPr>
+          <a:lstStyle/>
+          <a:p>
+            <a:pPr algn="ctr">
+              <a:spcBef>
+                <a:spcPts val="0"/>
+              </a:spcBef>
+              <a:spcAft>
+                <a:spcPts val="500"/>
+              </a:spcAft>
+              <a:defRPr sz="2100" b="1">
+                <a:solidFill>
+                  <a:srgbClr val="FFFFFF"/>
+                </a:solidFill>
+                <a:latin typeface="Aptos"/>
+              </a:defRPr>
+            </a:pPr>
+            <a:r>
+              <a:t>mAP50–95</a:t>
+            </a:r>
+          </a:p>
+        </p:txBody>
+      </p:sp>
+      <p:sp>
+        <p:nvSpPr>
+          <p:cNvPr id="86" name="Rectangle 85"/>
+          <p:cNvSpPr/>
+          <p:nvPr/>
+        </p:nvSpPr>
+        <p:spPr>
+          <a:xfrm>
+            <a:off x="1234440" y="19778472"/>
+            <a:ext cx="3246120" cy="612648"/>
+          </a:xfrm>
+          <a:prstGeom prst="rect">
+            <a:avLst/>
+          </a:prstGeom>
+          <a:solidFill>
+            <a:srgbClr val="EEF7F3"/>
+          </a:solidFill>
+          <a:ln w="17780">
+            <a:solidFill>
+              <a:srgbClr val="FFFFFF"/>
+            </a:solidFill>
+          </a:ln>
+        </p:spPr>
+        <p:style>
+          <a:lnRef idx="1">
+            <a:schemeClr val="accent1"/>
+          </a:lnRef>
+          <a:fillRef idx="3">
+            <a:schemeClr val="accent1"/>
+          </a:fillRef>
+          <a:effectRef idx="2">
+            <a:schemeClr val="accent1"/>
+          </a:effectRef>
+          <a:fontRef idx="minor">
+            <a:schemeClr val="lt1"/>
+          </a:fontRef>
+        </p:style>
+        <p:txBody>
+          <a:bodyPr rtlCol="0" anchor="ctr"/>
+          <a:lstStyle/>
+          <a:p>
+            <a:pPr algn="ctr"/>
+          </a:p>
+        </p:txBody>
+      </p:sp>
+      <p:sp>
+        <p:nvSpPr>
+          <p:cNvPr id="87" name="TextBox 86"/>
+          <p:cNvSpPr txBox="1"/>
+          <p:nvPr/>
+        </p:nvSpPr>
+        <p:spPr>
+          <a:xfrm>
+            <a:off x="1307592" y="19943064"/>
+            <a:ext cx="3099815" cy="329184"/>
+          </a:xfrm>
+          <a:prstGeom prst="rect">
+            <a:avLst/>
+          </a:prstGeom>
+          <a:noFill/>
+        </p:spPr>
+        <p:txBody>
+          <a:bodyPr wrap="square" lIns="36576" rIns="36576" tIns="13716" bIns="13716">
+            <a:spAutoFit/>
+          </a:bodyPr>
+          <a:lstStyle/>
+          <a:p>
+            <a:pPr algn="l">
+              <a:spcBef>
+                <a:spcPts val="0"/>
+              </a:spcBef>
+              <a:spcAft>
+                <a:spcPts val="500"/>
+              </a:spcAft>
+              <a:defRPr sz="2100" b="1">
+                <a:solidFill>
+                  <a:srgbClr val="243747"/>
+                </a:solidFill>
+                <a:latin typeface="Aptos"/>
+              </a:defRPr>
+            </a:pPr>
+            <a:r>
+              <a:t>SSDLite</a:t>
+            </a:r>
+          </a:p>
+        </p:txBody>
+      </p:sp>
+      <p:sp>
+        <p:nvSpPr>
+          <p:cNvPr id="88" name="Rectangle 87"/>
+          <p:cNvSpPr/>
+          <p:nvPr/>
+        </p:nvSpPr>
+        <p:spPr>
+          <a:xfrm>
+            <a:off x="4480560" y="19778472"/>
+            <a:ext cx="1024128" cy="612648"/>
+          </a:xfrm>
+          <a:prstGeom prst="rect">
+            <a:avLst/>
+          </a:prstGeom>
+          <a:solidFill>
+            <a:srgbClr val="EEF7F3"/>
+          </a:solidFill>
+          <a:ln w="17780">
+            <a:solidFill>
+              <a:srgbClr val="FFFFFF"/>
+            </a:solidFill>
+          </a:ln>
+        </p:spPr>
+        <p:style>
+          <a:lnRef idx="1">
+            <a:schemeClr val="accent1"/>
+          </a:lnRef>
+          <a:fillRef idx="3">
+            <a:schemeClr val="accent1"/>
+          </a:fillRef>
+          <a:effectRef idx="2">
+            <a:schemeClr val="accent1"/>
+          </a:effectRef>
+          <a:fontRef idx="minor">
+            <a:schemeClr val="lt1"/>
+          </a:fontRef>
+        </p:style>
+        <p:txBody>
+          <a:bodyPr rtlCol="0" anchor="ctr"/>
+          <a:lstStyle/>
+          <a:p>
+            <a:pPr algn="ctr"/>
+          </a:p>
+        </p:txBody>
+      </p:sp>
+      <p:sp>
+        <p:nvSpPr>
+          <p:cNvPr id="89" name="TextBox 88"/>
+          <p:cNvSpPr txBox="1"/>
+          <p:nvPr/>
+        </p:nvSpPr>
+        <p:spPr>
+          <a:xfrm>
+            <a:off x="4553712" y="19943064"/>
+            <a:ext cx="877824" cy="329184"/>
+          </a:xfrm>
+          <a:prstGeom prst="rect">
+            <a:avLst/>
+          </a:prstGeom>
+          <a:noFill/>
+        </p:spPr>
+        <p:txBody>
+          <a:bodyPr wrap="square" lIns="36576" rIns="36576" tIns="13716" bIns="13716">
+            <a:spAutoFit/>
+          </a:bodyPr>
+          <a:lstStyle/>
+          <a:p>
+            <a:pPr algn="ctr">
+              <a:spcBef>
+                <a:spcPts val="0"/>
+              </a:spcBef>
+              <a:spcAft>
+                <a:spcPts val="500"/>
+              </a:spcAft>
+              <a:defRPr sz="2100" b="0">
+                <a:solidFill>
+                  <a:srgbClr val="243747"/>
+                </a:solidFill>
+                <a:latin typeface="Aptos"/>
+              </a:defRPr>
+            </a:pPr>
+            <a:r>
+              <a:t>10</a:t>
+            </a:r>
+          </a:p>
+        </p:txBody>
+      </p:sp>
+      <p:sp>
+        <p:nvSpPr>
+          <p:cNvPr id="90" name="Rectangle 89"/>
+          <p:cNvSpPr/>
+          <p:nvPr/>
+        </p:nvSpPr>
+        <p:spPr>
+          <a:xfrm>
+            <a:off x="5504688" y="19778472"/>
+            <a:ext cx="1865376" cy="612648"/>
+          </a:xfrm>
+          <a:prstGeom prst="rect">
+            <a:avLst/>
+          </a:prstGeom>
+          <a:solidFill>
+            <a:srgbClr val="EEF7F3"/>
+          </a:solidFill>
+          <a:ln w="17780">
+            <a:solidFill>
+              <a:srgbClr val="FFFFFF"/>
+            </a:solidFill>
+          </a:ln>
+        </p:spPr>
+        <p:style>
+          <a:lnRef idx="1">
+            <a:schemeClr val="accent1"/>
+          </a:lnRef>
+          <a:fillRef idx="3">
+            <a:schemeClr val="accent1"/>
+          </a:fillRef>
+          <a:effectRef idx="2">
+            <a:schemeClr val="accent1"/>
+          </a:effectRef>
+          <a:fontRef idx="minor">
+            <a:schemeClr val="lt1"/>
+          </a:fontRef>
+        </p:style>
+        <p:txBody>
+          <a:bodyPr rtlCol="0" anchor="ctr"/>
+          <a:lstStyle/>
+          <a:p>
+            <a:pPr algn="ctr"/>
+          </a:p>
+        </p:txBody>
+      </p:sp>
+      <p:sp>
+        <p:nvSpPr>
+          <p:cNvPr id="91" name="TextBox 90"/>
+          <p:cNvSpPr txBox="1"/>
+          <p:nvPr/>
+        </p:nvSpPr>
+        <p:spPr>
+          <a:xfrm>
+            <a:off x="5577840" y="19943064"/>
+            <a:ext cx="1719072" cy="329184"/>
+          </a:xfrm>
+          <a:prstGeom prst="rect">
+            <a:avLst/>
+          </a:prstGeom>
+          <a:noFill/>
+        </p:spPr>
+        <p:txBody>
+          <a:bodyPr wrap="square" lIns="36576" rIns="36576" tIns="13716" bIns="13716">
+            <a:spAutoFit/>
+          </a:bodyPr>
+          <a:lstStyle/>
+          <a:p>
+            <a:pPr algn="ctr">
+              <a:spcBef>
+                <a:spcPts val="0"/>
+              </a:spcBef>
+              <a:spcAft>
+                <a:spcPts val="500"/>
+              </a:spcAft>
+              <a:defRPr sz="2100" b="0">
+                <a:solidFill>
+                  <a:srgbClr val="243747"/>
+                </a:solidFill>
+                <a:latin typeface="Aptos"/>
+              </a:defRPr>
+            </a:pPr>
+            <a:r>
+              <a:t>66.44%</a:t>
+            </a:r>
+          </a:p>
+        </p:txBody>
+      </p:sp>
+      <p:sp>
+        <p:nvSpPr>
+          <p:cNvPr id="92" name="Rectangle 91"/>
+          <p:cNvSpPr/>
+          <p:nvPr/>
+        </p:nvSpPr>
+        <p:spPr>
+          <a:xfrm>
+            <a:off x="7370064" y="19778472"/>
+            <a:ext cx="1673352" cy="612648"/>
+          </a:xfrm>
+          <a:prstGeom prst="rect">
+            <a:avLst/>
+          </a:prstGeom>
+          <a:solidFill>
+            <a:srgbClr val="EEF7F3"/>
+          </a:solidFill>
+          <a:ln w="17780">
+            <a:solidFill>
+              <a:srgbClr val="FFFFFF"/>
+            </a:solidFill>
+          </a:ln>
+        </p:spPr>
+        <p:style>
+          <a:lnRef idx="1">
+            <a:schemeClr val="accent1"/>
+          </a:lnRef>
+          <a:fillRef idx="3">
+            <a:schemeClr val="accent1"/>
+          </a:fillRef>
+          <a:effectRef idx="2">
+            <a:schemeClr val="accent1"/>
+          </a:effectRef>
+          <a:fontRef idx="minor">
+            <a:schemeClr val="lt1"/>
+          </a:fontRef>
+        </p:style>
+        <p:txBody>
+          <a:bodyPr rtlCol="0" anchor="ctr"/>
+          <a:lstStyle/>
+          <a:p>
+            <a:pPr algn="ctr"/>
+          </a:p>
+        </p:txBody>
+      </p:sp>
+      <p:sp>
+        <p:nvSpPr>
+          <p:cNvPr id="93" name="TextBox 92"/>
+          <p:cNvSpPr txBox="1"/>
+          <p:nvPr/>
+        </p:nvSpPr>
+        <p:spPr>
+          <a:xfrm>
+            <a:off x="7443216" y="19943064"/>
+            <a:ext cx="1527048" cy="329184"/>
+          </a:xfrm>
+          <a:prstGeom prst="rect">
+            <a:avLst/>
+          </a:prstGeom>
+          <a:noFill/>
+        </p:spPr>
+        <p:txBody>
+          <a:bodyPr wrap="square" lIns="36576" rIns="36576" tIns="13716" bIns="13716">
+            <a:spAutoFit/>
+          </a:bodyPr>
+          <a:lstStyle/>
+          <a:p>
+            <a:pPr algn="ctr">
+              <a:spcBef>
+                <a:spcPts val="0"/>
+              </a:spcBef>
+              <a:spcAft>
+                <a:spcPts val="500"/>
+              </a:spcAft>
+              <a:defRPr sz="2100" b="0">
+                <a:solidFill>
+                  <a:srgbClr val="243747"/>
+                </a:solidFill>
+                <a:latin typeface="Aptos"/>
+              </a:defRPr>
+            </a:pPr>
+            <a:r>
+              <a:t>51.17%</a:t>
+            </a:r>
+          </a:p>
+        </p:txBody>
+      </p:sp>
+      <p:sp>
+        <p:nvSpPr>
+          <p:cNvPr id="94" name="Rectangle 93"/>
+          <p:cNvSpPr/>
+          <p:nvPr/>
+        </p:nvSpPr>
+        <p:spPr>
+          <a:xfrm>
+            <a:off x="9043416" y="19778472"/>
+            <a:ext cx="2029968" cy="612648"/>
+          </a:xfrm>
+          <a:prstGeom prst="rect">
+            <a:avLst/>
+          </a:prstGeom>
+          <a:solidFill>
+            <a:srgbClr val="EEF7F3"/>
+          </a:solidFill>
+          <a:ln w="17780">
+            <a:solidFill>
+              <a:srgbClr val="FFFFFF"/>
+            </a:solidFill>
+          </a:ln>
+        </p:spPr>
+        <p:style>
+          <a:lnRef idx="1">
+            <a:schemeClr val="accent1"/>
+          </a:lnRef>
+          <a:fillRef idx="3">
+            <a:schemeClr val="accent1"/>
+          </a:fillRef>
+          <a:effectRef idx="2">
+            <a:schemeClr val="accent1"/>
+          </a:effectRef>
+          <a:fontRef idx="minor">
+            <a:schemeClr val="lt1"/>
+          </a:fontRef>
+        </p:style>
+        <p:txBody>
+          <a:bodyPr rtlCol="0" anchor="ctr"/>
+          <a:lstStyle/>
+          <a:p>
+            <a:pPr algn="ctr"/>
+          </a:p>
+        </p:txBody>
+      </p:sp>
+      <p:sp>
+        <p:nvSpPr>
+          <p:cNvPr id="95" name="TextBox 94"/>
+          <p:cNvSpPr txBox="1"/>
+          <p:nvPr/>
+        </p:nvSpPr>
+        <p:spPr>
+          <a:xfrm>
+            <a:off x="9116568" y="19943064"/>
+            <a:ext cx="1883664" cy="329184"/>
+          </a:xfrm>
+          <a:prstGeom prst="rect">
+            <a:avLst/>
+          </a:prstGeom>
+          <a:noFill/>
+        </p:spPr>
+        <p:txBody>
+          <a:bodyPr wrap="square" lIns="36576" rIns="36576" tIns="13716" bIns="13716">
+            <a:spAutoFit/>
+          </a:bodyPr>
+          <a:lstStyle/>
+          <a:p>
+            <a:pPr algn="ctr">
+              <a:spcBef>
+                <a:spcPts val="0"/>
+              </a:spcBef>
+              <a:spcAft>
+                <a:spcPts val="500"/>
+              </a:spcAft>
+              <a:defRPr sz="2100" b="0">
+                <a:solidFill>
+                  <a:srgbClr val="243747"/>
+                </a:solidFill>
+                <a:latin typeface="Aptos"/>
+              </a:defRPr>
+            </a:pPr>
+            <a:r>
+              <a:t>39.06%</a:t>
+            </a:r>
+          </a:p>
+        </p:txBody>
+      </p:sp>
+      <p:sp>
+        <p:nvSpPr>
+          <p:cNvPr id="96" name="Rectangle 95"/>
+          <p:cNvSpPr/>
+          <p:nvPr/>
+        </p:nvSpPr>
+        <p:spPr>
+          <a:xfrm>
+            <a:off x="1234440" y="20391120"/>
+            <a:ext cx="3246120" cy="612648"/>
+          </a:xfrm>
+          <a:prstGeom prst="rect">
+            <a:avLst/>
+          </a:prstGeom>
+          <a:solidFill>
+            <a:srgbClr val="F6FAFC"/>
+          </a:solidFill>
+          <a:ln w="17780">
+            <a:solidFill>
+              <a:srgbClr val="FFFFFF"/>
+            </a:solidFill>
+          </a:ln>
+        </p:spPr>
+        <p:style>
+          <a:lnRef idx="1">
+            <a:schemeClr val="accent1"/>
+          </a:lnRef>
+          <a:fillRef idx="3">
+            <a:schemeClr val="accent1"/>
+          </a:fillRef>
+          <a:effectRef idx="2">
+            <a:schemeClr val="accent1"/>
+          </a:effectRef>
+          <a:fontRef idx="minor">
+            <a:schemeClr val="lt1"/>
+          </a:fontRef>
+        </p:style>
+        <p:txBody>
+          <a:bodyPr rtlCol="0" anchor="ctr"/>
+          <a:lstStyle/>
+          <a:p>
+            <a:pPr algn="ctr"/>
+          </a:p>
+        </p:txBody>
+      </p:sp>
+      <p:sp>
+        <p:nvSpPr>
+          <p:cNvPr id="97" name="TextBox 96"/>
+          <p:cNvSpPr txBox="1"/>
+          <p:nvPr/>
+        </p:nvSpPr>
+        <p:spPr>
+          <a:xfrm>
+            <a:off x="1307592" y="20555712"/>
+            <a:ext cx="3099815" cy="329184"/>
+          </a:xfrm>
+          <a:prstGeom prst="rect">
+            <a:avLst/>
+          </a:prstGeom>
+          <a:noFill/>
+        </p:spPr>
+        <p:txBody>
+          <a:bodyPr wrap="square" lIns="36576" rIns="36576" tIns="13716" bIns="13716">
+            <a:spAutoFit/>
+          </a:bodyPr>
+          <a:lstStyle/>
+          <a:p>
+            <a:pPr algn="l">
+              <a:spcBef>
+                <a:spcPts val="0"/>
+              </a:spcBef>
+              <a:spcAft>
+                <a:spcPts val="500"/>
+              </a:spcAft>
+              <a:defRPr sz="2100" b="1">
+                <a:solidFill>
+                  <a:srgbClr val="243747"/>
+                </a:solidFill>
+                <a:latin typeface="Aptos"/>
+              </a:defRPr>
+            </a:pPr>
+            <a:r>
+              <a:t>SSD–MobileNetV3</a:t>
+            </a:r>
+          </a:p>
+        </p:txBody>
+      </p:sp>
+      <p:sp>
+        <p:nvSpPr>
+          <p:cNvPr id="98" name="Rectangle 97"/>
+          <p:cNvSpPr/>
+          <p:nvPr/>
+        </p:nvSpPr>
+        <p:spPr>
+          <a:xfrm>
+            <a:off x="4480560" y="20391120"/>
+            <a:ext cx="1024128" cy="612648"/>
+          </a:xfrm>
+          <a:prstGeom prst="rect">
+            <a:avLst/>
+          </a:prstGeom>
+          <a:solidFill>
+            <a:srgbClr val="F6FAFC"/>
+          </a:solidFill>
+          <a:ln w="17780">
+            <a:solidFill>
+              <a:srgbClr val="FFFFFF"/>
+            </a:solidFill>
+          </a:ln>
+        </p:spPr>
+        <p:style>
+          <a:lnRef idx="1">
+            <a:schemeClr val="accent1"/>
+          </a:lnRef>
+          <a:fillRef idx="3">
+            <a:schemeClr val="accent1"/>
+          </a:fillRef>
+          <a:effectRef idx="2">
+            <a:schemeClr val="accent1"/>
+          </a:effectRef>
+          <a:fontRef idx="minor">
+            <a:schemeClr val="lt1"/>
+          </a:fontRef>
+        </p:style>
+        <p:txBody>
+          <a:bodyPr rtlCol="0" anchor="ctr"/>
+          <a:lstStyle/>
+          <a:p>
+            <a:pPr algn="ctr"/>
+          </a:p>
+        </p:txBody>
+      </p:sp>
+      <p:sp>
+        <p:nvSpPr>
+          <p:cNvPr id="99" name="TextBox 98"/>
+          <p:cNvSpPr txBox="1"/>
+          <p:nvPr/>
+        </p:nvSpPr>
+        <p:spPr>
+          <a:xfrm>
+            <a:off x="4553712" y="20555712"/>
+            <a:ext cx="877824" cy="329184"/>
+          </a:xfrm>
+          <a:prstGeom prst="rect">
+            <a:avLst/>
+          </a:prstGeom>
+          <a:noFill/>
+        </p:spPr>
+        <p:txBody>
+          <a:bodyPr wrap="square" lIns="36576" rIns="36576" tIns="13716" bIns="13716">
+            <a:spAutoFit/>
+          </a:bodyPr>
+          <a:lstStyle/>
+          <a:p>
+            <a:pPr algn="ctr">
+              <a:spcBef>
+                <a:spcPts val="0"/>
+              </a:spcBef>
+              <a:spcAft>
+                <a:spcPts val="500"/>
+              </a:spcAft>
+              <a:defRPr sz="2100" b="0">
+                <a:solidFill>
+                  <a:srgbClr val="243747"/>
+                </a:solidFill>
+                <a:latin typeface="Aptos"/>
+              </a:defRPr>
+            </a:pPr>
+            <a:r>
+              <a:t>10</a:t>
+            </a:r>
+          </a:p>
+        </p:txBody>
+      </p:sp>
+      <p:sp>
+        <p:nvSpPr>
+          <p:cNvPr id="100" name="Rectangle 99"/>
+          <p:cNvSpPr/>
+          <p:nvPr/>
+        </p:nvSpPr>
+        <p:spPr>
+          <a:xfrm>
+            <a:off x="5504688" y="20391120"/>
+            <a:ext cx="1865376" cy="612648"/>
+          </a:xfrm>
+          <a:prstGeom prst="rect">
+            <a:avLst/>
+          </a:prstGeom>
+          <a:solidFill>
+            <a:srgbClr val="F6FAFC"/>
+          </a:solidFill>
+          <a:ln w="17780">
+            <a:solidFill>
+              <a:srgbClr val="FFFFFF"/>
+            </a:solidFill>
+          </a:ln>
+        </p:spPr>
+        <p:style>
+          <a:lnRef idx="1">
+            <a:schemeClr val="accent1"/>
+          </a:lnRef>
+          <a:fillRef idx="3">
+            <a:schemeClr val="accent1"/>
+          </a:fillRef>
+          <a:effectRef idx="2">
+            <a:schemeClr val="accent1"/>
+          </a:effectRef>
+          <a:fontRef idx="minor">
+            <a:schemeClr val="lt1"/>
+          </a:fontRef>
+        </p:style>
+        <p:txBody>
+          <a:bodyPr rtlCol="0" anchor="ctr"/>
+          <a:lstStyle/>
+          <a:p>
+            <a:pPr algn="ctr"/>
+          </a:p>
+        </p:txBody>
+      </p:sp>
+      <p:sp>
+        <p:nvSpPr>
+          <p:cNvPr id="101" name="TextBox 100"/>
+          <p:cNvSpPr txBox="1"/>
+          <p:nvPr/>
+        </p:nvSpPr>
+        <p:spPr>
+          <a:xfrm>
+            <a:off x="5577840" y="20555712"/>
+            <a:ext cx="1719072" cy="329184"/>
+          </a:xfrm>
+          <a:prstGeom prst="rect">
+            <a:avLst/>
+          </a:prstGeom>
+          <a:noFill/>
+        </p:spPr>
+        <p:txBody>
+          <a:bodyPr wrap="square" lIns="36576" rIns="36576" tIns="13716" bIns="13716">
+            <a:spAutoFit/>
+          </a:bodyPr>
+          <a:lstStyle/>
+          <a:p>
+            <a:pPr algn="ctr">
+              <a:spcBef>
+                <a:spcPts val="0"/>
+              </a:spcBef>
+              <a:spcAft>
+                <a:spcPts val="500"/>
+              </a:spcAft>
+              <a:defRPr sz="2100" b="0">
+                <a:solidFill>
+                  <a:srgbClr val="243747"/>
+                </a:solidFill>
+                <a:latin typeface="Aptos"/>
+              </a:defRPr>
+            </a:pPr>
+            <a:r>
+              <a:t>57.92%</a:t>
+            </a:r>
+          </a:p>
+        </p:txBody>
+      </p:sp>
+      <p:sp>
+        <p:nvSpPr>
+          <p:cNvPr id="102" name="Rectangle 101"/>
+          <p:cNvSpPr/>
+          <p:nvPr/>
+        </p:nvSpPr>
+        <p:spPr>
+          <a:xfrm>
+            <a:off x="7370064" y="20391120"/>
+            <a:ext cx="1673352" cy="612648"/>
+          </a:xfrm>
+          <a:prstGeom prst="rect">
+            <a:avLst/>
+          </a:prstGeom>
+          <a:solidFill>
+            <a:srgbClr val="F6FAFC"/>
+          </a:solidFill>
+          <a:ln w="17780">
+            <a:solidFill>
+              <a:srgbClr val="FFFFFF"/>
+            </a:solidFill>
+          </a:ln>
+        </p:spPr>
+        <p:style>
+          <a:lnRef idx="1">
+            <a:schemeClr val="accent1"/>
+          </a:lnRef>
+          <a:fillRef idx="3">
+            <a:schemeClr val="accent1"/>
+          </a:fillRef>
+          <a:effectRef idx="2">
+            <a:schemeClr val="accent1"/>
+          </a:effectRef>
+          <a:fontRef idx="minor">
+            <a:schemeClr val="lt1"/>
+          </a:fontRef>
+        </p:style>
+        <p:txBody>
+          <a:bodyPr rtlCol="0" anchor="ctr"/>
+          <a:lstStyle/>
+          <a:p>
+            <a:pPr algn="ctr"/>
+          </a:p>
+        </p:txBody>
+      </p:sp>
+      <p:sp>
+        <p:nvSpPr>
+          <p:cNvPr id="103" name="TextBox 102"/>
+          <p:cNvSpPr txBox="1"/>
+          <p:nvPr/>
+        </p:nvSpPr>
+        <p:spPr>
+          <a:xfrm>
+            <a:off x="7443216" y="20555712"/>
+            <a:ext cx="1527048" cy="329184"/>
+          </a:xfrm>
+          <a:prstGeom prst="rect">
+            <a:avLst/>
+          </a:prstGeom>
+          <a:noFill/>
+        </p:spPr>
+        <p:txBody>
+          <a:bodyPr wrap="square" lIns="36576" rIns="36576" tIns="13716" bIns="13716">
+            <a:spAutoFit/>
+          </a:bodyPr>
+          <a:lstStyle/>
+          <a:p>
+            <a:pPr algn="ctr">
+              <a:spcBef>
+                <a:spcPts val="0"/>
+              </a:spcBef>
+              <a:spcAft>
+                <a:spcPts val="500"/>
+              </a:spcAft>
+              <a:defRPr sz="2100" b="0">
+                <a:solidFill>
+                  <a:srgbClr val="243747"/>
+                </a:solidFill>
+                <a:latin typeface="Aptos"/>
+              </a:defRPr>
+            </a:pPr>
+            <a:r>
+              <a:t>47.61%</a:t>
+            </a:r>
+          </a:p>
+        </p:txBody>
+      </p:sp>
+      <p:sp>
+        <p:nvSpPr>
+          <p:cNvPr id="104" name="Rectangle 103"/>
+          <p:cNvSpPr/>
+          <p:nvPr/>
+        </p:nvSpPr>
+        <p:spPr>
+          <a:xfrm>
+            <a:off x="9043416" y="20391120"/>
+            <a:ext cx="2029968" cy="612648"/>
+          </a:xfrm>
+          <a:prstGeom prst="rect">
+            <a:avLst/>
+          </a:prstGeom>
+          <a:solidFill>
+            <a:srgbClr val="F6FAFC"/>
+          </a:solidFill>
+          <a:ln w="17780">
+            <a:solidFill>
+              <a:srgbClr val="FFFFFF"/>
+            </a:solidFill>
+          </a:ln>
+        </p:spPr>
+        <p:style>
+          <a:lnRef idx="1">
+            <a:schemeClr val="accent1"/>
+          </a:lnRef>
+          <a:fillRef idx="3">
+            <a:schemeClr val="accent1"/>
+          </a:fillRef>
+          <a:effectRef idx="2">
+            <a:schemeClr val="accent1"/>
+          </a:effectRef>
+          <a:fontRef idx="minor">
+            <a:schemeClr val="lt1"/>
+          </a:fontRef>
+        </p:style>
+        <p:txBody>
+          <a:bodyPr rtlCol="0" anchor="ctr"/>
+          <a:lstStyle/>
+          <a:p>
+            <a:pPr algn="ctr"/>
+          </a:p>
+        </p:txBody>
+      </p:sp>
+      <p:sp>
+        <p:nvSpPr>
+          <p:cNvPr id="105" name="TextBox 104"/>
+          <p:cNvSpPr txBox="1"/>
+          <p:nvPr/>
+        </p:nvSpPr>
+        <p:spPr>
+          <a:xfrm>
+            <a:off x="9116568" y="20555712"/>
+            <a:ext cx="1883664" cy="329184"/>
+          </a:xfrm>
+          <a:prstGeom prst="rect">
+            <a:avLst/>
+          </a:prstGeom>
+          <a:noFill/>
+        </p:spPr>
+        <p:txBody>
+          <a:bodyPr wrap="square" lIns="36576" rIns="36576" tIns="13716" bIns="13716">
+            <a:spAutoFit/>
+          </a:bodyPr>
+          <a:lstStyle/>
+          <a:p>
+            <a:pPr algn="ctr">
+              <a:spcBef>
+                <a:spcPts val="0"/>
+              </a:spcBef>
+              <a:spcAft>
+                <a:spcPts val="500"/>
+              </a:spcAft>
+              <a:defRPr sz="2100" b="0">
+                <a:solidFill>
+                  <a:srgbClr val="243747"/>
+                </a:solidFill>
+                <a:latin typeface="Aptos"/>
+              </a:defRPr>
+            </a:pPr>
+            <a:r>
+              <a:t>30.30%</a:t>
+            </a:r>
+          </a:p>
+        </p:txBody>
+      </p:sp>
+      <p:sp>
+        <p:nvSpPr>
+          <p:cNvPr id="106" name="Rectangle 105"/>
+          <p:cNvSpPr/>
+          <p:nvPr/>
+        </p:nvSpPr>
+        <p:spPr>
+          <a:xfrm>
+            <a:off x="1234440" y="21003768"/>
+            <a:ext cx="3246120" cy="612648"/>
+          </a:xfrm>
+          <a:prstGeom prst="rect">
+            <a:avLst/>
+          </a:prstGeom>
+          <a:solidFill>
+            <a:srgbClr val="EEF7F3"/>
+          </a:solidFill>
+          <a:ln w="17780">
+            <a:solidFill>
+              <a:srgbClr val="FFFFFF"/>
+            </a:solidFill>
+          </a:ln>
+        </p:spPr>
+        <p:style>
+          <a:lnRef idx="1">
+            <a:schemeClr val="accent1"/>
+          </a:lnRef>
+          <a:fillRef idx="3">
+            <a:schemeClr val="accent1"/>
+          </a:fillRef>
+          <a:effectRef idx="2">
+            <a:schemeClr val="accent1"/>
+          </a:effectRef>
+          <a:fontRef idx="minor">
+            <a:schemeClr val="lt1"/>
+          </a:fontRef>
+        </p:style>
+        <p:txBody>
+          <a:bodyPr rtlCol="0" anchor="ctr"/>
+          <a:lstStyle/>
+          <a:p>
+            <a:pPr algn="ctr"/>
+          </a:p>
+        </p:txBody>
+      </p:sp>
+      <p:sp>
+        <p:nvSpPr>
+          <p:cNvPr id="107" name="TextBox 106"/>
+          <p:cNvSpPr txBox="1"/>
+          <p:nvPr/>
+        </p:nvSpPr>
+        <p:spPr>
+          <a:xfrm>
+            <a:off x="1307592" y="21168360"/>
+            <a:ext cx="3099815" cy="329184"/>
+          </a:xfrm>
+          <a:prstGeom prst="rect">
+            <a:avLst/>
+          </a:prstGeom>
+          <a:noFill/>
+        </p:spPr>
+        <p:txBody>
+          <a:bodyPr wrap="square" lIns="36576" rIns="36576" tIns="13716" bIns="13716">
+            <a:spAutoFit/>
+          </a:bodyPr>
+          <a:lstStyle/>
+          <a:p>
+            <a:pPr algn="l">
+              <a:spcBef>
+                <a:spcPts val="0"/>
+              </a:spcBef>
+              <a:spcAft>
+                <a:spcPts val="500"/>
+              </a:spcAft>
+              <a:defRPr sz="2100" b="1">
+                <a:solidFill>
+                  <a:srgbClr val="243747"/>
+                </a:solidFill>
+                <a:latin typeface="Aptos"/>
+              </a:defRPr>
+            </a:pPr>
+            <a:r>
+              <a:t>EfficientDet-D0</a:t>
+            </a:r>
+          </a:p>
+        </p:txBody>
+      </p:sp>
+      <p:sp>
+        <p:nvSpPr>
+          <p:cNvPr id="108" name="Rectangle 107"/>
+          <p:cNvSpPr/>
+          <p:nvPr/>
+        </p:nvSpPr>
+        <p:spPr>
+          <a:xfrm>
+            <a:off x="4480560" y="21003768"/>
+            <a:ext cx="1024128" cy="612648"/>
+          </a:xfrm>
+          <a:prstGeom prst="rect">
+            <a:avLst/>
+          </a:prstGeom>
+          <a:solidFill>
+            <a:srgbClr val="EEF7F3"/>
+          </a:solidFill>
+          <a:ln w="17780">
+            <a:solidFill>
+              <a:srgbClr val="FFFFFF"/>
+            </a:solidFill>
+          </a:ln>
+        </p:spPr>
+        <p:style>
+          <a:lnRef idx="1">
+            <a:schemeClr val="accent1"/>
+          </a:lnRef>
+          <a:fillRef idx="3">
+            <a:schemeClr val="accent1"/>
+          </a:fillRef>
+          <a:effectRef idx="2">
+            <a:schemeClr val="accent1"/>
+          </a:effectRef>
+          <a:fontRef idx="minor">
+            <a:schemeClr val="lt1"/>
+          </a:fontRef>
+        </p:style>
+        <p:txBody>
+          <a:bodyPr rtlCol="0" anchor="ctr"/>
+          <a:lstStyle/>
+          <a:p>
+            <a:pPr algn="ctr"/>
+          </a:p>
+        </p:txBody>
+      </p:sp>
+      <p:sp>
+        <p:nvSpPr>
+          <p:cNvPr id="109" name="TextBox 108"/>
+          <p:cNvSpPr txBox="1"/>
+          <p:nvPr/>
+        </p:nvSpPr>
+        <p:spPr>
+          <a:xfrm>
+            <a:off x="4553712" y="21168360"/>
+            <a:ext cx="877824" cy="329184"/>
+          </a:xfrm>
+          <a:prstGeom prst="rect">
+            <a:avLst/>
+          </a:prstGeom>
+          <a:noFill/>
+        </p:spPr>
+        <p:txBody>
+          <a:bodyPr wrap="square" lIns="36576" rIns="36576" tIns="13716" bIns="13716">
+            <a:spAutoFit/>
+          </a:bodyPr>
+          <a:lstStyle/>
+          <a:p>
+            <a:pPr algn="ctr">
+              <a:spcBef>
+                <a:spcPts val="0"/>
+              </a:spcBef>
+              <a:spcAft>
+                <a:spcPts val="500"/>
+              </a:spcAft>
+              <a:defRPr sz="2100" b="0">
+                <a:solidFill>
+                  <a:srgbClr val="243747"/>
+                </a:solidFill>
+                <a:latin typeface="Aptos"/>
+              </a:defRPr>
+            </a:pPr>
+            <a:r>
+              <a:t>2</a:t>
+            </a:r>
+          </a:p>
+        </p:txBody>
+      </p:sp>
+      <p:sp>
+        <p:nvSpPr>
+          <p:cNvPr id="110" name="Rectangle 109"/>
+          <p:cNvSpPr/>
+          <p:nvPr/>
+        </p:nvSpPr>
+        <p:spPr>
+          <a:xfrm>
+            <a:off x="5504688" y="21003768"/>
+            <a:ext cx="1865376" cy="612648"/>
+          </a:xfrm>
+          <a:prstGeom prst="rect">
+            <a:avLst/>
+          </a:prstGeom>
+          <a:solidFill>
+            <a:srgbClr val="EEF7F3"/>
+          </a:solidFill>
+          <a:ln w="17780">
+            <a:solidFill>
+              <a:srgbClr val="FFFFFF"/>
+            </a:solidFill>
+          </a:ln>
+        </p:spPr>
+        <p:style>
+          <a:lnRef idx="1">
+            <a:schemeClr val="accent1"/>
+          </a:lnRef>
+          <a:fillRef idx="3">
+            <a:schemeClr val="accent1"/>
+          </a:fillRef>
+          <a:effectRef idx="2">
+            <a:schemeClr val="accent1"/>
+          </a:effectRef>
+          <a:fontRef idx="minor">
+            <a:schemeClr val="lt1"/>
+          </a:fontRef>
+        </p:style>
+        <p:txBody>
+          <a:bodyPr rtlCol="0" anchor="ctr"/>
+          <a:lstStyle/>
+          <a:p>
+            <a:pPr algn="ctr"/>
+          </a:p>
+        </p:txBody>
+      </p:sp>
+      <p:sp>
+        <p:nvSpPr>
+          <p:cNvPr id="111" name="TextBox 110"/>
+          <p:cNvSpPr txBox="1"/>
+          <p:nvPr/>
+        </p:nvSpPr>
+        <p:spPr>
+          <a:xfrm>
+            <a:off x="5577840" y="21168360"/>
+            <a:ext cx="1719072" cy="329184"/>
+          </a:xfrm>
+          <a:prstGeom prst="rect">
+            <a:avLst/>
+          </a:prstGeom>
+          <a:noFill/>
+        </p:spPr>
+        <p:txBody>
+          <a:bodyPr wrap="square" lIns="36576" rIns="36576" tIns="13716" bIns="13716">
+            <a:spAutoFit/>
+          </a:bodyPr>
+          <a:lstStyle/>
+          <a:p>
+            <a:pPr algn="ctr">
+              <a:spcBef>
+                <a:spcPts val="0"/>
+              </a:spcBef>
+              <a:spcAft>
+                <a:spcPts val="500"/>
+              </a:spcAft>
+              <a:defRPr sz="2100" b="0">
+                <a:solidFill>
+                  <a:srgbClr val="243747"/>
+                </a:solidFill>
+                <a:latin typeface="Aptos"/>
+              </a:defRPr>
+            </a:pPr>
+            <a:r>
+              <a:t>56.75%</a:t>
+            </a:r>
+          </a:p>
+        </p:txBody>
+      </p:sp>
+      <p:sp>
+        <p:nvSpPr>
+          <p:cNvPr id="112" name="Rectangle 111"/>
+          <p:cNvSpPr/>
+          <p:nvPr/>
+        </p:nvSpPr>
+        <p:spPr>
+          <a:xfrm>
+            <a:off x="7370064" y="21003768"/>
+            <a:ext cx="1673352" cy="612648"/>
+          </a:xfrm>
+          <a:prstGeom prst="rect">
+            <a:avLst/>
+          </a:prstGeom>
+          <a:solidFill>
+            <a:srgbClr val="EEF7F3"/>
+          </a:solidFill>
+          <a:ln w="17780">
+            <a:solidFill>
+              <a:srgbClr val="FFFFFF"/>
+            </a:solidFill>
+          </a:ln>
+        </p:spPr>
+        <p:style>
+          <a:lnRef idx="1">
+            <a:schemeClr val="accent1"/>
+          </a:lnRef>
+          <a:fillRef idx="3">
+            <a:schemeClr val="accent1"/>
+          </a:fillRef>
+          <a:effectRef idx="2">
+            <a:schemeClr val="accent1"/>
+          </a:effectRef>
+          <a:fontRef idx="minor">
+            <a:schemeClr val="lt1"/>
+          </a:fontRef>
+        </p:style>
+        <p:txBody>
+          <a:bodyPr rtlCol="0" anchor="ctr"/>
+          <a:lstStyle/>
+          <a:p>
+            <a:pPr algn="ctr"/>
+          </a:p>
+        </p:txBody>
+      </p:sp>
+      <p:sp>
+        <p:nvSpPr>
+          <p:cNvPr id="113" name="TextBox 112"/>
+          <p:cNvSpPr txBox="1"/>
+          <p:nvPr/>
+        </p:nvSpPr>
+        <p:spPr>
+          <a:xfrm>
+            <a:off x="7443216" y="21168360"/>
+            <a:ext cx="1527048" cy="329184"/>
+          </a:xfrm>
+          <a:prstGeom prst="rect">
+            <a:avLst/>
+          </a:prstGeom>
+          <a:noFill/>
+        </p:spPr>
+        <p:txBody>
+          <a:bodyPr wrap="square" lIns="36576" rIns="36576" tIns="13716" bIns="13716">
+            <a:spAutoFit/>
+          </a:bodyPr>
+          <a:lstStyle/>
+          <a:p>
+            <a:pPr algn="ctr">
+              <a:spcBef>
+                <a:spcPts val="0"/>
+              </a:spcBef>
+              <a:spcAft>
+                <a:spcPts val="500"/>
+              </a:spcAft>
+              <a:defRPr sz="2100" b="0">
+                <a:solidFill>
+                  <a:srgbClr val="243747"/>
+                </a:solidFill>
+                <a:latin typeface="Aptos"/>
+              </a:defRPr>
+            </a:pPr>
+            <a:r>
+              <a:t>68.36%</a:t>
+            </a:r>
+          </a:p>
+        </p:txBody>
+      </p:sp>
+      <p:sp>
+        <p:nvSpPr>
+          <p:cNvPr id="114" name="Rectangle 113"/>
+          <p:cNvSpPr/>
+          <p:nvPr/>
+        </p:nvSpPr>
+        <p:spPr>
+          <a:xfrm>
+            <a:off x="9043416" y="21003768"/>
+            <a:ext cx="2029968" cy="612648"/>
+          </a:xfrm>
+          <a:prstGeom prst="rect">
+            <a:avLst/>
+          </a:prstGeom>
+          <a:solidFill>
+            <a:srgbClr val="EEF7F3"/>
+          </a:solidFill>
+          <a:ln w="17780">
+            <a:solidFill>
+              <a:srgbClr val="FFFFFF"/>
+            </a:solidFill>
+          </a:ln>
+        </p:spPr>
+        <p:style>
+          <a:lnRef idx="1">
+            <a:schemeClr val="accent1"/>
+          </a:lnRef>
+          <a:fillRef idx="3">
+            <a:schemeClr val="accent1"/>
+          </a:fillRef>
+          <a:effectRef idx="2">
+            <a:schemeClr val="accent1"/>
+          </a:effectRef>
+          <a:fontRef idx="minor">
+            <a:schemeClr val="lt1"/>
+          </a:fontRef>
+        </p:style>
+        <p:txBody>
+          <a:bodyPr rtlCol="0" anchor="ctr"/>
+          <a:lstStyle/>
+          <a:p>
+            <a:pPr algn="ctr"/>
+          </a:p>
+        </p:txBody>
+      </p:sp>
+      <p:sp>
+        <p:nvSpPr>
+          <p:cNvPr id="115" name="TextBox 114"/>
+          <p:cNvSpPr txBox="1"/>
+          <p:nvPr/>
+        </p:nvSpPr>
+        <p:spPr>
+          <a:xfrm>
+            <a:off x="9116568" y="21168360"/>
+            <a:ext cx="1883664" cy="329184"/>
+          </a:xfrm>
+          <a:prstGeom prst="rect">
+            <a:avLst/>
+          </a:prstGeom>
+          <a:noFill/>
+        </p:spPr>
+        <p:txBody>
+          <a:bodyPr wrap="square" lIns="36576" rIns="36576" tIns="13716" bIns="13716">
+            <a:spAutoFit/>
+          </a:bodyPr>
+          <a:lstStyle/>
+          <a:p>
+            <a:pPr algn="ctr">
+              <a:spcBef>
+                <a:spcPts val="0"/>
+              </a:spcBef>
+              <a:spcAft>
+                <a:spcPts val="500"/>
+              </a:spcAft>
+              <a:defRPr sz="2100" b="0">
+                <a:solidFill>
+                  <a:srgbClr val="243747"/>
+                </a:solidFill>
+                <a:latin typeface="Aptos"/>
+              </a:defRPr>
+            </a:pPr>
+            <a:r>
+              <a:t>46.68%</a:t>
+            </a:r>
+          </a:p>
+        </p:txBody>
+      </p:sp>
+      <p:sp>
+        <p:nvSpPr>
+          <p:cNvPr id="116" name="TextBox 115"/>
+          <p:cNvSpPr txBox="1"/>
+          <p:nvPr/>
+        </p:nvSpPr>
+        <p:spPr>
+          <a:xfrm>
+            <a:off x="1234440" y="21790152"/>
+            <a:ext cx="9838944" cy="1042415"/>
+          </a:xfrm>
+          <a:prstGeom prst="rect">
+            <a:avLst/>
+          </a:prstGeom>
+          <a:noFill/>
+        </p:spPr>
+        <p:txBody>
+          <a:bodyPr wrap="square" lIns="36576" rIns="36576" tIns="13716" bIns="13716">
+            <a:spAutoFit/>
+          </a:bodyPr>
+          <a:lstStyle/>
+          <a:p>
+            <a:pPr algn="l">
+              <a:spcBef>
+                <a:spcPts val="0"/>
+              </a:spcBef>
+              <a:spcAft>
+                <a:spcPts val="500"/>
+              </a:spcAft>
+              <a:defRPr sz="2300" b="0">
+                <a:solidFill>
+                  <a:srgbClr val="526779"/>
+                </a:solidFill>
+                <a:latin typeface="Aptos"/>
+              </a:defRPr>
+            </a:pPr>
+            <a:r>
+              <a:t>Same 4,157-image pooled validation split. P/R: confidence 0.25, IoU 0.50. EfficientDet has completed only two rounds; these scores do not establish a final winner.</a:t>
+            </a:r>
+          </a:p>
+        </p:txBody>
+      </p:sp>
+      <p:sp>
+        <p:nvSpPr>
+          <p:cNvPr id="117" name="Rounded Rectangle 116"/>
+          <p:cNvSpPr/>
+          <p:nvPr/>
+        </p:nvSpPr>
+        <p:spPr>
+          <a:xfrm>
+            <a:off x="1234440" y="22969728"/>
+            <a:ext cx="9838944" cy="1444752"/>
+          </a:xfrm>
+          <a:prstGeom prst="roundRect">
+            <a:avLst>
+              <a:gd name="adj" fmla="val 8000"/>
+            </a:avLst>
+          </a:prstGeom>
+          <a:solidFill>
+            <a:srgbClr val="EAF2FA"/>
+          </a:solidFill>
+          <a:ln>
+            <a:noFill/>
+          </a:ln>
+        </p:spPr>
+        <p:style>
+          <a:lnRef idx="1">
+            <a:schemeClr val="accent1"/>
+          </a:lnRef>
+          <a:fillRef idx="3">
+            <a:schemeClr val="accent1"/>
+          </a:fillRef>
+          <a:effectRef idx="2">
+            <a:schemeClr val="accent1"/>
+          </a:effectRef>
+          <a:fontRef idx="minor">
+            <a:schemeClr val="lt1"/>
+          </a:fontRef>
+        </p:style>
+        <p:txBody>
+          <a:bodyPr rtlCol="0" anchor="ctr"/>
+          <a:lstStyle/>
+          <a:p>
+            <a:pPr algn="ctr"/>
+          </a:p>
+        </p:txBody>
+      </p:sp>
+      <p:sp>
+        <p:nvSpPr>
+          <p:cNvPr id="118" name="TextBox 117"/>
+          <p:cNvSpPr txBox="1"/>
+          <p:nvPr/>
+        </p:nvSpPr>
+        <p:spPr>
+          <a:xfrm>
+            <a:off x="1444752" y="23143464"/>
+            <a:ext cx="9418320" cy="374904"/>
+          </a:xfrm>
+          <a:prstGeom prst="rect">
+            <a:avLst/>
+          </a:prstGeom>
+          <a:noFill/>
+        </p:spPr>
+        <p:txBody>
+          <a:bodyPr wrap="square" lIns="36576" rIns="36576" tIns="13716" bIns="13716">
+            <a:spAutoFit/>
+          </a:bodyPr>
+          <a:lstStyle/>
+          <a:p>
+            <a:pPr algn="l">
+              <a:spcBef>
+                <a:spcPts val="0"/>
+              </a:spcBef>
+              <a:spcAft>
+                <a:spcPts val="500"/>
+              </a:spcAft>
+              <a:defRPr sz="2400" b="1">
+                <a:solidFill>
+                  <a:srgbClr val="075D93"/>
+                </a:solidFill>
+                <a:latin typeface="Aptos"/>
+              </a:defRPr>
+            </a:pPr>
+            <a:r>
+              <a:t>HISTORICAL YOLOv8n  •  ROUND 40</a:t>
+            </a:r>
+          </a:p>
+        </p:txBody>
+      </p:sp>
+      <p:sp>
+        <p:nvSpPr>
+          <p:cNvPr id="119" name="TextBox 118"/>
+          <p:cNvSpPr txBox="1"/>
+          <p:nvPr/>
+        </p:nvSpPr>
+        <p:spPr>
+          <a:xfrm>
+            <a:off x="1444752" y="23554944"/>
+            <a:ext cx="9418320" cy="832104"/>
+          </a:xfrm>
+          <a:prstGeom prst="rect">
+            <a:avLst/>
+          </a:prstGeom>
+          <a:noFill/>
+        </p:spPr>
+        <p:txBody>
+          <a:bodyPr wrap="square" lIns="36576" rIns="36576" tIns="13716" bIns="13716">
+            <a:spAutoFit/>
+          </a:bodyPr>
+          <a:lstStyle/>
+          <a:p>
+            <a:pPr algn="l">
+              <a:spcBef>
+                <a:spcPts val="0"/>
+              </a:spcBef>
+              <a:spcAft>
+                <a:spcPts val="500"/>
+              </a:spcAft>
+              <a:defRPr sz="2400" b="0">
+                <a:solidFill>
+                  <a:srgbClr val="075D93"/>
+                </a:solidFill>
+                <a:latin typeface="Aptos"/>
+              </a:defRPr>
+            </a:pPr>
+            <a:r>
+              <a:t>Precision 66.27%    Recall 57.43%</a:t>
+            </a:r>
+          </a:p>
+          <a:p>
+            <a:pPr algn="l">
+              <a:spcBef>
+                <a:spcPts val="0"/>
+              </a:spcBef>
+              <a:spcAft>
+                <a:spcPts val="500"/>
+              </a:spcAft>
+              <a:defRPr sz="2400" b="0">
+                <a:solidFill>
+                  <a:srgbClr val="075D93"/>
+                </a:solidFill>
+                <a:latin typeface="Aptos"/>
+              </a:defRPr>
+            </a:pPr>
+            <a:r>
+              <a:t>mAP50 59.55%    mAP50–95 38.81%</a:t>
+            </a:r>
+          </a:p>
+        </p:txBody>
+      </p:sp>
+      <p:sp>
+        <p:nvSpPr>
+          <p:cNvPr id="120" name="TextBox 119"/>
+          <p:cNvSpPr txBox="1"/>
+          <p:nvPr/>
+        </p:nvSpPr>
+        <p:spPr>
+          <a:xfrm>
+            <a:off x="1234440" y="24588216"/>
+            <a:ext cx="9838944" cy="1024128"/>
+          </a:xfrm>
+          <a:prstGeom prst="rect">
+            <a:avLst/>
+          </a:prstGeom>
+          <a:noFill/>
+        </p:spPr>
+        <p:txBody>
+          <a:bodyPr wrap="square" lIns="36576" rIns="36576" tIns="13716" bIns="13716">
+            <a:spAutoFit/>
+          </a:bodyPr>
+          <a:lstStyle/>
+          <a:p>
+            <a:pPr algn="l">
+              <a:spcBef>
+                <a:spcPts val="0"/>
+              </a:spcBef>
+              <a:spcAft>
+                <a:spcPts val="500"/>
+              </a:spcAft>
+              <a:defRPr sz="2100" b="0">
+                <a:solidFill>
+                  <a:srgbClr val="526779"/>
+                </a:solidFill>
+                <a:latin typeface="Aptos"/>
+              </a:defRPr>
+            </a:pPr>
+            <a:r>
+              <a:t>30-class training; validation-image-weighted native client summaries. A common 24-class evaluation of this checkpoint is pending; the scores above are not directly comparable.</a:t>
+            </a:r>
+          </a:p>
+        </p:txBody>
+      </p:sp>
+      <p:sp>
+        <p:nvSpPr>
+          <p:cNvPr id="121" name="Rounded Rectangle 120"/>
+          <p:cNvSpPr/>
+          <p:nvPr/>
+        </p:nvSpPr>
+        <p:spPr>
+          <a:xfrm>
+            <a:off x="12070080" y="18781776"/>
+            <a:ext cx="3575304" cy="3200400"/>
+          </a:xfrm>
+          <a:prstGeom prst="roundRect">
+            <a:avLst>
+              <a:gd name="adj" fmla="val 8000"/>
+            </a:avLst>
+          </a:prstGeom>
+          <a:solidFill>
+            <a:srgbClr val="243747"/>
+          </a:solidFill>
+          <a:ln>
+            <a:noFill/>
+          </a:ln>
+        </p:spPr>
+        <p:style>
+          <a:lnRef idx="1">
+            <a:schemeClr val="accent1"/>
+          </a:lnRef>
+          <a:fillRef idx="3">
+            <a:schemeClr val="accent1"/>
+          </a:fillRef>
+          <a:effectRef idx="2">
+            <a:schemeClr val="accent1"/>
+          </a:effectRef>
+          <a:fontRef idx="minor">
+            <a:schemeClr val="lt1"/>
+          </a:fontRef>
+        </p:style>
+        <p:txBody>
+          <a:bodyPr rtlCol="0" anchor="ctr"/>
+          <a:lstStyle/>
+          <a:p>
+            <a:pPr algn="ctr"/>
+          </a:p>
+        </p:txBody>
+      </p:sp>
+      <p:sp>
+        <p:nvSpPr>
+          <p:cNvPr id="122" name="Rounded Rectangle 121"/>
+          <p:cNvSpPr/>
+          <p:nvPr/>
+        </p:nvSpPr>
+        <p:spPr>
+          <a:xfrm>
+            <a:off x="12161519" y="18873216"/>
+            <a:ext cx="3392424" cy="3017520"/>
+          </a:xfrm>
+          <a:prstGeom prst="roundRect">
+            <a:avLst>
+              <a:gd name="adj" fmla="val 8000"/>
+            </a:avLst>
+          </a:prstGeom>
+          <a:solidFill>
+            <a:srgbClr val="FFFFFF"/>
+          </a:solidFill>
+          <a:ln>
+            <a:noFill/>
+          </a:ln>
+        </p:spPr>
+        <p:style>
+          <a:lnRef idx="1">
+            <a:schemeClr val="accent1"/>
+          </a:lnRef>
+          <a:fillRef idx="3">
+            <a:schemeClr val="accent1"/>
+          </a:fillRef>
+          <a:effectRef idx="2">
+            <a:schemeClr val="accent1"/>
+          </a:effectRef>
+          <a:fontRef idx="minor">
+            <a:schemeClr val="lt1"/>
+          </a:fontRef>
+        </p:style>
+        <p:txBody>
+          <a:bodyPr rtlCol="0" anchor="ctr"/>
+          <a:lstStyle/>
+          <a:p>
+            <a:pPr algn="ctr"/>
+          </a:p>
+        </p:txBody>
+      </p:sp>
+      <p:sp>
+        <p:nvSpPr>
+          <p:cNvPr id="123" name="Rounded Rectangle 122"/>
+          <p:cNvSpPr/>
+          <p:nvPr/>
+        </p:nvSpPr>
+        <p:spPr>
+          <a:xfrm>
+            <a:off x="13423392" y="18900648"/>
+            <a:ext cx="868680" cy="50292"/>
+          </a:xfrm>
+          <a:prstGeom prst="roundRect">
+            <a:avLst>
+              <a:gd name="adj" fmla="val 8000"/>
+            </a:avLst>
+          </a:prstGeom>
+          <a:solidFill>
+            <a:srgbClr val="243747"/>
+          </a:solidFill>
+          <a:ln>
+            <a:noFill/>
+          </a:ln>
+        </p:spPr>
+        <p:style>
+          <a:lnRef idx="1">
+            <a:schemeClr val="accent1"/>
+          </a:lnRef>
+          <a:fillRef idx="3">
+            <a:schemeClr val="accent1"/>
+          </a:fillRef>
+          <a:effectRef idx="2">
+            <a:schemeClr val="accent1"/>
+          </a:effectRef>
+          <a:fontRef idx="minor">
+            <a:schemeClr val="lt1"/>
+          </a:fontRef>
+        </p:style>
+        <p:txBody>
+          <a:bodyPr rtlCol="0" anchor="ctr"/>
+          <a:lstStyle/>
+          <a:p>
+            <a:pPr algn="ctr"/>
+          </a:p>
+        </p:txBody>
+      </p:sp>
+      <p:pic>
+        <p:nvPicPr>
+          <p:cNvPr id="124" name="Picture 123" descr="sigatoka-673-_jpeg.rf.2dd96f7c2f89eda7b07c37de5aed6319.jpg"/>
+          <p:cNvPicPr>
+            <a:picLocks noChangeAspect="1"/>
+          </p:cNvPicPr>
+          <p:nvPr/>
+        </p:nvPicPr>
+        <p:blipFill>
+          <a:blip r:embed="rId2"/>
+          <a:srcRect t="17622" b="17622"/>
+          <a:stretch>
+            <a:fillRect/>
+          </a:stretch>
+        </p:blipFill>
+        <p:spPr>
+          <a:xfrm>
+            <a:off x="12262104" y="19110960"/>
+            <a:ext cx="3191256" cy="2066543"/>
+          </a:xfrm>
+          <a:prstGeom prst="rect">
+            <a:avLst/>
+          </a:prstGeom>
+        </p:spPr>
+      </p:pic>
+      <p:sp>
+        <p:nvSpPr>
+          <p:cNvPr id="125" name="Rectangle 124"/>
+          <p:cNvSpPr/>
+          <p:nvPr/>
+        </p:nvSpPr>
+        <p:spPr>
+          <a:xfrm>
+            <a:off x="12262104" y="19110960"/>
+            <a:ext cx="3191256" cy="2066543"/>
+          </a:xfrm>
+          <a:prstGeom prst="rect">
+            <a:avLst/>
+          </a:prstGeom>
+          <a:noFill/>
+          <a:ln w="25400">
+            <a:solidFill>
+              <a:srgbClr val="FFE57F"/>
+            </a:solidFill>
+          </a:ln>
+        </p:spPr>
+        <p:style>
+          <a:lnRef idx="1">
+            <a:schemeClr val="accent1"/>
+          </a:lnRef>
+          <a:fillRef idx="3">
+            <a:schemeClr val="accent1"/>
+          </a:fillRef>
+          <a:effectRef idx="2">
+            <a:schemeClr val="accent1"/>
+          </a:effectRef>
+          <a:fontRef idx="minor">
+            <a:schemeClr val="lt1"/>
+          </a:fontRef>
+        </p:style>
+        <p:txBody>
+          <a:bodyPr rtlCol="0" anchor="ctr"/>
+          <a:lstStyle/>
+          <a:p>
+            <a:pPr algn="ctr"/>
+          </a:p>
+        </p:txBody>
+      </p:sp>
+      <p:sp>
+        <p:nvSpPr>
+          <p:cNvPr id="126" name="TextBox 125"/>
+          <p:cNvSpPr txBox="1"/>
+          <p:nvPr/>
+        </p:nvSpPr>
+        <p:spPr>
+          <a:xfrm>
+            <a:off x="12216384" y="21204935"/>
+            <a:ext cx="3282696" cy="356616"/>
+          </a:xfrm>
+          <a:prstGeom prst="rect">
+            <a:avLst/>
+          </a:prstGeom>
+          <a:noFill/>
+        </p:spPr>
+        <p:txBody>
+          <a:bodyPr wrap="square" lIns="36576" rIns="36576" tIns="13716" bIns="13716">
+            <a:spAutoFit/>
+          </a:bodyPr>
+          <a:lstStyle/>
+          <a:p>
+            <a:pPr algn="ctr">
+              <a:spcBef>
+                <a:spcPts val="0"/>
+              </a:spcBef>
+              <a:spcAft>
+                <a:spcPts val="500"/>
+              </a:spcAft>
+              <a:defRPr sz="2000" b="1">
+                <a:solidFill>
+                  <a:srgbClr val="226D4A"/>
+                </a:solidFill>
+                <a:latin typeface="Aptos"/>
+              </a:defRPr>
+            </a:pPr>
+            <a:r>
+              <a:t>Banana</a:t>
+            </a:r>
+          </a:p>
+        </p:txBody>
+      </p:sp>
+      <p:sp>
+        <p:nvSpPr>
+          <p:cNvPr id="127" name="TextBox 126"/>
+          <p:cNvSpPr txBox="1"/>
+          <p:nvPr/>
+        </p:nvSpPr>
+        <p:spPr>
+          <a:xfrm>
+            <a:off x="12216384" y="21607272"/>
+            <a:ext cx="3282696" cy="274320"/>
+          </a:xfrm>
+          <a:prstGeom prst="rect">
+            <a:avLst/>
+          </a:prstGeom>
+          <a:noFill/>
+        </p:spPr>
+        <p:txBody>
+          <a:bodyPr wrap="square" lIns="36576" rIns="36576" tIns="13716" bIns="13716">
+            <a:spAutoFit/>
+          </a:bodyPr>
+          <a:lstStyle/>
+          <a:p>
+            <a:pPr algn="ctr">
+              <a:spcBef>
+                <a:spcPts val="0"/>
+              </a:spcBef>
+              <a:spcAft>
+                <a:spcPts val="500"/>
+              </a:spcAft>
+              <a:defRPr sz="1700" b="0">
+                <a:solidFill>
+                  <a:srgbClr val="526779"/>
+                </a:solidFill>
+                <a:latin typeface="Aptos"/>
+              </a:defRPr>
+            </a:pPr>
+            <a:r>
+              <a:t>Sigatoka</a:t>
+            </a:r>
+          </a:p>
+        </p:txBody>
+      </p:sp>
+      <p:sp>
+        <p:nvSpPr>
+          <p:cNvPr id="128" name="Rounded Rectangle 127"/>
+          <p:cNvSpPr/>
+          <p:nvPr/>
+        </p:nvSpPr>
+        <p:spPr>
+          <a:xfrm>
+            <a:off x="16230600" y="18781776"/>
+            <a:ext cx="3575304" cy="3200400"/>
+          </a:xfrm>
+          <a:prstGeom prst="roundRect">
+            <a:avLst>
+              <a:gd name="adj" fmla="val 8000"/>
+            </a:avLst>
+          </a:prstGeom>
+          <a:solidFill>
+            <a:srgbClr val="243747"/>
+          </a:solidFill>
+          <a:ln>
+            <a:noFill/>
+          </a:ln>
+        </p:spPr>
+        <p:style>
+          <a:lnRef idx="1">
+            <a:schemeClr val="accent1"/>
+          </a:lnRef>
+          <a:fillRef idx="3">
+            <a:schemeClr val="accent1"/>
+          </a:fillRef>
+          <a:effectRef idx="2">
+            <a:schemeClr val="accent1"/>
+          </a:effectRef>
+          <a:fontRef idx="minor">
+            <a:schemeClr val="lt1"/>
+          </a:fontRef>
+        </p:style>
+        <p:txBody>
+          <a:bodyPr rtlCol="0" anchor="ctr"/>
+          <a:lstStyle/>
+          <a:p>
+            <a:pPr algn="ctr"/>
+          </a:p>
+        </p:txBody>
+      </p:sp>
+      <p:sp>
+        <p:nvSpPr>
+          <p:cNvPr id="129" name="Rounded Rectangle 128"/>
+          <p:cNvSpPr/>
+          <p:nvPr/>
+        </p:nvSpPr>
+        <p:spPr>
+          <a:xfrm>
+            <a:off x="16322040" y="18873216"/>
+            <a:ext cx="3392424" cy="3017520"/>
+          </a:xfrm>
+          <a:prstGeom prst="roundRect">
+            <a:avLst>
+              <a:gd name="adj" fmla="val 8000"/>
+            </a:avLst>
+          </a:prstGeom>
+          <a:solidFill>
+            <a:srgbClr val="FFFFFF"/>
+          </a:solidFill>
+          <a:ln>
+            <a:noFill/>
+          </a:ln>
+        </p:spPr>
+        <p:style>
+          <a:lnRef idx="1">
+            <a:schemeClr val="accent1"/>
+          </a:lnRef>
+          <a:fillRef idx="3">
+            <a:schemeClr val="accent1"/>
+          </a:fillRef>
+          <a:effectRef idx="2">
+            <a:schemeClr val="accent1"/>
+          </a:effectRef>
+          <a:fontRef idx="minor">
+            <a:schemeClr val="lt1"/>
+          </a:fontRef>
+        </p:style>
+        <p:txBody>
+          <a:bodyPr rtlCol="0" anchor="ctr"/>
+          <a:lstStyle/>
+          <a:p>
+            <a:pPr algn="ctr"/>
+          </a:p>
+        </p:txBody>
+      </p:sp>
+      <p:sp>
+        <p:nvSpPr>
+          <p:cNvPr id="130" name="Rounded Rectangle 129"/>
+          <p:cNvSpPr/>
+          <p:nvPr/>
+        </p:nvSpPr>
+        <p:spPr>
+          <a:xfrm>
+            <a:off x="17583912" y="18900648"/>
+            <a:ext cx="868680" cy="50292"/>
+          </a:xfrm>
+          <a:prstGeom prst="roundRect">
+            <a:avLst>
+              <a:gd name="adj" fmla="val 8000"/>
+            </a:avLst>
+          </a:prstGeom>
+          <a:solidFill>
+            <a:srgbClr val="243747"/>
+          </a:solidFill>
+          <a:ln>
+            <a:noFill/>
+          </a:ln>
+        </p:spPr>
+        <p:style>
+          <a:lnRef idx="1">
+            <a:schemeClr val="accent1"/>
+          </a:lnRef>
+          <a:fillRef idx="3">
+            <a:schemeClr val="accent1"/>
+          </a:fillRef>
+          <a:effectRef idx="2">
+            <a:schemeClr val="accent1"/>
+          </a:effectRef>
+          <a:fontRef idx="minor">
+            <a:schemeClr val="lt1"/>
+          </a:fontRef>
+        </p:style>
+        <p:txBody>
+          <a:bodyPr rtlCol="0" anchor="ctr"/>
+          <a:lstStyle/>
+          <a:p>
+            <a:pPr algn="ctr"/>
+          </a:p>
+        </p:txBody>
+      </p:sp>
+      <p:pic>
+        <p:nvPicPr>
+          <p:cNvPr id="131" name="Picture 130" descr="Black-Rot-1-_jpeg.rf.2dd972a1b35648047e8dac35f66c81de.jpg"/>
+          <p:cNvPicPr>
+            <a:picLocks noChangeAspect="1"/>
+          </p:cNvPicPr>
+          <p:nvPr/>
+        </p:nvPicPr>
+        <p:blipFill>
+          <a:blip r:embed="rId3"/>
+          <a:srcRect t="17622" b="17622"/>
+          <a:stretch>
+            <a:fillRect/>
+          </a:stretch>
+        </p:blipFill>
+        <p:spPr>
+          <a:xfrm>
+            <a:off x="16422624" y="19110960"/>
+            <a:ext cx="3191256" cy="2066543"/>
+          </a:xfrm>
+          <a:prstGeom prst="rect">
+            <a:avLst/>
+          </a:prstGeom>
+        </p:spPr>
+      </p:pic>
+      <p:sp>
+        <p:nvSpPr>
+          <p:cNvPr id="132" name="Rectangle 131"/>
+          <p:cNvSpPr/>
+          <p:nvPr/>
+        </p:nvSpPr>
+        <p:spPr>
+          <a:xfrm>
+            <a:off x="16422624" y="19110960"/>
+            <a:ext cx="3191256" cy="2066543"/>
+          </a:xfrm>
+          <a:prstGeom prst="rect">
+            <a:avLst/>
+          </a:prstGeom>
+          <a:noFill/>
+          <a:ln w="25400">
+            <a:solidFill>
+              <a:srgbClr val="FFE57F"/>
+            </a:solidFill>
+          </a:ln>
+        </p:spPr>
+        <p:style>
+          <a:lnRef idx="1">
+            <a:schemeClr val="accent1"/>
+          </a:lnRef>
+          <a:fillRef idx="3">
+            <a:schemeClr val="accent1"/>
+          </a:fillRef>
+          <a:effectRef idx="2">
+            <a:schemeClr val="accent1"/>
+          </a:effectRef>
+          <a:fontRef idx="minor">
+            <a:schemeClr val="lt1"/>
+          </a:fontRef>
+        </p:style>
+        <p:txBody>
+          <a:bodyPr rtlCol="0" anchor="ctr"/>
+          <a:lstStyle/>
+          <a:p>
+            <a:pPr algn="ctr"/>
+          </a:p>
+        </p:txBody>
+      </p:sp>
+      <p:sp>
+        <p:nvSpPr>
+          <p:cNvPr id="133" name="TextBox 132"/>
+          <p:cNvSpPr txBox="1"/>
+          <p:nvPr/>
+        </p:nvSpPr>
+        <p:spPr>
+          <a:xfrm>
+            <a:off x="16376904" y="21204935"/>
+            <a:ext cx="3282696" cy="356616"/>
+          </a:xfrm>
+          <a:prstGeom prst="rect">
+            <a:avLst/>
+          </a:prstGeom>
+          <a:noFill/>
+        </p:spPr>
+        <p:txBody>
+          <a:bodyPr wrap="square" lIns="36576" rIns="36576" tIns="13716" bIns="13716">
+            <a:spAutoFit/>
+          </a:bodyPr>
+          <a:lstStyle/>
+          <a:p>
+            <a:pPr algn="ctr">
+              <a:spcBef>
+                <a:spcPts val="0"/>
+              </a:spcBef>
+              <a:spcAft>
+                <a:spcPts val="500"/>
+              </a:spcAft>
+              <a:defRPr sz="2000" b="1">
+                <a:solidFill>
+                  <a:srgbClr val="226D4A"/>
+                </a:solidFill>
+                <a:latin typeface="Aptos"/>
+              </a:defRPr>
+            </a:pPr>
+            <a:r>
+              <a:t>Cauliflower</a:t>
+            </a:r>
+          </a:p>
+        </p:txBody>
+      </p:sp>
+      <p:sp>
+        <p:nvSpPr>
+          <p:cNvPr id="134" name="TextBox 133"/>
+          <p:cNvSpPr txBox="1"/>
+          <p:nvPr/>
+        </p:nvSpPr>
+        <p:spPr>
+          <a:xfrm>
+            <a:off x="16376904" y="21607272"/>
+            <a:ext cx="3282696" cy="274320"/>
+          </a:xfrm>
+          <a:prstGeom prst="rect">
+            <a:avLst/>
+          </a:prstGeom>
+          <a:noFill/>
+        </p:spPr>
+        <p:txBody>
+          <a:bodyPr wrap="square" lIns="36576" rIns="36576" tIns="13716" bIns="13716">
+            <a:spAutoFit/>
+          </a:bodyPr>
+          <a:lstStyle/>
+          <a:p>
+            <a:pPr algn="ctr">
+              <a:spcBef>
+                <a:spcPts val="0"/>
+              </a:spcBef>
+              <a:spcAft>
+                <a:spcPts val="500"/>
+              </a:spcAft>
+              <a:defRPr sz="1700" b="0">
+                <a:solidFill>
+                  <a:srgbClr val="526779"/>
+                </a:solidFill>
+                <a:latin typeface="Aptos"/>
+              </a:defRPr>
+            </a:pPr>
+            <a:r>
+              <a:t>Black Rot</a:t>
+            </a:r>
+          </a:p>
+        </p:txBody>
+      </p:sp>
+      <p:sp>
+        <p:nvSpPr>
+          <p:cNvPr id="135" name="Rounded Rectangle 134"/>
+          <p:cNvSpPr/>
+          <p:nvPr/>
+        </p:nvSpPr>
+        <p:spPr>
+          <a:xfrm>
+            <a:off x="12070080" y="22229064"/>
+            <a:ext cx="3575304" cy="3200400"/>
+          </a:xfrm>
+          <a:prstGeom prst="roundRect">
+            <a:avLst>
+              <a:gd name="adj" fmla="val 8000"/>
+            </a:avLst>
+          </a:prstGeom>
+          <a:solidFill>
+            <a:srgbClr val="243747"/>
+          </a:solidFill>
+          <a:ln>
+            <a:noFill/>
+          </a:ln>
+        </p:spPr>
+        <p:style>
+          <a:lnRef idx="1">
+            <a:schemeClr val="accent1"/>
+          </a:lnRef>
+          <a:fillRef idx="3">
+            <a:schemeClr val="accent1"/>
+          </a:fillRef>
+          <a:effectRef idx="2">
+            <a:schemeClr val="accent1"/>
+          </a:effectRef>
+          <a:fontRef idx="minor">
+            <a:schemeClr val="lt1"/>
+          </a:fontRef>
+        </p:style>
+        <p:txBody>
+          <a:bodyPr rtlCol="0" anchor="ctr"/>
+          <a:lstStyle/>
+          <a:p>
+            <a:pPr algn="ctr"/>
+          </a:p>
+        </p:txBody>
+      </p:sp>
+      <p:sp>
+        <p:nvSpPr>
+          <p:cNvPr id="136" name="Rounded Rectangle 135"/>
+          <p:cNvSpPr/>
+          <p:nvPr/>
+        </p:nvSpPr>
+        <p:spPr>
+          <a:xfrm>
+            <a:off x="12161519" y="22320504"/>
+            <a:ext cx="3392424" cy="3017520"/>
+          </a:xfrm>
+          <a:prstGeom prst="roundRect">
+            <a:avLst>
+              <a:gd name="adj" fmla="val 8000"/>
+            </a:avLst>
+          </a:prstGeom>
+          <a:solidFill>
+            <a:srgbClr val="FFFFFF"/>
+          </a:solidFill>
+          <a:ln>
+            <a:noFill/>
+          </a:ln>
+        </p:spPr>
+        <p:style>
+          <a:lnRef idx="1">
+            <a:schemeClr val="accent1"/>
+          </a:lnRef>
+          <a:fillRef idx="3">
+            <a:schemeClr val="accent1"/>
+          </a:fillRef>
+          <a:effectRef idx="2">
+            <a:schemeClr val="accent1"/>
+          </a:effectRef>
+          <a:fontRef idx="minor">
+            <a:schemeClr val="lt1"/>
+          </a:fontRef>
+        </p:style>
+        <p:txBody>
+          <a:bodyPr rtlCol="0" anchor="ctr"/>
+          <a:lstStyle/>
+          <a:p>
+            <a:pPr algn="ctr"/>
+          </a:p>
+        </p:txBody>
+      </p:sp>
+      <p:sp>
+        <p:nvSpPr>
+          <p:cNvPr id="137" name="Rounded Rectangle 136"/>
+          <p:cNvSpPr/>
+          <p:nvPr/>
+        </p:nvSpPr>
+        <p:spPr>
+          <a:xfrm>
+            <a:off x="13423392" y="22347935"/>
+            <a:ext cx="868680" cy="50292"/>
+          </a:xfrm>
+          <a:prstGeom prst="roundRect">
+            <a:avLst>
+              <a:gd name="adj" fmla="val 8000"/>
+            </a:avLst>
+          </a:prstGeom>
+          <a:solidFill>
+            <a:srgbClr val="243747"/>
+          </a:solidFill>
+          <a:ln>
+            <a:noFill/>
+          </a:ln>
+        </p:spPr>
+        <p:style>
+          <a:lnRef idx="1">
+            <a:schemeClr val="accent1"/>
+          </a:lnRef>
+          <a:fillRef idx="3">
+            <a:schemeClr val="accent1"/>
+          </a:fillRef>
+          <a:effectRef idx="2">
+            <a:schemeClr val="accent1"/>
+          </a:effectRef>
+          <a:fontRef idx="minor">
+            <a:schemeClr val="lt1"/>
+          </a:fontRef>
+        </p:style>
+        <p:txBody>
+          <a:bodyPr rtlCol="0" anchor="ctr"/>
+          <a:lstStyle/>
+          <a:p>
+            <a:pPr algn="ctr"/>
+          </a:p>
+        </p:txBody>
+      </p:sp>
+      <p:pic>
+        <p:nvPicPr>
+          <p:cNvPr id="138" name="Picture 137" descr="Early-Leaf-Spot-52-_jpg.rf.f8fe7a9f6d46cc23f0f6085200b14f38.jpg"/>
+          <p:cNvPicPr>
+            <a:picLocks noChangeAspect="1"/>
+          </p:cNvPicPr>
+          <p:nvPr/>
+        </p:nvPicPr>
+        <p:blipFill>
+          <a:blip r:embed="rId4"/>
+          <a:srcRect t="17622" b="17622"/>
+          <a:stretch>
+            <a:fillRect/>
+          </a:stretch>
+        </p:blipFill>
+        <p:spPr>
+          <a:xfrm>
+            <a:off x="12262104" y="22558248"/>
+            <a:ext cx="3191256" cy="2066543"/>
+          </a:xfrm>
+          <a:prstGeom prst="rect">
+            <a:avLst/>
+          </a:prstGeom>
+        </p:spPr>
+      </p:pic>
+      <p:sp>
+        <p:nvSpPr>
+          <p:cNvPr id="139" name="Rectangle 138"/>
+          <p:cNvSpPr/>
+          <p:nvPr/>
+        </p:nvSpPr>
+        <p:spPr>
+          <a:xfrm>
+            <a:off x="12623613" y="23510492"/>
+            <a:ext cx="618305" cy="665676"/>
+          </a:xfrm>
+          <a:prstGeom prst="rect">
+            <a:avLst/>
+          </a:prstGeom>
+          <a:noFill/>
+          <a:ln w="25400">
+            <a:solidFill>
+              <a:srgbClr val="FFE57F"/>
+            </a:solidFill>
+          </a:ln>
+        </p:spPr>
+        <p:style>
+          <a:lnRef idx="1">
+            <a:schemeClr val="accent1"/>
+          </a:lnRef>
+          <a:fillRef idx="3">
+            <a:schemeClr val="accent1"/>
+          </a:fillRef>
+          <a:effectRef idx="2">
+            <a:schemeClr val="accent1"/>
+          </a:effectRef>
+          <a:fontRef idx="minor">
+            <a:schemeClr val="lt1"/>
+          </a:fontRef>
+        </p:style>
+        <p:txBody>
+          <a:bodyPr rtlCol="0" anchor="ctr"/>
+          <a:lstStyle/>
+          <a:p>
+            <a:pPr algn="ctr"/>
+          </a:p>
+        </p:txBody>
+      </p:sp>
+      <p:sp>
+        <p:nvSpPr>
+          <p:cNvPr id="140" name="TextBox 139"/>
+          <p:cNvSpPr txBox="1"/>
+          <p:nvPr/>
+        </p:nvSpPr>
+        <p:spPr>
+          <a:xfrm>
+            <a:off x="12216384" y="24652223"/>
+            <a:ext cx="3282696" cy="356616"/>
+          </a:xfrm>
+          <a:prstGeom prst="rect">
+            <a:avLst/>
+          </a:prstGeom>
+          <a:noFill/>
+        </p:spPr>
+        <p:txBody>
+          <a:bodyPr wrap="square" lIns="36576" rIns="36576" tIns="13716" bIns="13716">
+            <a:spAutoFit/>
+          </a:bodyPr>
+          <a:lstStyle/>
+          <a:p>
+            <a:pPr algn="ctr">
+              <a:spcBef>
+                <a:spcPts val="0"/>
+              </a:spcBef>
+              <a:spcAft>
+                <a:spcPts val="500"/>
+              </a:spcAft>
+              <a:defRPr sz="2000" b="1">
+                <a:solidFill>
+                  <a:srgbClr val="226D4A"/>
+                </a:solidFill>
+                <a:latin typeface="Aptos"/>
+              </a:defRPr>
+            </a:pPr>
+            <a:r>
+              <a:t>Groundnut</a:t>
+            </a:r>
+          </a:p>
+        </p:txBody>
+      </p:sp>
+      <p:sp>
+        <p:nvSpPr>
+          <p:cNvPr id="141" name="TextBox 140"/>
+          <p:cNvSpPr txBox="1"/>
+          <p:nvPr/>
+        </p:nvSpPr>
+        <p:spPr>
+          <a:xfrm>
+            <a:off x="12216384" y="25054560"/>
+            <a:ext cx="3282696" cy="274320"/>
+          </a:xfrm>
+          <a:prstGeom prst="rect">
+            <a:avLst/>
+          </a:prstGeom>
+          <a:noFill/>
+        </p:spPr>
+        <p:txBody>
+          <a:bodyPr wrap="square" lIns="36576" rIns="36576" tIns="13716" bIns="13716">
+            <a:spAutoFit/>
+          </a:bodyPr>
+          <a:lstStyle/>
+          <a:p>
+            <a:pPr algn="ctr">
+              <a:spcBef>
+                <a:spcPts val="0"/>
+              </a:spcBef>
+              <a:spcAft>
+                <a:spcPts val="500"/>
+              </a:spcAft>
+              <a:defRPr sz="1700" b="0">
+                <a:solidFill>
+                  <a:srgbClr val="526779"/>
+                </a:solidFill>
+                <a:latin typeface="Aptos"/>
+              </a:defRPr>
+            </a:pPr>
+            <a:r>
+              <a:t>Early Leaf Spot</a:t>
+            </a:r>
+          </a:p>
+        </p:txBody>
+      </p:sp>
+      <p:sp>
+        <p:nvSpPr>
+          <p:cNvPr id="142" name="Rounded Rectangle 141"/>
+          <p:cNvSpPr/>
+          <p:nvPr/>
+        </p:nvSpPr>
+        <p:spPr>
+          <a:xfrm>
+            <a:off x="16230600" y="22229064"/>
+            <a:ext cx="3575304" cy="3200400"/>
+          </a:xfrm>
+          <a:prstGeom prst="roundRect">
+            <a:avLst>
+              <a:gd name="adj" fmla="val 8000"/>
+            </a:avLst>
+          </a:prstGeom>
+          <a:solidFill>
+            <a:srgbClr val="243747"/>
+          </a:solidFill>
+          <a:ln>
+            <a:noFill/>
+          </a:ln>
+        </p:spPr>
+        <p:style>
+          <a:lnRef idx="1">
+            <a:schemeClr val="accent1"/>
+          </a:lnRef>
+          <a:fillRef idx="3">
+            <a:schemeClr val="accent1"/>
+          </a:fillRef>
+          <a:effectRef idx="2">
+            <a:schemeClr val="accent1"/>
+          </a:effectRef>
+          <a:fontRef idx="minor">
+            <a:schemeClr val="lt1"/>
+          </a:fontRef>
+        </p:style>
+        <p:txBody>
+          <a:bodyPr rtlCol="0" anchor="ctr"/>
+          <a:lstStyle/>
+          <a:p>
+            <a:pPr algn="ctr"/>
+          </a:p>
+        </p:txBody>
+      </p:sp>
+      <p:sp>
+        <p:nvSpPr>
+          <p:cNvPr id="143" name="Rounded Rectangle 142"/>
+          <p:cNvSpPr/>
+          <p:nvPr/>
+        </p:nvSpPr>
+        <p:spPr>
+          <a:xfrm>
+            <a:off x="16322040" y="22320504"/>
+            <a:ext cx="3392424" cy="3017520"/>
+          </a:xfrm>
+          <a:prstGeom prst="roundRect">
+            <a:avLst>
+              <a:gd name="adj" fmla="val 8000"/>
+            </a:avLst>
+          </a:prstGeom>
+          <a:solidFill>
+            <a:srgbClr val="FFFFFF"/>
+          </a:solidFill>
+          <a:ln>
+            <a:noFill/>
+          </a:ln>
+        </p:spPr>
+        <p:style>
+          <a:lnRef idx="1">
+            <a:schemeClr val="accent1"/>
+          </a:lnRef>
+          <a:fillRef idx="3">
+            <a:schemeClr val="accent1"/>
+          </a:fillRef>
+          <a:effectRef idx="2">
+            <a:schemeClr val="accent1"/>
+          </a:effectRef>
+          <a:fontRef idx="minor">
+            <a:schemeClr val="lt1"/>
+          </a:fontRef>
+        </p:style>
+        <p:txBody>
+          <a:bodyPr rtlCol="0" anchor="ctr"/>
+          <a:lstStyle/>
+          <a:p>
+            <a:pPr algn="ctr"/>
+          </a:p>
+        </p:txBody>
+      </p:sp>
+      <p:sp>
+        <p:nvSpPr>
+          <p:cNvPr id="144" name="Rounded Rectangle 143"/>
+          <p:cNvSpPr/>
+          <p:nvPr/>
+        </p:nvSpPr>
+        <p:spPr>
+          <a:xfrm>
+            <a:off x="17583912" y="22347935"/>
+            <a:ext cx="868680" cy="50292"/>
+          </a:xfrm>
+          <a:prstGeom prst="roundRect">
+            <a:avLst>
+              <a:gd name="adj" fmla="val 8000"/>
+            </a:avLst>
+          </a:prstGeom>
+          <a:solidFill>
+            <a:srgbClr val="243747"/>
+          </a:solidFill>
+          <a:ln>
+            <a:noFill/>
+          </a:ln>
+        </p:spPr>
+        <p:style>
+          <a:lnRef idx="1">
+            <a:schemeClr val="accent1"/>
+          </a:lnRef>
+          <a:fillRef idx="3">
+            <a:schemeClr val="accent1"/>
+          </a:fillRef>
+          <a:effectRef idx="2">
+            <a:schemeClr val="accent1"/>
+          </a:effectRef>
+          <a:fontRef idx="minor">
+            <a:schemeClr val="lt1"/>
+          </a:fontRef>
+        </p:style>
+        <p:txBody>
+          <a:bodyPr rtlCol="0" anchor="ctr"/>
+          <a:lstStyle/>
+          <a:p>
+            <a:pPr algn="ctr"/>
+          </a:p>
+        </p:txBody>
+      </p:sp>
+      <p:pic>
+        <p:nvPicPr>
+          <p:cNvPr id="145" name="Picture 144" descr="Black-Leaf-Spot-419-_jpg.rf.f04b9e5bff3c8b51e64a766ee109eb6e.jpg"/>
+          <p:cNvPicPr>
+            <a:picLocks noChangeAspect="1"/>
+          </p:cNvPicPr>
+          <p:nvPr/>
+        </p:nvPicPr>
+        <p:blipFill>
+          <a:blip r:embed="rId5"/>
+          <a:srcRect t="17622" b="17622"/>
+          <a:stretch>
+            <a:fillRect/>
+          </a:stretch>
+        </p:blipFill>
+        <p:spPr>
+          <a:xfrm>
+            <a:off x="16422624" y="22558248"/>
+            <a:ext cx="3191256" cy="2066543"/>
+          </a:xfrm>
+          <a:prstGeom prst="rect">
+            <a:avLst/>
+          </a:prstGeom>
+        </p:spPr>
+      </p:pic>
+      <p:sp>
+        <p:nvSpPr>
+          <p:cNvPr id="146" name="Rectangle 145"/>
+          <p:cNvSpPr/>
+          <p:nvPr/>
+        </p:nvSpPr>
+        <p:spPr>
+          <a:xfrm>
+            <a:off x="17221684" y="23671301"/>
+            <a:ext cx="1104473" cy="732991"/>
+          </a:xfrm>
+          <a:prstGeom prst="rect">
+            <a:avLst/>
+          </a:prstGeom>
+          <a:noFill/>
+          <a:ln w="25400">
+            <a:solidFill>
+              <a:srgbClr val="FFE57F"/>
+            </a:solidFill>
+          </a:ln>
+        </p:spPr>
+        <p:style>
+          <a:lnRef idx="1">
+            <a:schemeClr val="accent1"/>
+          </a:lnRef>
+          <a:fillRef idx="3">
+            <a:schemeClr val="accent1"/>
+          </a:fillRef>
+          <a:effectRef idx="2">
+            <a:schemeClr val="accent1"/>
+          </a:effectRef>
+          <a:fontRef idx="minor">
+            <a:schemeClr val="lt1"/>
+          </a:fontRef>
+        </p:style>
+        <p:txBody>
+          <a:bodyPr rtlCol="0" anchor="ctr"/>
+          <a:lstStyle/>
+          <a:p>
+            <a:pPr algn="ctr"/>
+          </a:p>
+        </p:txBody>
+      </p:sp>
+      <p:sp>
+        <p:nvSpPr>
+          <p:cNvPr id="147" name="TextBox 146"/>
+          <p:cNvSpPr txBox="1"/>
+          <p:nvPr/>
+        </p:nvSpPr>
+        <p:spPr>
+          <a:xfrm>
+            <a:off x="16376904" y="24652223"/>
+            <a:ext cx="3282696" cy="356616"/>
+          </a:xfrm>
+          <a:prstGeom prst="rect">
+            <a:avLst/>
+          </a:prstGeom>
+          <a:noFill/>
+        </p:spPr>
+        <p:txBody>
+          <a:bodyPr wrap="square" lIns="36576" rIns="36576" tIns="13716" bIns="13716">
+            <a:spAutoFit/>
+          </a:bodyPr>
+          <a:lstStyle/>
+          <a:p>
+            <a:pPr algn="ctr">
+              <a:spcBef>
+                <a:spcPts val="0"/>
+              </a:spcBef>
+              <a:spcAft>
+                <a:spcPts val="500"/>
+              </a:spcAft>
+              <a:defRPr sz="2000" b="1">
+                <a:solidFill>
+                  <a:srgbClr val="226D4A"/>
+                </a:solidFill>
+                <a:latin typeface="Aptos"/>
+              </a:defRPr>
+            </a:pPr>
+            <a:r>
+              <a:t>Radish</a:t>
+            </a:r>
+          </a:p>
+        </p:txBody>
+      </p:sp>
+      <p:sp>
+        <p:nvSpPr>
+          <p:cNvPr id="148" name="TextBox 147"/>
+          <p:cNvSpPr txBox="1"/>
+          <p:nvPr/>
+        </p:nvSpPr>
+        <p:spPr>
+          <a:xfrm>
+            <a:off x="16376904" y="25054560"/>
+            <a:ext cx="3282696" cy="274320"/>
+          </a:xfrm>
+          <a:prstGeom prst="rect">
+            <a:avLst/>
+          </a:prstGeom>
+          <a:noFill/>
+        </p:spPr>
+        <p:txBody>
+          <a:bodyPr wrap="square" lIns="36576" rIns="36576" tIns="13716" bIns="13716">
+            <a:spAutoFit/>
+          </a:bodyPr>
+          <a:lstStyle/>
+          <a:p>
+            <a:pPr algn="ctr">
+              <a:spcBef>
+                <a:spcPts val="0"/>
+              </a:spcBef>
+              <a:spcAft>
+                <a:spcPts val="500"/>
+              </a:spcAft>
+              <a:defRPr sz="1700" b="0">
+                <a:solidFill>
+                  <a:srgbClr val="526779"/>
+                </a:solidFill>
+                <a:latin typeface="Aptos"/>
+              </a:defRPr>
+            </a:pPr>
+            <a:r>
+              <a:t>Black Leaf Spot</a:t>
+            </a:r>
+          </a:p>
+        </p:txBody>
+      </p:sp>
+      <p:sp>
+        <p:nvSpPr>
+          <p:cNvPr id="149" name="TextBox 148"/>
+          <p:cNvSpPr txBox="1"/>
+          <p:nvPr/>
+        </p:nvSpPr>
+        <p:spPr>
+          <a:xfrm>
+            <a:off x="11841480" y="25603200"/>
+            <a:ext cx="8138160" cy="228600"/>
+          </a:xfrm>
+          <a:prstGeom prst="rect">
+            <a:avLst/>
+          </a:prstGeom>
+          <a:noFill/>
+        </p:spPr>
+        <p:txBody>
+          <a:bodyPr wrap="square" lIns="36576" rIns="36576" tIns="13716" bIns="13716">
+            <a:spAutoFit/>
+          </a:bodyPr>
+          <a:lstStyle/>
+          <a:p>
+            <a:pPr algn="ctr">
+              <a:spcBef>
+                <a:spcPts val="0"/>
+              </a:spcBef>
+              <a:spcAft>
+                <a:spcPts val="500"/>
+              </a:spcAft>
+              <a:defRPr sz="1600" b="0">
+                <a:solidFill>
+                  <a:srgbClr val="526779"/>
+                </a:solidFill>
+                <a:latin typeface="Aptos"/>
+              </a:defRPr>
+            </a:pPr>
+            <a:r>
+              <a:t>Labelled validation examples • yellow boxes are ground truth</a:t>
+            </a:r>
+          </a:p>
+        </p:txBody>
+      </p:sp>
+      <p:sp>
+        <p:nvSpPr>
+          <p:cNvPr id="150" name="Rectangle 149"/>
+          <p:cNvSpPr/>
+          <p:nvPr/>
+        </p:nvSpPr>
+        <p:spPr>
+          <a:xfrm>
+            <a:off x="640080" y="26197560"/>
+            <a:ext cx="20103840" cy="22860"/>
+          </a:xfrm>
+          <a:prstGeom prst="rect">
+            <a:avLst/>
+          </a:prstGeom>
+          <a:solidFill>
+            <a:srgbClr val="39BED1"/>
+          </a:solidFill>
+          <a:ln>
+            <a:noFill/>
+          </a:ln>
+        </p:spPr>
+        <p:style>
+          <a:lnRef idx="1">
+            <a:schemeClr val="accent1"/>
+          </a:lnRef>
+          <a:fillRef idx="3">
+            <a:schemeClr val="accent1"/>
+          </a:fillRef>
+          <a:effectRef idx="2">
+            <a:schemeClr val="accent1"/>
+          </a:effectRef>
+          <a:fontRef idx="minor">
+            <a:schemeClr val="lt1"/>
+          </a:fontRef>
+        </p:style>
+        <p:txBody>
+          <a:bodyPr rtlCol="0" anchor="ctr"/>
+          <a:lstStyle/>
+          <a:p>
+            <a:pPr algn="ctr"/>
+          </a:p>
+        </p:txBody>
+      </p:sp>
+      <p:sp>
+        <p:nvSpPr>
+          <p:cNvPr id="151" name="Rectangle 150"/>
+          <p:cNvSpPr/>
+          <p:nvPr/>
+        </p:nvSpPr>
+        <p:spPr>
+          <a:xfrm>
+            <a:off x="10515600" y="26554176"/>
+            <a:ext cx="18288" cy="2834640"/>
+          </a:xfrm>
+          <a:prstGeom prst="rect">
+            <a:avLst/>
+          </a:prstGeom>
+          <a:solidFill>
+            <a:srgbClr val="D8E8ED"/>
+          </a:solidFill>
+          <a:ln>
+            <a:noFill/>
+          </a:ln>
+        </p:spPr>
+        <p:style>
+          <a:lnRef idx="1">
+            <a:schemeClr val="accent1"/>
+          </a:lnRef>
+          <a:fillRef idx="3">
+            <a:schemeClr val="accent1"/>
+          </a:fillRef>
+          <a:effectRef idx="2">
+            <a:schemeClr val="accent1"/>
+          </a:effectRef>
+          <a:fontRef idx="minor">
+            <a:schemeClr val="lt1"/>
+          </a:fontRef>
+        </p:style>
+        <p:txBody>
+          <a:bodyPr rtlCol="0" anchor="ctr"/>
+          <a:lstStyle/>
+          <a:p>
+            <a:pPr algn="ctr"/>
+          </a:p>
+        </p:txBody>
+      </p:sp>
+      <p:sp>
+        <p:nvSpPr>
+          <p:cNvPr id="152" name="TextBox 151"/>
+          <p:cNvSpPr txBox="1"/>
+          <p:nvPr/>
+        </p:nvSpPr>
+        <p:spPr>
+          <a:xfrm>
+            <a:off x="960120" y="26435304"/>
+            <a:ext cx="9144000" cy="457200"/>
+          </a:xfrm>
+          <a:prstGeom prst="rect">
+            <a:avLst/>
+          </a:prstGeom>
+          <a:noFill/>
+        </p:spPr>
+        <p:txBody>
+          <a:bodyPr wrap="square" lIns="36576" rIns="36576" tIns="13716" bIns="13716">
+            <a:spAutoFit/>
+          </a:bodyPr>
+          <a:lstStyle/>
+          <a:p>
+            <a:pPr algn="ctr">
+              <a:spcBef>
+                <a:spcPts val="0"/>
+              </a:spcBef>
+              <a:spcAft>
+                <a:spcPts val="500"/>
+              </a:spcAft>
+              <a:defRPr sz="2600" b="1">
+                <a:solidFill>
+                  <a:srgbClr val="075D93"/>
+                </a:solidFill>
+                <a:latin typeface="Aptos"/>
+              </a:defRPr>
+            </a:pPr>
+            <a:r>
+              <a:t>TECHNOLOGIES USED</a:t>
+            </a:r>
+          </a:p>
+        </p:txBody>
+      </p:sp>
+      <p:sp>
+        <p:nvSpPr>
+          <p:cNvPr id="153" name="TextBox 152"/>
+          <p:cNvSpPr txBox="1"/>
+          <p:nvPr/>
+        </p:nvSpPr>
+        <p:spPr>
+          <a:xfrm>
+            <a:off x="10972800" y="26435304"/>
+            <a:ext cx="9144000" cy="457200"/>
+          </a:xfrm>
+          <a:prstGeom prst="rect">
+            <a:avLst/>
+          </a:prstGeom>
+          <a:noFill/>
+        </p:spPr>
+        <p:txBody>
+          <a:bodyPr wrap="square" lIns="36576" rIns="36576" tIns="13716" bIns="13716">
+            <a:spAutoFit/>
+          </a:bodyPr>
+          <a:lstStyle/>
+          <a:p>
+            <a:pPr algn="ctr">
+              <a:spcBef>
+                <a:spcPts val="0"/>
+              </a:spcBef>
+              <a:spcAft>
+                <a:spcPts val="500"/>
+              </a:spcAft>
+              <a:defRPr sz="2600" b="1">
+                <a:solidFill>
+                  <a:srgbClr val="075D93"/>
+                </a:solidFill>
+                <a:latin typeface="Aptos"/>
+              </a:defRPr>
+            </a:pPr>
+            <a:r>
+              <a:t>SUMMARY</a:t>
+            </a:r>
+          </a:p>
+        </p:txBody>
+      </p:sp>
+      <p:sp>
+        <p:nvSpPr>
+          <p:cNvPr id="154" name="Rounded Rectangle 153"/>
+          <p:cNvSpPr/>
+          <p:nvPr/>
+        </p:nvSpPr>
+        <p:spPr>
+          <a:xfrm>
+            <a:off x="1051560" y="27175968"/>
+            <a:ext cx="4361688" cy="813816"/>
+          </a:xfrm>
+          <a:prstGeom prst="roundRect">
+            <a:avLst>
+              <a:gd name="adj" fmla="val 8000"/>
+            </a:avLst>
+          </a:prstGeom>
+          <a:solidFill>
+            <a:srgbClr val="EEF7F3"/>
+          </a:solidFill>
+          <a:ln>
+            <a:noFill/>
+          </a:ln>
+        </p:spPr>
+        <p:style>
+          <a:lnRef idx="1">
+            <a:schemeClr val="accent1"/>
+          </a:lnRef>
+          <a:fillRef idx="3">
+            <a:schemeClr val="accent1"/>
+          </a:fillRef>
+          <a:effectRef idx="2">
+            <a:schemeClr val="accent1"/>
+          </a:effectRef>
+          <a:fontRef idx="minor">
+            <a:schemeClr val="lt1"/>
+          </a:fontRef>
+        </p:style>
+        <p:txBody>
+          <a:bodyPr rtlCol="0" anchor="ctr"/>
+          <a:lstStyle/>
+          <a:p>
+            <a:pPr algn="ctr"/>
+          </a:p>
+        </p:txBody>
+      </p:sp>
+      <p:sp>
+        <p:nvSpPr>
+          <p:cNvPr id="155" name="TextBox 154"/>
+          <p:cNvSpPr txBox="1"/>
+          <p:nvPr/>
+        </p:nvSpPr>
+        <p:spPr>
+          <a:xfrm>
+            <a:off x="1197863" y="27249119"/>
+            <a:ext cx="4069080" cy="384048"/>
+          </a:xfrm>
+          <a:prstGeom prst="rect">
+            <a:avLst/>
+          </a:prstGeom>
+          <a:noFill/>
+        </p:spPr>
+        <p:txBody>
+          <a:bodyPr wrap="square" lIns="36576" rIns="36576" tIns="13716" bIns="13716">
+            <a:spAutoFit/>
+          </a:bodyPr>
+          <a:lstStyle/>
+          <a:p>
+            <a:pPr algn="l">
+              <a:spcBef>
+                <a:spcPts val="0"/>
+              </a:spcBef>
+              <a:spcAft>
+                <a:spcPts val="500"/>
+              </a:spcAft>
+              <a:defRPr sz="2400" b="1">
+                <a:solidFill>
+                  <a:srgbClr val="226D4A"/>
+                </a:solidFill>
+                <a:latin typeface="Aptos"/>
+              </a:defRPr>
+            </a:pPr>
+            <a:r>
+              <a:t>Python</a:t>
+            </a:r>
+          </a:p>
+        </p:txBody>
+      </p:sp>
+      <p:sp>
+        <p:nvSpPr>
+          <p:cNvPr id="156" name="TextBox 155"/>
+          <p:cNvSpPr txBox="1"/>
+          <p:nvPr/>
+        </p:nvSpPr>
+        <p:spPr>
+          <a:xfrm>
+            <a:off x="1197863" y="27688031"/>
+            <a:ext cx="4069080" cy="256032"/>
+          </a:xfrm>
+          <a:prstGeom prst="rect">
+            <a:avLst/>
+          </a:prstGeom>
+          <a:noFill/>
+        </p:spPr>
+        <p:txBody>
+          <a:bodyPr wrap="square" lIns="36576" rIns="36576" tIns="13716" bIns="13716">
+            <a:spAutoFit/>
+          </a:bodyPr>
+          <a:lstStyle/>
+          <a:p>
+            <a:pPr algn="l">
+              <a:spcBef>
+                <a:spcPts val="0"/>
+              </a:spcBef>
+              <a:spcAft>
+                <a:spcPts val="500"/>
+              </a:spcAft>
+              <a:defRPr sz="1800" b="0">
+                <a:solidFill>
+                  <a:srgbClr val="526779"/>
+                </a:solidFill>
+                <a:latin typeface="Aptos"/>
+              </a:defRPr>
+            </a:pPr>
+            <a:r>
+              <a:t>Data &amp; experiment tools</a:t>
+            </a:r>
+          </a:p>
+        </p:txBody>
+      </p:sp>
+      <p:sp>
+        <p:nvSpPr>
+          <p:cNvPr id="157" name="Rounded Rectangle 156"/>
+          <p:cNvSpPr/>
+          <p:nvPr/>
+        </p:nvSpPr>
+        <p:spPr>
+          <a:xfrm>
+            <a:off x="5696712" y="27175968"/>
+            <a:ext cx="4361688" cy="813816"/>
+          </a:xfrm>
+          <a:prstGeom prst="roundRect">
+            <a:avLst>
+              <a:gd name="adj" fmla="val 8000"/>
+            </a:avLst>
+          </a:prstGeom>
+          <a:solidFill>
+            <a:srgbClr val="EEF7F3"/>
+          </a:solidFill>
+          <a:ln>
+            <a:noFill/>
+          </a:ln>
+        </p:spPr>
+        <p:style>
+          <a:lnRef idx="1">
+            <a:schemeClr val="accent1"/>
+          </a:lnRef>
+          <a:fillRef idx="3">
+            <a:schemeClr val="accent1"/>
+          </a:fillRef>
+          <a:effectRef idx="2">
+            <a:schemeClr val="accent1"/>
+          </a:effectRef>
+          <a:fontRef idx="minor">
+            <a:schemeClr val="lt1"/>
+          </a:fontRef>
+        </p:style>
+        <p:txBody>
+          <a:bodyPr rtlCol="0" anchor="ctr"/>
+          <a:lstStyle/>
+          <a:p>
+            <a:pPr algn="ctr"/>
+          </a:p>
+        </p:txBody>
+      </p:sp>
+      <p:sp>
+        <p:nvSpPr>
+          <p:cNvPr id="158" name="TextBox 157"/>
+          <p:cNvSpPr txBox="1"/>
+          <p:nvPr/>
+        </p:nvSpPr>
+        <p:spPr>
+          <a:xfrm>
+            <a:off x="5843016" y="27249119"/>
+            <a:ext cx="4069080" cy="384048"/>
+          </a:xfrm>
+          <a:prstGeom prst="rect">
+            <a:avLst/>
+          </a:prstGeom>
+          <a:noFill/>
+        </p:spPr>
+        <p:txBody>
+          <a:bodyPr wrap="square" lIns="36576" rIns="36576" tIns="13716" bIns="13716">
+            <a:spAutoFit/>
+          </a:bodyPr>
+          <a:lstStyle/>
+          <a:p>
+            <a:pPr algn="l">
+              <a:spcBef>
+                <a:spcPts val="0"/>
+              </a:spcBef>
+              <a:spcAft>
+                <a:spcPts val="500"/>
+              </a:spcAft>
+              <a:defRPr sz="2400" b="1">
+                <a:solidFill>
+                  <a:srgbClr val="226D4A"/>
+                </a:solidFill>
+                <a:latin typeface="Aptos"/>
+              </a:defRPr>
+            </a:pPr>
+            <a:r>
+              <a:t>PyTorch</a:t>
+            </a:r>
+          </a:p>
+        </p:txBody>
+      </p:sp>
+      <p:sp>
+        <p:nvSpPr>
+          <p:cNvPr id="159" name="TextBox 158"/>
+          <p:cNvSpPr txBox="1"/>
+          <p:nvPr/>
+        </p:nvSpPr>
+        <p:spPr>
+          <a:xfrm>
+            <a:off x="5843016" y="27688031"/>
+            <a:ext cx="4069080" cy="256032"/>
+          </a:xfrm>
+          <a:prstGeom prst="rect">
+            <a:avLst/>
+          </a:prstGeom>
+          <a:noFill/>
+        </p:spPr>
+        <p:txBody>
+          <a:bodyPr wrap="square" lIns="36576" rIns="36576" tIns="13716" bIns="13716">
+            <a:spAutoFit/>
+          </a:bodyPr>
+          <a:lstStyle/>
+          <a:p>
+            <a:pPr algn="l">
+              <a:spcBef>
+                <a:spcPts val="0"/>
+              </a:spcBef>
+              <a:spcAft>
+                <a:spcPts val="500"/>
+              </a:spcAft>
+              <a:defRPr sz="1800" b="0">
+                <a:solidFill>
+                  <a:srgbClr val="526779"/>
+                </a:solidFill>
+                <a:latin typeface="Aptos"/>
+              </a:defRPr>
+            </a:pPr>
+            <a:r>
+              <a:t>Detector implementations</a:t>
+            </a:r>
+          </a:p>
+        </p:txBody>
+      </p:sp>
+      <p:sp>
+        <p:nvSpPr>
+          <p:cNvPr id="160" name="Rounded Rectangle 159"/>
+          <p:cNvSpPr/>
+          <p:nvPr/>
+        </p:nvSpPr>
+        <p:spPr>
+          <a:xfrm>
+            <a:off x="1051560" y="28200096"/>
+            <a:ext cx="4361688" cy="813816"/>
+          </a:xfrm>
+          <a:prstGeom prst="roundRect">
+            <a:avLst>
+              <a:gd name="adj" fmla="val 8000"/>
+            </a:avLst>
+          </a:prstGeom>
+          <a:solidFill>
+            <a:srgbClr val="EEF7F3"/>
+          </a:solidFill>
+          <a:ln>
+            <a:noFill/>
+          </a:ln>
+        </p:spPr>
+        <p:style>
+          <a:lnRef idx="1">
+            <a:schemeClr val="accent1"/>
+          </a:lnRef>
+          <a:fillRef idx="3">
+            <a:schemeClr val="accent1"/>
+          </a:fillRef>
+          <a:effectRef idx="2">
+            <a:schemeClr val="accent1"/>
+          </a:effectRef>
+          <a:fontRef idx="minor">
+            <a:schemeClr val="lt1"/>
+          </a:fontRef>
+        </p:style>
+        <p:txBody>
+          <a:bodyPr rtlCol="0" anchor="ctr"/>
+          <a:lstStyle/>
+          <a:p>
+            <a:pPr algn="ctr"/>
+          </a:p>
+        </p:txBody>
+      </p:sp>
+      <p:sp>
+        <p:nvSpPr>
+          <p:cNvPr id="161" name="TextBox 160"/>
+          <p:cNvSpPr txBox="1"/>
+          <p:nvPr/>
+        </p:nvSpPr>
+        <p:spPr>
+          <a:xfrm>
+            <a:off x="1197863" y="28273248"/>
+            <a:ext cx="4069080" cy="384048"/>
+          </a:xfrm>
+          <a:prstGeom prst="rect">
+            <a:avLst/>
+          </a:prstGeom>
+          <a:noFill/>
+        </p:spPr>
+        <p:txBody>
+          <a:bodyPr wrap="square" lIns="36576" rIns="36576" tIns="13716" bIns="13716">
+            <a:spAutoFit/>
+          </a:bodyPr>
+          <a:lstStyle/>
+          <a:p>
+            <a:pPr algn="l">
+              <a:spcBef>
+                <a:spcPts val="0"/>
+              </a:spcBef>
+              <a:spcAft>
+                <a:spcPts val="500"/>
+              </a:spcAft>
+              <a:defRPr sz="2400" b="1">
+                <a:solidFill>
+                  <a:srgbClr val="226D4A"/>
+                </a:solidFill>
+                <a:latin typeface="Aptos"/>
+              </a:defRPr>
+            </a:pPr>
+            <a:r>
+              <a:t>Ultralytics</a:t>
+            </a:r>
+          </a:p>
+        </p:txBody>
+      </p:sp>
+      <p:sp>
+        <p:nvSpPr>
+          <p:cNvPr id="162" name="TextBox 161"/>
+          <p:cNvSpPr txBox="1"/>
+          <p:nvPr/>
+        </p:nvSpPr>
+        <p:spPr>
+          <a:xfrm>
+            <a:off x="1197863" y="28712160"/>
+            <a:ext cx="4069080" cy="256032"/>
+          </a:xfrm>
+          <a:prstGeom prst="rect">
+            <a:avLst/>
+          </a:prstGeom>
+          <a:noFill/>
+        </p:spPr>
+        <p:txBody>
+          <a:bodyPr wrap="square" lIns="36576" rIns="36576" tIns="13716" bIns="13716">
+            <a:spAutoFit/>
+          </a:bodyPr>
+          <a:lstStyle/>
+          <a:p>
+            <a:pPr algn="l">
+              <a:spcBef>
+                <a:spcPts val="0"/>
+              </a:spcBef>
+              <a:spcAft>
+                <a:spcPts val="500"/>
+              </a:spcAft>
+              <a:defRPr sz="1800" b="0">
+                <a:solidFill>
+                  <a:srgbClr val="526779"/>
+                </a:solidFill>
+                <a:latin typeface="Aptos"/>
+              </a:defRPr>
+            </a:pPr>
+            <a:r>
+              <a:t>Historical YOLOv8n</a:t>
+            </a:r>
+          </a:p>
+        </p:txBody>
+      </p:sp>
+      <p:sp>
+        <p:nvSpPr>
+          <p:cNvPr id="163" name="Rounded Rectangle 162"/>
+          <p:cNvSpPr/>
+          <p:nvPr/>
+        </p:nvSpPr>
+        <p:spPr>
+          <a:xfrm>
+            <a:off x="5696712" y="28200096"/>
+            <a:ext cx="4361688" cy="813816"/>
+          </a:xfrm>
+          <a:prstGeom prst="roundRect">
+            <a:avLst>
+              <a:gd name="adj" fmla="val 8000"/>
+            </a:avLst>
+          </a:prstGeom>
+          <a:solidFill>
+            <a:srgbClr val="EEF7F3"/>
+          </a:solidFill>
+          <a:ln>
+            <a:noFill/>
+          </a:ln>
+        </p:spPr>
+        <p:style>
+          <a:lnRef idx="1">
+            <a:schemeClr val="accent1"/>
+          </a:lnRef>
+          <a:fillRef idx="3">
+            <a:schemeClr val="accent1"/>
+          </a:fillRef>
+          <a:effectRef idx="2">
+            <a:schemeClr val="accent1"/>
+          </a:effectRef>
+          <a:fontRef idx="minor">
+            <a:schemeClr val="lt1"/>
+          </a:fontRef>
+        </p:style>
+        <p:txBody>
+          <a:bodyPr rtlCol="0" anchor="ctr"/>
+          <a:lstStyle/>
+          <a:p>
+            <a:pPr algn="ctr"/>
+          </a:p>
+        </p:txBody>
+      </p:sp>
+      <p:sp>
+        <p:nvSpPr>
+          <p:cNvPr id="164" name="TextBox 163"/>
+          <p:cNvSpPr txBox="1"/>
+          <p:nvPr/>
+        </p:nvSpPr>
+        <p:spPr>
+          <a:xfrm>
+            <a:off x="5843016" y="28273248"/>
+            <a:ext cx="4069080" cy="384048"/>
+          </a:xfrm>
+          <a:prstGeom prst="rect">
+            <a:avLst/>
+          </a:prstGeom>
+          <a:noFill/>
+        </p:spPr>
+        <p:txBody>
+          <a:bodyPr wrap="square" lIns="36576" rIns="36576" tIns="13716" bIns="13716">
+            <a:spAutoFit/>
+          </a:bodyPr>
+          <a:lstStyle/>
+          <a:p>
+            <a:pPr algn="l">
+              <a:spcBef>
+                <a:spcPts val="0"/>
+              </a:spcBef>
+              <a:spcAft>
+                <a:spcPts val="500"/>
+              </a:spcAft>
+              <a:defRPr sz="2400" b="1">
+                <a:solidFill>
+                  <a:srgbClr val="226D4A"/>
+                </a:solidFill>
+                <a:latin typeface="Aptos"/>
+              </a:defRPr>
+            </a:pPr>
+            <a:r>
+              <a:t>Colab + Drive</a:t>
+            </a:r>
+          </a:p>
+        </p:txBody>
+      </p:sp>
+      <p:sp>
+        <p:nvSpPr>
+          <p:cNvPr id="165" name="TextBox 164"/>
+          <p:cNvSpPr txBox="1"/>
+          <p:nvPr/>
+        </p:nvSpPr>
+        <p:spPr>
+          <a:xfrm>
+            <a:off x="5843016" y="28712160"/>
+            <a:ext cx="4069080" cy="256032"/>
+          </a:xfrm>
+          <a:prstGeom prst="rect">
+            <a:avLst/>
+          </a:prstGeom>
+          <a:noFill/>
+        </p:spPr>
+        <p:txBody>
+          <a:bodyPr wrap="square" lIns="36576" rIns="36576" tIns="13716" bIns="13716">
+            <a:spAutoFit/>
+          </a:bodyPr>
+          <a:lstStyle/>
+          <a:p>
+            <a:pPr algn="l">
+              <a:spcBef>
+                <a:spcPts val="0"/>
+              </a:spcBef>
+              <a:spcAft>
+                <a:spcPts val="500"/>
+              </a:spcAft>
+              <a:defRPr sz="1800" b="0">
+                <a:solidFill>
+                  <a:srgbClr val="526779"/>
+                </a:solidFill>
+                <a:latin typeface="Aptos"/>
+              </a:defRPr>
+            </a:pPr>
+            <a:r>
+              <a:t>GPU runs &amp; checkpoints</a:t>
+            </a:r>
+          </a:p>
+        </p:txBody>
+      </p:sp>
+      <p:sp>
+        <p:nvSpPr>
+          <p:cNvPr id="166" name="TextBox 165"/>
+          <p:cNvSpPr txBox="1"/>
+          <p:nvPr/>
+        </p:nvSpPr>
+        <p:spPr>
+          <a:xfrm>
+            <a:off x="11109960" y="27185112"/>
+            <a:ext cx="8842248" cy="2011680"/>
+          </a:xfrm>
+          <a:prstGeom prst="rect">
+            <a:avLst/>
+          </a:prstGeom>
+          <a:noFill/>
+        </p:spPr>
+        <p:txBody>
+          <a:bodyPr wrap="square" lIns="36576" rIns="36576" tIns="13716" bIns="13716">
+            <a:spAutoFit/>
+          </a:bodyPr>
+          <a:lstStyle/>
+          <a:p>
+            <a:pPr algn="l">
+              <a:spcBef>
+                <a:spcPts val="0"/>
+              </a:spcBef>
+              <a:spcAft>
+                <a:spcPts val="500"/>
+              </a:spcAft>
+              <a:defRPr sz="2400" b="0">
+                <a:solidFill>
+                  <a:srgbClr val="243747"/>
+                </a:solidFill>
+                <a:latin typeface="Aptos"/>
+              </a:defRPr>
+            </a:pPr>
+            <a:r>
+              <a:t>The revised study contains four crops and 24 classes. The historical round-40 YOLO baseline is retained. The other three detectors will continue toward round 30. Final conclusions require completed runs, common evaluation and measured deployment cost.</a:t>
+            </a:r>
+          </a:p>
+        </p:txBody>
+      </p:sp>
+      <p:sp>
+        <p:nvSpPr>
+          <p:cNvPr id="167" name="TextBox 166"/>
+          <p:cNvSpPr txBox="1"/>
+          <p:nvPr/>
+        </p:nvSpPr>
+        <p:spPr>
+          <a:xfrm>
+            <a:off x="960120" y="29553408"/>
+            <a:ext cx="19463760" cy="338328"/>
+          </a:xfrm>
+          <a:prstGeom prst="rect">
+            <a:avLst/>
+          </a:prstGeom>
+          <a:noFill/>
+        </p:spPr>
+        <p:txBody>
+          <a:bodyPr wrap="square" lIns="36576" rIns="36576" tIns="13716" bIns="13716">
+            <a:spAutoFit/>
+          </a:bodyPr>
+          <a:lstStyle/>
+          <a:p>
+            <a:pPr algn="ctr">
+              <a:spcBef>
+                <a:spcPts val="0"/>
+              </a:spcBef>
+              <a:spcAft>
+                <a:spcPts val="500"/>
+              </a:spcAft>
+              <a:defRPr sz="2100" b="1">
+                <a:solidFill>
+                  <a:srgbClr val="075D93"/>
+                </a:solidFill>
+                <a:latin typeface="Aptos"/>
+              </a:defRPr>
+            </a:pPr>
+            <a:r>
+              <a:t>NEXT: complete training • evaluate retained YOLO on 24 classes • compare accuracy, speed and size</a:t>
+            </a:r>
+          </a:p>
+        </p:txBody>
+      </p:sp>
+      <p:sp>
+        <p:nvSpPr>
+          <p:cNvPr id="168" name="TextBox 167"/>
+          <p:cNvSpPr txBox="1"/>
+          <p:nvPr/>
+        </p:nvSpPr>
+        <p:spPr>
+          <a:xfrm>
+            <a:off x="960120" y="30028896"/>
+            <a:ext cx="19463760" cy="219456"/>
+          </a:xfrm>
+          <a:prstGeom prst="rect">
+            <a:avLst/>
+          </a:prstGeom>
+          <a:noFill/>
+        </p:spPr>
+        <p:txBody>
+          <a:bodyPr wrap="square" lIns="36576" rIns="36576" tIns="13716" bIns="13716">
+            <a:spAutoFit/>
+          </a:bodyPr>
+          <a:lstStyle/>
+          <a:p>
+            <a:pPr algn="ctr">
+              <a:spcBef>
+                <a:spcPts val="0"/>
+              </a:spcBef>
+              <a:spcAft>
+                <a:spcPts val="500"/>
+              </a:spcAft>
+              <a:defRPr sz="1600" b="0">
+                <a:solidFill>
+                  <a:srgbClr val="526779"/>
+                </a:solidFill>
+                <a:latin typeface="Aptos"/>
+              </a:defRPr>
+            </a:pPr>
+            <a:r>
+              <a:t>DATA: 14,514 train / 4,157 validation / 2,091 test  •  3 simulated clients  •  Progress snapshot: 10 October 2026</a:t>
             </a:r>
           </a:p>
         </p:txBody>
